--- a/ppt/第二次阶段性评审-在线购物系统.pptx
+++ b/ppt/第二次阶段性评审-在线购物系统.pptx
@@ -5,31 +5,31 @@
     <p:sldMasterId id="2147483648" r:id="rId1"/>
   </p:sldMasterIdLst>
   <p:notesMasterIdLst>
-    <p:notesMasterId r:id="rId4"/>
+    <p:notesMasterId r:id="rId24"/>
   </p:notesMasterIdLst>
   <p:sldIdLst>
-    <p:sldId id="256" r:id="rId3"/>
-    <p:sldId id="257" r:id="rId5"/>
-    <p:sldId id="258" r:id="rId6"/>
-    <p:sldId id="259" r:id="rId7"/>
-    <p:sldId id="268" r:id="rId8"/>
-    <p:sldId id="269" r:id="rId9"/>
-    <p:sldId id="270" r:id="rId10"/>
-    <p:sldId id="271" r:id="rId11"/>
-    <p:sldId id="272" r:id="rId12"/>
-    <p:sldId id="280" r:id="rId13"/>
-    <p:sldId id="281" r:id="rId14"/>
-    <p:sldId id="261" r:id="rId15"/>
-    <p:sldId id="273" r:id="rId16"/>
-    <p:sldId id="274" r:id="rId17"/>
-    <p:sldId id="275" r:id="rId18"/>
-    <p:sldId id="276" r:id="rId19"/>
-    <p:sldId id="264" r:id="rId20"/>
-    <p:sldId id="265" r:id="rId21"/>
-    <p:sldId id="277" r:id="rId22"/>
-    <p:sldId id="278" r:id="rId23"/>
-    <p:sldId id="279" r:id="rId24"/>
-    <p:sldId id="266" r:id="rId25"/>
+    <p:sldId id="256" r:id="rId2"/>
+    <p:sldId id="257" r:id="rId3"/>
+    <p:sldId id="258" r:id="rId4"/>
+    <p:sldId id="259" r:id="rId5"/>
+    <p:sldId id="268" r:id="rId6"/>
+    <p:sldId id="269" r:id="rId7"/>
+    <p:sldId id="270" r:id="rId8"/>
+    <p:sldId id="271" r:id="rId9"/>
+    <p:sldId id="272" r:id="rId10"/>
+    <p:sldId id="280" r:id="rId11"/>
+    <p:sldId id="281" r:id="rId12"/>
+    <p:sldId id="261" r:id="rId13"/>
+    <p:sldId id="273" r:id="rId14"/>
+    <p:sldId id="274" r:id="rId15"/>
+    <p:sldId id="275" r:id="rId16"/>
+    <p:sldId id="276" r:id="rId17"/>
+    <p:sldId id="264" r:id="rId18"/>
+    <p:sldId id="265" r:id="rId19"/>
+    <p:sldId id="277" r:id="rId20"/>
+    <p:sldId id="278" r:id="rId21"/>
+    <p:sldId id="279" r:id="rId22"/>
+    <p:sldId id="266" r:id="rId23"/>
   </p:sldIdLst>
   <p:sldSz cx="12192000" cy="6858000"/>
   <p:notesSz cx="6858000" cy="12192000"/>
@@ -125,6 +125,11 @@
       </a:defRPr>
     </a:lvl9pPr>
   </p:defaultTextStyle>
+  <p:extLst>
+    <p:ext uri="{EFAFB233-063F-42B5-8137-9DF3F51BA10A}">
+      <p15:sldGuideLst xmlns:p15="http://schemas.microsoft.com/office/powerpoint/2012/main"/>
+    </p:ext>
+  </p:extLst>
 </p:presentation>
 </file>
 
@@ -313,6 +318,7 @@
           <a:p>
             <a:fld id="{F7021451-1387-4CA6-816F-3879F97B5CBC}" type="slidenum">
               <a:rPr lang="en-US"/>
+              <a:t>1</a:t>
             </a:fld>
             <a:endParaRPr lang="en-US"/>
           </a:p>
@@ -391,6 +397,7 @@
           <a:p>
             <a:fld id="{F7021451-1387-4CA6-816F-3879F97B5CBC}" type="slidenum">
               <a:rPr lang="en-US"/>
+              <a:t>12</a:t>
             </a:fld>
             <a:endParaRPr lang="en-US"/>
           </a:p>
@@ -452,7 +459,9 @@
               <a:t>我叫谭梓良，负责系统功能测试与缺陷修复。Java重构后，我重点检查接口行为和业务状态是否保持一致，整理了84项用例，并编写了对应的Java脚本。发现问题后，我记录复现条件、原因、修改方式和复测结果。另外，我用Java Selenium做了真实网页流程的自动化录屏。我的交付包括用例、脚本、测试报告和缺陷迭代记录四份材料。</a:t>
             </a:r>
           </a:p>
-          <a:p/>
+          <a:p>
+            <a:endParaRPr/>
+          </a:p>
           <a:p>
             <a:r>
               <a:t>资料依据：https://github.com/hds556/se-course-project/blob/b390e8b94d751fec7a96a80a7fda176a12f875c0/ShoppingSystemBlackBoxTest.java</a:t>
@@ -484,7 +493,9 @@
         <p:txBody>
           <a:bodyPr/>
           <a:lstStyle/>
-          <a:p/>
+          <a:p>
+            <a:endParaRPr/>
+          </a:p>
         </p:txBody>
       </p:sp>
     </p:spTree>
@@ -543,7 +554,9 @@
               <a:t>用例没有只停留在正常操作上。我把84项测试拆成这些范围，其中商品、金额和图片有21项，买家意向和冻结有12项，交易状态和递补有8项。边界检查会同时提交合法边界值和刚刚越界的值，例如图片恰好5 MiB与超过1字节。并发场景使用20个买家或两名卖家同时发起请求。每项都能通过AT编号在Java脚本里找到输入和断言。</a:t>
             </a:r>
           </a:p>
-          <a:p/>
+          <a:p>
+            <a:endParaRPr/>
+          </a:p>
           <a:p>
             <a:r>
               <a:t>资料依据：https://github.com/hds556/se-course-project/blob/b390e8b94d751fec7a96a80a7fda176a12f875c0/ShoppingSystemBlackBoxTest.java</a:t>
@@ -570,7 +583,9 @@
         <p:txBody>
           <a:bodyPr/>
           <a:lstStyle/>
-          <a:p/>
+          <a:p>
+            <a:endParaRPr/>
+          </a:p>
         </p:txBody>
       </p:sp>
     </p:spTree>
@@ -629,7 +644,9 @@
               <a:t>这里报告的是最终分支的实际复测结果。我固定了First_accept的b390e8b提交，在独立副本里重新执行全部84项用例，结果84项通过，失败、错误和跳过都为0。测试套件执行70.29秒。本机使用Java25运行，项目编译目标仍为Java17，所以没有把它写成已在Java17运行时验证。结论是已覆盖场景全部通过，压力容量和渗透测试没有纳入。</a:t>
             </a:r>
           </a:p>
-          <a:p/>
+          <a:p>
+            <a:endParaRPr/>
+          </a:p>
           <a:p>
             <a:r>
               <a:t>资料依据：最终提交 https://github.com/hds556/se-course-project/commit/b390e8b94d751fec7a96a80a7fda176a12f875c0</a:t>
@@ -661,7 +678,9 @@
         <p:txBody>
           <a:bodyPr/>
           <a:lstStyle/>
-          <a:p/>
+          <a:p>
+            <a:endParaRPr/>
+          </a:p>
         </p:txBody>
       </p:sp>
     </p:spTree>
@@ -720,7 +739,9 @@
               <a:t>缺陷记录不只写已经修复，还保留问题怎样出现、原因在哪里、改了什么，以及用哪条用例验证。价格问题用5000位数字复测，接口返回400且不留下商品和图片。图片问题统一了上传和读取目录。并发开始交易的问题把锁延续到事务结束，复测得到一个200和一个409。旧数据迁移保留商品和意向的原ID。最终版中这些对应检查都通过。</a:t>
             </a:r>
           </a:p>
-          <a:p/>
+          <a:p>
+            <a:endParaRPr/>
+          </a:p>
           <a:p>
             <a:r>
               <a:t>资料依据：https://github.com/hds556/se-course-project/blob/b390e8b94d751fec7a96a80a7fda176a12f875c0/docs/缺陷迭代记录报告.md</a:t>
@@ -762,7 +783,9 @@
         <p:txBody>
           <a:bodyPr/>
           <a:lstStyle/>
-          <a:p/>
+          <a:p>
+            <a:endParaRPr/>
+          </a:p>
         </p:txBody>
       </p:sp>
     </p:spTree>
@@ -821,7 +844,9 @@
               <a:t>这一页是之前录屏时运行Java Selenium脚本的真实结果。脚本自动打开Edge，完成登录、发布商品、买家提交和查询、冻结恢复、撤销递补以及成交归档。这里是一条端到端脚本中的17个网页检查点，全部通过。截图保留了第一位买家撤销、第二位买家成功和商品进入历史的结果。网页证据对应10月15日的v4，最终分支的84项接口复测在前面单独说明，两者没有混算。</a:t>
             </a:r>
           </a:p>
-          <a:p/>
+          <a:p>
+            <a:endParaRPr/>
+          </a:p>
           <a:p>
             <a:r>
               <a:t>资料依据：work/browser-video/src/test/java/ShoppingBrowserVideoTest.java</a:t>
@@ -858,7 +883,9 @@
         <p:txBody>
           <a:bodyPr/>
           <a:lstStyle/>
-          <a:p/>
+          <a:p>
+            <a:endParaRPr/>
+          </a:p>
         </p:txBody>
       </p:sp>
     </p:spTree>
@@ -934,6 +961,7 @@
           <a:p>
             <a:fld id="{F7021451-1387-4CA6-816F-3879F97B5CBC}" type="slidenum">
               <a:rPr lang="en-US"/>
+              <a:t>22</a:t>
             </a:fld>
             <a:endParaRPr lang="en-US"/>
           </a:p>
@@ -1012,6 +1040,7 @@
           <a:p>
             <a:fld id="{F7021451-1387-4CA6-816F-3879F97B5CBC}" type="slidenum">
               <a:rPr lang="en-US"/>
+              <a:t>2</a:t>
             </a:fld>
             <a:endParaRPr lang="en-US"/>
           </a:p>
@@ -1090,6 +1119,7 @@
           <a:p>
             <a:fld id="{F7021451-1387-4CA6-816F-3879F97B5CBC}" type="slidenum">
               <a:rPr lang="en-US"/>
+              <a:t>3</a:t>
             </a:fld>
             <a:endParaRPr lang="en-US"/>
           </a:p>
@@ -1168,6 +1198,7 @@
           <a:p>
             <a:fld id="{F7021451-1387-4CA6-816F-3879F97B5CBC}" type="slidenum">
               <a:rPr lang="en-US"/>
+              <a:t>4</a:t>
             </a:fld>
             <a:endParaRPr lang="en-US"/>
           </a:p>
@@ -1282,6 +1313,7 @@
           <a:p>
             <a:fld id="{F7021451-1387-4CA6-816F-3879F97B5CBC}" type="slidenum">
               <a:rPr lang="en-US"/>
+              <a:t>5</a:t>
             </a:fld>
             <a:endParaRPr lang="en-US"/>
           </a:p>
@@ -1380,6 +1412,7 @@
           <a:p>
             <a:fld id="{F7021451-1387-4CA6-816F-3879F97B5CBC}" type="slidenum">
               <a:rPr lang="en-US"/>
+              <a:t>6</a:t>
             </a:fld>
             <a:endParaRPr lang="en-US"/>
           </a:p>
@@ -1518,6 +1551,7 @@
           <a:p>
             <a:fld id="{F7021451-1387-4CA6-816F-3879F97B5CBC}" type="slidenum">
               <a:rPr lang="en-US"/>
+              <a:t>7</a:t>
             </a:fld>
             <a:endParaRPr lang="en-US"/>
           </a:p>
@@ -1624,6 +1658,7 @@
           <a:p>
             <a:fld id="{F7021451-1387-4CA6-816F-3879F97B5CBC}" type="slidenum">
               <a:rPr lang="en-US"/>
+              <a:t>8</a:t>
             </a:fld>
             <a:endParaRPr lang="en-US"/>
           </a:p>
@@ -1710,6 +1745,7 @@
           <a:p>
             <a:fld id="{F7021451-1387-4CA6-816F-3879F97B5CBC}" type="slidenum">
               <a:rPr lang="en-US"/>
+              <a:t>9</a:t>
             </a:fld>
             <a:endParaRPr lang="en-US"/>
           </a:p>
@@ -1787,6 +1823,7 @@
           <a:p>
             <a:fld id="{5BCAD085-E8A6-8845-BD4E-CB4CCA059FC4}" type="datetimeFigureOut">
               <a:rPr lang="en-US" smtClean="0"/>
+              <a:t>10/22/2026</a:t>
             </a:fld>
             <a:endParaRPr lang="en-US"/>
           </a:p>
@@ -1828,6 +1865,7 @@
           <a:p>
             <a:fld id="{C1FF6DA9-008F-8B48-92A6-B652298478BF}" type="slidenum">
               <a:rPr lang="en-US" smtClean="0"/>
+              <a:t>‹#›</a:t>
             </a:fld>
             <a:endParaRPr lang="en-US"/>
           </a:p>
@@ -2394,7 +2432,14 @@
         <p:cNvGrpSpPr/>
         <p:nvPr/>
       </p:nvGrpSpPr>
-      <p:grpSpPr/>
+      <p:grpSpPr>
+        <a:xfrm>
+          <a:off x="0" y="0"/>
+          <a:ext cx="0" cy="0"/>
+          <a:chOff x="0" y="0"/>
+          <a:chExt cx="0" cy="0"/>
+        </a:xfrm>
+      </p:grpSpPr>
       <p:sp>
         <p:nvSpPr>
           <p:cNvPr id="2" name="Text 0"/>
@@ -2899,9 +2944,27 @@
             <a:tbl>
               <a:tblPr/>
               <a:tblGrid>
-                <a:gridCol w="1193165"/>
-                <a:gridCol w="1987550"/>
-                <a:gridCol w="2650490"/>
+                <a:gridCol w="1193165">
+                  <a:extLst>
+                    <a:ext uri="{9D8B030D-6E8A-4147-A177-3AD203B41FA5}">
+                      <a16:colId xmlns:a16="http://schemas.microsoft.com/office/drawing/2014/main" val="20000"/>
+                    </a:ext>
+                  </a:extLst>
+                </a:gridCol>
+                <a:gridCol w="1987550">
+                  <a:extLst>
+                    <a:ext uri="{9D8B030D-6E8A-4147-A177-3AD203B41FA5}">
+                      <a16:colId xmlns:a16="http://schemas.microsoft.com/office/drawing/2014/main" val="20001"/>
+                    </a:ext>
+                  </a:extLst>
+                </a:gridCol>
+                <a:gridCol w="2650490">
+                  <a:extLst>
+                    <a:ext uri="{9D8B030D-6E8A-4147-A177-3AD203B41FA5}">
+                      <a16:colId xmlns:a16="http://schemas.microsoft.com/office/drawing/2014/main" val="20002"/>
+                    </a:ext>
+                  </a:extLst>
+                </a:gridCol>
               </a:tblGrid>
               <a:tr h="757555">
                 <a:tc>
@@ -3036,6 +3099,11 @@
                     </a:solidFill>
                   </a:tcPr>
                 </a:tc>
+                <a:extLst>
+                  <a:ext uri="{0D108BD9-81ED-4DB2-BD59-A6C34878D82A}">
+                    <a16:rowId xmlns:a16="http://schemas.microsoft.com/office/drawing/2014/main" val="10000"/>
+                  </a:ext>
+                </a:extLst>
               </a:tr>
               <a:tr h="757555">
                 <a:tc>
@@ -3164,6 +3232,11 @@
                     </a:lnB>
                   </a:tcPr>
                 </a:tc>
+                <a:extLst>
+                  <a:ext uri="{0D108BD9-81ED-4DB2-BD59-A6C34878D82A}">
+                    <a16:rowId xmlns:a16="http://schemas.microsoft.com/office/drawing/2014/main" val="10001"/>
+                  </a:ext>
+                </a:extLst>
               </a:tr>
               <a:tr h="757555">
                 <a:tc>
@@ -3292,6 +3365,11 @@
                     </a:lnB>
                   </a:tcPr>
                 </a:tc>
+                <a:extLst>
+                  <a:ext uri="{0D108BD9-81ED-4DB2-BD59-A6C34878D82A}">
+                    <a16:rowId xmlns:a16="http://schemas.microsoft.com/office/drawing/2014/main" val="10002"/>
+                  </a:ext>
+                </a:extLst>
               </a:tr>
               <a:tr h="757555">
                 <a:tc>
@@ -3420,6 +3498,11 @@
                     </a:lnB>
                   </a:tcPr>
                 </a:tc>
+                <a:extLst>
+                  <a:ext uri="{0D108BD9-81ED-4DB2-BD59-A6C34878D82A}">
+                    <a16:rowId xmlns:a16="http://schemas.microsoft.com/office/drawing/2014/main" val="10003"/>
+                  </a:ext>
+                </a:extLst>
               </a:tr>
               <a:tr h="757555">
                 <a:tc>
@@ -3548,6 +3631,11 @@
                     </a:lnB>
                   </a:tcPr>
                 </a:tc>
+                <a:extLst>
+                  <a:ext uri="{0D108BD9-81ED-4DB2-BD59-A6C34878D82A}">
+                    <a16:rowId xmlns:a16="http://schemas.microsoft.com/office/drawing/2014/main" val="10004"/>
+                  </a:ext>
+                </a:extLst>
               </a:tr>
               <a:tr h="757555">
                 <a:tc>
@@ -3676,6 +3764,11 @@
                     </a:lnB>
                   </a:tcPr>
                 </a:tc>
+                <a:extLst>
+                  <a:ext uri="{0D108BD9-81ED-4DB2-BD59-A6C34878D82A}">
+                    <a16:rowId xmlns:a16="http://schemas.microsoft.com/office/drawing/2014/main" val="10005"/>
+                  </a:ext>
+                </a:extLst>
               </a:tr>
             </a:tbl>
           </a:graphicData>
@@ -3701,6 +3794,7 @@
           <a:bodyPr wrap="square" rtlCol="0">
             <a:spAutoFit/>
           </a:bodyPr>
+          <a:lstStyle/>
           <a:p>
             <a:r>
               <a:rPr lang="en-US" b="1" dirty="0">
@@ -3749,6 +3843,7 @@
           <a:bodyPr wrap="square" rtlCol="0">
             <a:spAutoFit/>
           </a:bodyPr>
+          <a:lstStyle/>
           <a:p>
             <a:r>
               <a:rPr lang="en-US" dirty="0">
@@ -3789,6 +3884,7 @@
           <a:bodyPr wrap="square" rtlCol="0">
             <a:spAutoFit/>
           </a:bodyPr>
+          <a:lstStyle/>
           <a:p>
             <a:r>
               <a:rPr lang="en-US" b="1" dirty="0">
@@ -3802,15 +3898,6 @@
               </a:rPr>
               <a:t>2.ShoppingService</a:t>
             </a:r>
-            <a:endParaRPr lang="en-US" b="1" dirty="0">
-              <a:solidFill>
-                <a:schemeClr val="tx1"/>
-              </a:solidFill>
-              <a:latin typeface="微软雅黑" panose="020B0503020204020204" pitchFamily="34" charset="-122"/>
-              <a:ea typeface="微软雅黑" panose="020B0503020204020204" pitchFamily="34" charset="-122"/>
-              <a:cs typeface="微软雅黑" panose="020B0503020204020204" pitchFamily="34" charset="-120"/>
-              <a:sym typeface="+mn-ea"/>
-            </a:endParaRPr>
           </a:p>
         </p:txBody>
       </p:sp>
@@ -3834,6 +3921,7 @@
           <a:bodyPr wrap="square" rtlCol="0">
             <a:spAutoFit/>
           </a:bodyPr>
+          <a:lstStyle/>
           <a:p>
             <a:r>
               <a:rPr lang="en-US" dirty="0">
@@ -3874,6 +3962,7 @@
           <a:bodyPr wrap="square" rtlCol="0">
             <a:spAutoFit/>
           </a:bodyPr>
+          <a:lstStyle/>
           <a:p>
             <a:pPr algn="l">
               <a:buClrTx/>
@@ -3920,6 +4009,7 @@
           <a:bodyPr wrap="square" rtlCol="0">
             <a:spAutoFit/>
           </a:bodyPr>
+          <a:lstStyle/>
           <a:p>
             <a:r>
               <a:rPr lang="en-US" dirty="0">
@@ -3932,14 +4022,6 @@
               </a:rPr>
               <a:t>应用入口</a:t>
             </a:r>
-            <a:endParaRPr lang="en-US" dirty="0">
-              <a:solidFill>
-                <a:srgbClr val="D4E6F1"/>
-              </a:solidFill>
-              <a:latin typeface="微软雅黑" panose="020B0503020204020204" pitchFamily="34" charset="-122"/>
-              <a:ea typeface="微软雅黑" panose="020B0503020204020204" pitchFamily="34" charset="-122"/>
-              <a:cs typeface="微软雅黑" panose="020B0503020204020204" pitchFamily="34" charset="-120"/>
-            </a:endParaRPr>
           </a:p>
         </p:txBody>
       </p:sp>
@@ -3960,7 +4042,14 @@
         <p:cNvGrpSpPr/>
         <p:nvPr/>
       </p:nvGrpSpPr>
-      <p:grpSpPr/>
+      <p:grpSpPr>
+        <a:xfrm>
+          <a:off x="0" y="0"/>
+          <a:ext cx="0" cy="0"/>
+          <a:chOff x="0" y="0"/>
+          <a:chExt cx="0" cy="0"/>
+        </a:xfrm>
+      </p:grpSpPr>
       <p:sp>
         <p:nvSpPr>
           <p:cNvPr id="3" name="Text 1"/>
@@ -3997,14 +4086,6 @@
               </a:rPr>
               <a:t>接口兼容与关键实现</a:t>
             </a:r>
-            <a:endParaRPr lang="en-US" sz="2700" b="1" dirty="0">
-              <a:solidFill>
-                <a:srgbClr val="122D4E"/>
-              </a:solidFill>
-              <a:latin typeface="微软雅黑" panose="020B0503020204020204" pitchFamily="34" charset="-122"/>
-              <a:ea typeface="微软雅黑" panose="020B0503020204020204" pitchFamily="34" charset="-122"/>
-              <a:cs typeface="微软雅黑" panose="020B0503020204020204" pitchFamily="34" charset="-120"/>
-            </a:endParaRPr>
           </a:p>
         </p:txBody>
       </p:sp>
@@ -4569,6 +4650,7 @@
         </p:spPr>
         <p:txBody>
           <a:bodyPr/>
+          <a:lstStyle/>
           <a:p>
             <a:endParaRPr lang="zh-CN" altLang="en-US"/>
           </a:p>
@@ -4634,6 +4716,7 @@
         </p:spPr>
         <p:txBody>
           <a:bodyPr/>
+          <a:lstStyle/>
           <a:p>
             <a:endParaRPr lang="zh-CN" altLang="en-US"/>
           </a:p>
@@ -4783,6 +4866,7 @@
         </p:spPr>
         <p:txBody>
           <a:bodyPr/>
+          <a:lstStyle/>
           <a:p>
             <a:endParaRPr lang="zh-CN" altLang="en-US"/>
           </a:p>
@@ -4848,6 +4932,7 @@
         </p:spPr>
         <p:txBody>
           <a:bodyPr/>
+          <a:lstStyle/>
           <a:p>
             <a:endParaRPr lang="zh-CN" altLang="en-US"/>
           </a:p>
@@ -5031,6 +5116,7 @@
         </p:spPr>
         <p:txBody>
           <a:bodyPr/>
+          <a:lstStyle/>
           <a:p>
             <a:endParaRPr lang="zh-CN" altLang="en-US"/>
           </a:p>
@@ -5486,6 +5572,7 @@
         </p:spPr>
         <p:txBody>
           <a:bodyPr/>
+          <a:lstStyle/>
           <a:p>
             <a:endParaRPr lang="zh-CN" altLang="en-US"/>
           </a:p>
@@ -6643,13 +6730,6 @@
               </a:rPr>
               <a:t>周展羽：第二次阶段性评审 · 工作概览</a:t>
             </a:r>
-            <a:endParaRPr lang="zh-CN" sz="2700" b="1" dirty="0">
-              <a:solidFill>
-                <a:srgbClr val="122D4E"/>
-              </a:solidFill>
-              <a:latin typeface="微软雅黑" panose="020B0503020204020204" pitchFamily="34" charset="-122"/>
-              <a:ea typeface="微软雅黑" panose="020B0503020204020204" pitchFamily="34" charset="-122"/>
-            </a:endParaRPr>
           </a:p>
         </p:txBody>
       </p:sp>
@@ -6677,7 +6757,9 @@
         <p:txBody>
           <a:bodyPr/>
           <a:lstStyle/>
-          <a:p/>
+          <a:p>
+            <a:endParaRPr/>
+          </a:p>
         </p:txBody>
       </p:sp>
       <p:sp>
@@ -6713,13 +6795,6 @@
               </a:rPr>
               <a:t>软件工程实践 · 第 2 组 · 在线购物系统 MVP</a:t>
             </a:r>
-            <a:endParaRPr lang="zh-CN" sz="900" b="0" dirty="0">
-              <a:solidFill>
-                <a:srgbClr val="64748B"/>
-              </a:solidFill>
-              <a:latin typeface="微软雅黑" panose="020B0503020204020204" pitchFamily="34" charset="-122"/>
-              <a:ea typeface="微软雅黑" panose="020B0503020204020204" pitchFamily="34" charset="-122"/>
-            </a:endParaRPr>
           </a:p>
         </p:txBody>
       </p:sp>
@@ -6752,7 +6827,9 @@
         <p:txBody>
           <a:bodyPr/>
           <a:lstStyle/>
-          <a:p/>
+          <a:p>
+            <a:endParaRPr/>
+          </a:p>
         </p:txBody>
       </p:sp>
       <p:sp>
@@ -6779,7 +6856,9 @@
         <p:txBody>
           <a:bodyPr/>
           <a:lstStyle/>
-          <a:p/>
+          <a:p>
+            <a:endParaRPr/>
+          </a:p>
         </p:txBody>
       </p:sp>
       <p:sp>
@@ -6813,13 +6892,6 @@
               </a:rPr>
               <a:t>① 需求规格修订 · 依据评审意见</a:t>
             </a:r>
-            <a:endParaRPr lang="zh-CN" sz="1800" b="1" dirty="0">
-              <a:solidFill>
-                <a:srgbClr val="122D4E"/>
-              </a:solidFill>
-              <a:latin typeface="微软雅黑" panose="020B0503020204020204" pitchFamily="34" charset="-122"/>
-              <a:ea typeface="微软雅黑" panose="020B0503020204020204" pitchFamily="34" charset="-122"/>
-            </a:endParaRPr>
           </a:p>
         </p:txBody>
       </p:sp>
@@ -6854,13 +6926,6 @@
               </a:rPr>
               <a:t>补齐 4 项输入约束：价格、名称、描述、新密码；</a:t>
             </a:r>
-            <a:endParaRPr lang="zh-CN" sz="1300" b="0" dirty="0">
-              <a:solidFill>
-                <a:srgbClr val="1F2937"/>
-              </a:solidFill>
-              <a:latin typeface="微软雅黑" panose="020B0503020204020204" pitchFamily="34" charset="-122"/>
-              <a:ea typeface="微软雅黑" panose="020B0503020204020204" pitchFamily="34" charset="-122"/>
-            </a:endParaRPr>
           </a:p>
           <a:p>
             <a:pPr algn="l"/>
@@ -6874,13 +6939,6 @@
               </a:rPr>
               <a:t>SRS 由 V1.4 升至 V1.5，四项改动逐条写入修订记录。</a:t>
             </a:r>
-            <a:endParaRPr lang="zh-CN" sz="1300" b="0" dirty="0">
-              <a:solidFill>
-                <a:srgbClr val="1F2937"/>
-              </a:solidFill>
-              <a:latin typeface="微软雅黑" panose="020B0503020204020204" pitchFamily="34" charset="-122"/>
-              <a:ea typeface="微软雅黑" panose="020B0503020204020204" pitchFamily="34" charset="-122"/>
-            </a:endParaRPr>
           </a:p>
         </p:txBody>
       </p:sp>
@@ -6915,13 +6973,6 @@
               </a:rPr>
               <a:t>依据 第 1 次评审意见 + DEF-001 迭代结论</a:t>
             </a:r>
-            <a:endParaRPr lang="zh-CN" sz="1100" b="0" dirty="0">
-              <a:solidFill>
-                <a:srgbClr val="2563EB"/>
-              </a:solidFill>
-              <a:latin typeface="微软雅黑" panose="020B0503020204020204" pitchFamily="34" charset="-122"/>
-              <a:ea typeface="微软雅黑" panose="020B0503020204020204" pitchFamily="34" charset="-122"/>
-            </a:endParaRPr>
           </a:p>
         </p:txBody>
       </p:sp>
@@ -6954,7 +7005,9 @@
         <p:txBody>
           <a:bodyPr/>
           <a:lstStyle/>
-          <a:p/>
+          <a:p>
+            <a:endParaRPr/>
+          </a:p>
         </p:txBody>
       </p:sp>
       <p:sp>
@@ -6981,7 +7034,9 @@
         <p:txBody>
           <a:bodyPr/>
           <a:lstStyle/>
-          <a:p/>
+          <a:p>
+            <a:endParaRPr/>
+          </a:p>
         </p:txBody>
       </p:sp>
       <p:sp>
@@ -7015,13 +7070,6 @@
               </a:rPr>
               <a:t>② 接入数据库 · SQLite</a:t>
             </a:r>
-            <a:endParaRPr lang="zh-CN" sz="1800" b="1" dirty="0">
-              <a:solidFill>
-                <a:srgbClr val="122D4E"/>
-              </a:solidFill>
-              <a:latin typeface="微软雅黑" panose="020B0503020204020204" pitchFamily="34" charset="-122"/>
-              <a:ea typeface="微软雅黑" panose="020B0503020204020204" pitchFamily="34" charset="-122"/>
-            </a:endParaRPr>
           </a:p>
         </p:txBody>
       </p:sp>
@@ -7056,13 +7104,6 @@
               </a:rPr>
               <a:t>Java 17 + Spring Boot 3.4 + JPA / Hibernate 6；</a:t>
             </a:r>
-            <a:endParaRPr lang="zh-CN" sz="1300" b="0" dirty="0">
-              <a:solidFill>
-                <a:srgbClr val="1F2937"/>
-              </a:solidFill>
-              <a:latin typeface="微软雅黑" panose="020B0503020204020204" pitchFamily="34" charset="-122"/>
-              <a:ea typeface="微软雅黑" panose="020B0503020204020204" pitchFamily="34" charset="-122"/>
-            </a:endParaRPr>
           </a:p>
           <a:p>
             <a:pPr algn="l"/>
@@ -7076,13 +7117,6 @@
               </a:rPr>
               <a:t>三张表自动建表，旧 data.json 一次性迁移且不覆盖。</a:t>
             </a:r>
-            <a:endParaRPr lang="zh-CN" sz="1300" b="0" dirty="0">
-              <a:solidFill>
-                <a:srgbClr val="1F2937"/>
-              </a:solidFill>
-              <a:latin typeface="微软雅黑" panose="020B0503020204020204" pitchFamily="34" charset="-122"/>
-              <a:ea typeface="微软雅黑" panose="020B0503020204020204" pitchFamily="34" charset="-122"/>
-            </a:endParaRPr>
           </a:p>
         </p:txBody>
       </p:sp>
@@ -7117,13 +7151,6 @@
               </a:rPr>
               <a:t>commit 943418e · 2026-10-12</a:t>
             </a:r>
-            <a:endParaRPr lang="zh-CN" sz="1100" b="0" dirty="0">
-              <a:solidFill>
-                <a:srgbClr val="2563EB"/>
-              </a:solidFill>
-              <a:latin typeface="微软雅黑" panose="020B0503020204020204" pitchFamily="34" charset="-122"/>
-              <a:ea typeface="微软雅黑" panose="020B0503020204020204" pitchFamily="34" charset="-122"/>
-            </a:endParaRPr>
           </a:p>
         </p:txBody>
       </p:sp>
@@ -7156,7 +7183,9 @@
         <p:txBody>
           <a:bodyPr/>
           <a:lstStyle/>
-          <a:p/>
+          <a:p>
+            <a:endParaRPr/>
+          </a:p>
         </p:txBody>
       </p:sp>
       <p:sp>
@@ -7183,7 +7212,9 @@
         <p:txBody>
           <a:bodyPr/>
           <a:lstStyle/>
-          <a:p/>
+          <a:p>
+            <a:endParaRPr/>
+          </a:p>
         </p:txBody>
       </p:sp>
       <p:sp>
@@ -7217,13 +7248,6 @@
               </a:rPr>
               <a:t>本阶段成果物</a:t>
             </a:r>
-            <a:endParaRPr lang="zh-CN" sz="1800" b="1" dirty="0">
-              <a:solidFill>
-                <a:srgbClr val="122D4E"/>
-              </a:solidFill>
-              <a:latin typeface="微软雅黑" panose="020B0503020204020204" pitchFamily="34" charset="-122"/>
-              <a:ea typeface="微软雅黑" panose="020B0503020204020204" pitchFamily="34" charset="-122"/>
-            </a:endParaRPr>
           </a:p>
         </p:txBody>
       </p:sp>
@@ -7258,13 +7282,6 @@
               </a:rPr>
               <a:t>需求规格说明书 V1.5（2026-10-21）</a:t>
             </a:r>
-            <a:endParaRPr lang="zh-CN" sz="1300" b="0" dirty="0">
-              <a:solidFill>
-                <a:srgbClr val="1F2937"/>
-              </a:solidFill>
-              <a:latin typeface="微软雅黑" panose="020B0503020204020204" pitchFamily="34" charset="-122"/>
-              <a:ea typeface="微软雅黑" panose="020B0503020204020204" pitchFamily="34" charset="-122"/>
-            </a:endParaRPr>
           </a:p>
           <a:p>
             <a:pPr algn="l"/>
@@ -7278,13 +7295,6 @@
               </a:rPr>
               <a:t>data/shop.db：3 张表 + 3 个索引</a:t>
             </a:r>
-            <a:endParaRPr lang="zh-CN" sz="1300" b="0" dirty="0">
-              <a:solidFill>
-                <a:srgbClr val="1F2937"/>
-              </a:solidFill>
-              <a:latin typeface="微软雅黑" panose="020B0503020204020204" pitchFamily="34" charset="-122"/>
-              <a:ea typeface="微软雅黑" panose="020B0503020204020204" pitchFamily="34" charset="-122"/>
-            </a:endParaRPr>
           </a:p>
           <a:p>
             <a:pPr algn="l"/>
@@ -7298,13 +7308,6 @@
               </a:rPr>
               <a:t>docs/ 数据库构建说明.md</a:t>
             </a:r>
-            <a:endParaRPr lang="zh-CN" sz="1300" b="0" dirty="0">
-              <a:solidFill>
-                <a:srgbClr val="1F2937"/>
-              </a:solidFill>
-              <a:latin typeface="微软雅黑" panose="020B0503020204020204" pitchFamily="34" charset="-122"/>
-              <a:ea typeface="微软雅黑" panose="020B0503020204020204" pitchFamily="34" charset="-122"/>
-            </a:endParaRPr>
           </a:p>
           <a:p>
             <a:pPr algn="l"/>
@@ -7318,13 +7321,6 @@
               </a:rPr>
               <a:t>DataMigrationRunner.java</a:t>
             </a:r>
-            <a:endParaRPr lang="zh-CN" sz="1300" b="0" dirty="0">
-              <a:solidFill>
-                <a:srgbClr val="1F2937"/>
-              </a:solidFill>
-              <a:latin typeface="微软雅黑" panose="020B0503020204020204" pitchFamily="34" charset="-122"/>
-              <a:ea typeface="微软雅黑" panose="020B0503020204020204" pitchFamily="34" charset="-122"/>
-            </a:endParaRPr>
           </a:p>
         </p:txBody>
       </p:sp>
@@ -7359,13 +7355,6 @@
               </a:rPr>
               <a:t>文档随仓库 docs/ 与 Wiki 同步</a:t>
             </a:r>
-            <a:endParaRPr lang="zh-CN" sz="1000" b="0" dirty="0">
-              <a:solidFill>
-                <a:srgbClr val="64748B"/>
-              </a:solidFill>
-              <a:latin typeface="微软雅黑" panose="020B0503020204020204" pitchFamily="34" charset="-122"/>
-              <a:ea typeface="微软雅黑" panose="020B0503020204020204" pitchFamily="34" charset="-122"/>
-            </a:endParaRPr>
           </a:p>
         </p:txBody>
       </p:sp>
@@ -7400,13 +7389,6 @@
               </a:rPr>
               <a:t>4</a:t>
             </a:r>
-            <a:endParaRPr lang="zh-CN" sz="3600" b="1" dirty="0">
-              <a:solidFill>
-                <a:srgbClr val="2563EB"/>
-              </a:solidFill>
-              <a:latin typeface="微软雅黑" panose="020B0503020204020204" pitchFamily="34" charset="-122"/>
-              <a:ea typeface="微软雅黑" panose="020B0503020204020204" pitchFamily="34" charset="-122"/>
-            </a:endParaRPr>
           </a:p>
         </p:txBody>
       </p:sp>
@@ -7441,13 +7423,6 @@
               </a:rPr>
               <a:t>条输入约束补齐</a:t>
             </a:r>
-            <a:endParaRPr lang="zh-CN" sz="1100" b="0" dirty="0">
-              <a:solidFill>
-                <a:srgbClr val="64748B"/>
-              </a:solidFill>
-              <a:latin typeface="微软雅黑" panose="020B0503020204020204" pitchFamily="34" charset="-122"/>
-              <a:ea typeface="微软雅黑" panose="020B0503020204020204" pitchFamily="34" charset="-122"/>
-            </a:endParaRPr>
           </a:p>
         </p:txBody>
       </p:sp>
@@ -7482,13 +7457,6 @@
               </a:rPr>
               <a:t>3</a:t>
             </a:r>
-            <a:endParaRPr lang="zh-CN" sz="3600" b="1" dirty="0">
-              <a:solidFill>
-                <a:srgbClr val="2563EB"/>
-              </a:solidFill>
-              <a:latin typeface="微软雅黑" panose="020B0503020204020204" pitchFamily="34" charset="-122"/>
-              <a:ea typeface="微软雅黑" panose="020B0503020204020204" pitchFamily="34" charset="-122"/>
-            </a:endParaRPr>
           </a:p>
         </p:txBody>
       </p:sp>
@@ -7523,13 +7491,6 @@
               </a:rPr>
               <a:t>张数据表（含索引）</a:t>
             </a:r>
-            <a:endParaRPr lang="zh-CN" sz="1100" b="0" dirty="0">
-              <a:solidFill>
-                <a:srgbClr val="64748B"/>
-              </a:solidFill>
-              <a:latin typeface="微软雅黑" panose="020B0503020204020204" pitchFamily="34" charset="-122"/>
-              <a:ea typeface="微软雅黑" panose="020B0503020204020204" pitchFamily="34" charset="-122"/>
-            </a:endParaRPr>
           </a:p>
         </p:txBody>
       </p:sp>
@@ -7564,13 +7525,6 @@
               </a:rPr>
               <a:t>1</a:t>
             </a:r>
-            <a:endParaRPr lang="zh-CN" sz="3600" b="1" dirty="0">
-              <a:solidFill>
-                <a:srgbClr val="2563EB"/>
-              </a:solidFill>
-              <a:latin typeface="微软雅黑" panose="020B0503020204020204" pitchFamily="34" charset="-122"/>
-              <a:ea typeface="微软雅黑" panose="020B0503020204020204" pitchFamily="34" charset="-122"/>
-            </a:endParaRPr>
           </a:p>
         </p:txBody>
       </p:sp>
@@ -7605,13 +7559,6 @@
               </a:rPr>
               <a:t>次升版（V1.4 → V1.5）</a:t>
             </a:r>
-            <a:endParaRPr lang="zh-CN" sz="1100" b="0" dirty="0">
-              <a:solidFill>
-                <a:srgbClr val="64748B"/>
-              </a:solidFill>
-              <a:latin typeface="微软雅黑" panose="020B0503020204020204" pitchFamily="34" charset="-122"/>
-              <a:ea typeface="微软雅黑" panose="020B0503020204020204" pitchFamily="34" charset="-122"/>
-            </a:endParaRPr>
           </a:p>
         </p:txBody>
       </p:sp>
@@ -7646,13 +7593,6 @@
               </a:rPr>
               <a:t>同一条约束，需求文档 = 浏览器端 = 服务端，三处口径一致</a:t>
             </a:r>
-            <a:endParaRPr lang="zh-CN" sz="1000" b="0" dirty="0">
-              <a:solidFill>
-                <a:srgbClr val="64748B"/>
-              </a:solidFill>
-              <a:latin typeface="微软雅黑" panose="020B0503020204020204" pitchFamily="34" charset="-122"/>
-              <a:ea typeface="微软雅黑" panose="020B0503020204020204" pitchFamily="34" charset="-122"/>
-            </a:endParaRPr>
           </a:p>
         </p:txBody>
       </p:sp>
@@ -7687,13 +7627,6 @@
               </a:rPr>
               <a:t>已完成：SRS V1.5 定稿 · 84 项自动化回归全部通过 · 服务端价格常量与前端口径对齐</a:t>
             </a:r>
-            <a:endParaRPr lang="zh-CN" sz="1000" b="0" dirty="0">
-              <a:solidFill>
-                <a:srgbClr val="10895E"/>
-              </a:solidFill>
-              <a:latin typeface="微软雅黑" panose="020B0503020204020204" pitchFamily="34" charset="-122"/>
-              <a:ea typeface="微软雅黑" panose="020B0503020204020204" pitchFamily="34" charset="-122"/>
-            </a:endParaRPr>
           </a:p>
         </p:txBody>
       </p:sp>
@@ -7753,15 +7686,8 @@
                 <a:latin typeface="微软雅黑" panose="020B0503020204020204" pitchFamily="34" charset="-122"/>
                 <a:ea typeface="微软雅黑" panose="020B0503020204020204" pitchFamily="34" charset="-122"/>
               </a:rPr>
-              <a:t>周展羽：评审意见 → 需求规格修订</a:t>
-            </a:r>
-            <a:endParaRPr lang="zh-CN" sz="2700" b="1" dirty="0">
-              <a:solidFill>
-                <a:srgbClr val="122D4E"/>
-              </a:solidFill>
-              <a:latin typeface="微软雅黑" panose="020B0503020204020204" pitchFamily="34" charset="-122"/>
-              <a:ea typeface="微软雅黑" panose="020B0503020204020204" pitchFamily="34" charset="-122"/>
-            </a:endParaRPr>
+              <a:t>评审意见 → 需求规格修订</a:t>
+            </a:r>
           </a:p>
         </p:txBody>
       </p:sp>
@@ -7789,7 +7715,9 @@
         <p:txBody>
           <a:bodyPr/>
           <a:lstStyle/>
-          <a:p/>
+          <a:p>
+            <a:endParaRPr/>
+          </a:p>
         </p:txBody>
       </p:sp>
       <p:sp>
@@ -7825,13 +7753,6 @@
               </a:rPr>
               <a:t>软件工程实践 · 第 2 组 · 在线购物系统 MVP</a:t>
             </a:r>
-            <a:endParaRPr lang="zh-CN" sz="900" b="0" dirty="0">
-              <a:solidFill>
-                <a:srgbClr val="64748B"/>
-              </a:solidFill>
-              <a:latin typeface="微软雅黑" panose="020B0503020204020204" pitchFamily="34" charset="-122"/>
-              <a:ea typeface="微软雅黑" panose="020B0503020204020204" pitchFamily="34" charset="-122"/>
-            </a:endParaRPr>
           </a:p>
         </p:txBody>
       </p:sp>
@@ -7864,7 +7785,9 @@
         <p:txBody>
           <a:bodyPr/>
           <a:lstStyle/>
-          <a:p/>
+          <a:p>
+            <a:endParaRPr/>
+          </a:p>
         </p:txBody>
       </p:sp>
       <p:sp>
@@ -7891,7 +7814,9 @@
         <p:txBody>
           <a:bodyPr/>
           <a:lstStyle/>
-          <a:p/>
+          <a:p>
+            <a:endParaRPr/>
+          </a:p>
         </p:txBody>
       </p:sp>
       <p:sp>
@@ -7925,13 +7850,6 @@
               </a:rPr>
               <a:t>第 1 次评审意见</a:t>
             </a:r>
-            <a:endParaRPr lang="zh-CN" sz="1800" b="1" dirty="0">
-              <a:solidFill>
-                <a:srgbClr val="122D4E"/>
-              </a:solidFill>
-              <a:latin typeface="微软雅黑" panose="020B0503020204020204" pitchFamily="34" charset="-122"/>
-              <a:ea typeface="微软雅黑" panose="020B0503020204020204" pitchFamily="34" charset="-122"/>
-            </a:endParaRPr>
           </a:p>
         </p:txBody>
       </p:sp>
@@ -7966,13 +7884,6 @@
               </a:rPr>
               <a:t>「输入字段检查要在前端做好，并在需求文档里说明」—— 实测 5000 位价格，一路提交到后端才被判定。</a:t>
             </a:r>
-            <a:endParaRPr lang="zh-CN" sz="1150" b="0" dirty="0">
-              <a:solidFill>
-                <a:srgbClr val="64748B"/>
-              </a:solidFill>
-              <a:latin typeface="微软雅黑" panose="020B0503020204020204" pitchFamily="34" charset="-122"/>
-              <a:ea typeface="微软雅黑" panose="020B0503020204020204" pitchFamily="34" charset="-122"/>
-            </a:endParaRPr>
           </a:p>
         </p:txBody>
       </p:sp>
@@ -8007,13 +7918,6 @@
               </a:rPr>
               <a:t>V1.4 → V1.5：4 项输入字段约束</a:t>
             </a:r>
-            <a:endParaRPr lang="zh-CN" sz="1800" b="1" dirty="0">
-              <a:solidFill>
-                <a:srgbClr val="122D4E"/>
-              </a:solidFill>
-              <a:latin typeface="微软雅黑" panose="020B0503020204020204" pitchFamily="34" charset="-122"/>
-              <a:ea typeface="微软雅黑" panose="020B0503020204020204" pitchFamily="34" charset="-122"/>
-            </a:endParaRPr>
           </a:p>
         </p:txBody>
       </p:sp>
@@ -8046,7 +7950,9 @@
         <p:txBody>
           <a:bodyPr/>
           <a:lstStyle/>
-          <a:p/>
+          <a:p>
+            <a:endParaRPr/>
+          </a:p>
         </p:txBody>
       </p:sp>
       <p:sp>
@@ -8073,7 +7979,9 @@
         <p:txBody>
           <a:bodyPr/>
           <a:lstStyle/>
-          <a:p/>
+          <a:p>
+            <a:endParaRPr/>
+          </a:p>
         </p:txBody>
       </p:sp>
       <p:sp>
@@ -8107,13 +8015,6 @@
               </a:rPr>
               <a:t>价格</a:t>
             </a:r>
-            <a:endParaRPr lang="zh-CN" sz="1300" b="1" dirty="0">
-              <a:solidFill>
-                <a:srgbClr val="122D4E"/>
-              </a:solidFill>
-              <a:latin typeface="微软雅黑" panose="020B0503020204020204" pitchFamily="34" charset="-122"/>
-              <a:ea typeface="微软雅黑" panose="020B0503020204020204" pitchFamily="34" charset="-122"/>
-            </a:endParaRPr>
           </a:p>
         </p:txBody>
       </p:sp>
@@ -8148,13 +8049,6 @@
               </a:rPr>
               <a:t>无上限</a:t>
             </a:r>
-            <a:endParaRPr lang="zh-CN" sz="1000" b="0" dirty="0">
-              <a:solidFill>
-                <a:srgbClr val="64748B"/>
-              </a:solidFill>
-              <a:latin typeface="微软雅黑" panose="020B0503020204020204" pitchFamily="34" charset="-122"/>
-              <a:ea typeface="微软雅黑" panose="020B0503020204020204" pitchFamily="34" charset="-122"/>
-            </a:endParaRPr>
           </a:p>
         </p:txBody>
       </p:sp>
@@ -8189,13 +8083,6 @@
               </a:rPr>
               <a:t>→</a:t>
             </a:r>
-            <a:endParaRPr lang="zh-CN" sz="1300" b="0" dirty="0">
-              <a:solidFill>
-                <a:srgbClr val="2563EB"/>
-              </a:solidFill>
-              <a:latin typeface="微软雅黑" panose="020B0503020204020204" pitchFamily="34" charset="-122"/>
-              <a:ea typeface="微软雅黑" panose="020B0503020204020204" pitchFamily="34" charset="-122"/>
-            </a:endParaRPr>
           </a:p>
         </p:txBody>
       </p:sp>
@@ -8230,13 +8117,6 @@
               </a:rPr>
               <a:t>≤ 9,999,999.99 元</a:t>
             </a:r>
-            <a:endParaRPr lang="zh-CN" sz="1200" b="1" dirty="0">
-              <a:solidFill>
-                <a:srgbClr val="1F2937"/>
-              </a:solidFill>
-              <a:latin typeface="微软雅黑" panose="020B0503020204020204" pitchFamily="34" charset="-122"/>
-              <a:ea typeface="微软雅黑" panose="020B0503020204020204" pitchFamily="34" charset="-122"/>
-            </a:endParaRPr>
           </a:p>
         </p:txBody>
       </p:sp>
@@ -8271,13 +8151,6 @@
               </a:rPr>
               <a:t>max=9999999.99 + 服务端常量</a:t>
             </a:r>
-            <a:endParaRPr lang="zh-CN" sz="1000" b="0" dirty="0">
-              <a:solidFill>
-                <a:srgbClr val="2563EB"/>
-              </a:solidFill>
-              <a:latin typeface="微软雅黑" panose="020B0503020204020204" pitchFamily="34" charset="-122"/>
-              <a:ea typeface="微软雅黑" panose="020B0503020204020204" pitchFamily="34" charset="-122"/>
-            </a:endParaRPr>
           </a:p>
         </p:txBody>
       </p:sp>
@@ -8310,7 +8183,9 @@
         <p:txBody>
           <a:bodyPr/>
           <a:lstStyle/>
-          <a:p/>
+          <a:p>
+            <a:endParaRPr/>
+          </a:p>
         </p:txBody>
       </p:sp>
       <p:sp>
@@ -8337,7 +8212,9 @@
         <p:txBody>
           <a:bodyPr/>
           <a:lstStyle/>
-          <a:p/>
+          <a:p>
+            <a:endParaRPr/>
+          </a:p>
         </p:txBody>
       </p:sp>
       <p:sp>
@@ -8371,13 +8248,6 @@
               </a:rPr>
               <a:t>名称</a:t>
             </a:r>
-            <a:endParaRPr lang="zh-CN" sz="1300" b="1" dirty="0">
-              <a:solidFill>
-                <a:srgbClr val="122D4E"/>
-              </a:solidFill>
-              <a:latin typeface="微软雅黑" panose="020B0503020204020204" pitchFamily="34" charset="-122"/>
-              <a:ea typeface="微软雅黑" panose="020B0503020204020204" pitchFamily="34" charset="-122"/>
-            </a:endParaRPr>
           </a:p>
         </p:txBody>
       </p:sp>
@@ -8412,13 +8282,6 @@
               </a:rPr>
               <a:t>无长度限制</a:t>
             </a:r>
-            <a:endParaRPr lang="zh-CN" sz="1000" b="0" dirty="0">
-              <a:solidFill>
-                <a:srgbClr val="64748B"/>
-              </a:solidFill>
-              <a:latin typeface="微软雅黑" panose="020B0503020204020204" pitchFamily="34" charset="-122"/>
-              <a:ea typeface="微软雅黑" panose="020B0503020204020204" pitchFamily="34" charset="-122"/>
-            </a:endParaRPr>
           </a:p>
         </p:txBody>
       </p:sp>
@@ -8453,13 +8316,6 @@
               </a:rPr>
               <a:t>→</a:t>
             </a:r>
-            <a:endParaRPr lang="zh-CN" sz="1300" b="0" dirty="0">
-              <a:solidFill>
-                <a:srgbClr val="2563EB"/>
-              </a:solidFill>
-              <a:latin typeface="微软雅黑" panose="020B0503020204020204" pitchFamily="34" charset="-122"/>
-              <a:ea typeface="微软雅黑" panose="020B0503020204020204" pitchFamily="34" charset="-122"/>
-            </a:endParaRPr>
           </a:p>
         </p:txBody>
       </p:sp>
@@ -8494,13 +8350,6 @@
               </a:rPr>
               <a:t>≤ 128 字符</a:t>
             </a:r>
-            <a:endParaRPr lang="zh-CN" sz="1200" b="1" dirty="0">
-              <a:solidFill>
-                <a:srgbClr val="1F2937"/>
-              </a:solidFill>
-              <a:latin typeface="微软雅黑" panose="020B0503020204020204" pitchFamily="34" charset="-122"/>
-              <a:ea typeface="微软雅黑" panose="020B0503020204020204" pitchFamily="34" charset="-122"/>
-            </a:endParaRPr>
           </a:p>
         </p:txBody>
       </p:sp>
@@ -8535,13 +8384,6 @@
               </a:rPr>
               <a:t>maxlength=128 · varchar(128)</a:t>
             </a:r>
-            <a:endParaRPr lang="zh-CN" sz="1000" b="0" dirty="0">
-              <a:solidFill>
-                <a:srgbClr val="2563EB"/>
-              </a:solidFill>
-              <a:latin typeface="微软雅黑" panose="020B0503020204020204" pitchFamily="34" charset="-122"/>
-              <a:ea typeface="微软雅黑" panose="020B0503020204020204" pitchFamily="34" charset="-122"/>
-            </a:endParaRPr>
           </a:p>
         </p:txBody>
       </p:sp>
@@ -8574,7 +8416,9 @@
         <p:txBody>
           <a:bodyPr/>
           <a:lstStyle/>
-          <a:p/>
+          <a:p>
+            <a:endParaRPr/>
+          </a:p>
         </p:txBody>
       </p:sp>
       <p:sp>
@@ -8601,7 +8445,9 @@
         <p:txBody>
           <a:bodyPr/>
           <a:lstStyle/>
-          <a:p/>
+          <a:p>
+            <a:endParaRPr/>
+          </a:p>
         </p:txBody>
       </p:sp>
       <p:sp>
@@ -8635,13 +8481,6 @@
               </a:rPr>
               <a:t>描述</a:t>
             </a:r>
-            <a:endParaRPr lang="zh-CN" sz="1300" b="1" dirty="0">
-              <a:solidFill>
-                <a:srgbClr val="122D4E"/>
-              </a:solidFill>
-              <a:latin typeface="微软雅黑" panose="020B0503020204020204" pitchFamily="34" charset="-122"/>
-              <a:ea typeface="微软雅黑" panose="020B0503020204020204" pitchFamily="34" charset="-122"/>
-            </a:endParaRPr>
           </a:p>
         </p:txBody>
       </p:sp>
@@ -8676,13 +8515,6 @@
               </a:rPr>
               <a:t>无长度限制</a:t>
             </a:r>
-            <a:endParaRPr lang="zh-CN" sz="1000" b="0" dirty="0">
-              <a:solidFill>
-                <a:srgbClr val="64748B"/>
-              </a:solidFill>
-              <a:latin typeface="微软雅黑" panose="020B0503020204020204" pitchFamily="34" charset="-122"/>
-              <a:ea typeface="微软雅黑" panose="020B0503020204020204" pitchFamily="34" charset="-122"/>
-            </a:endParaRPr>
           </a:p>
         </p:txBody>
       </p:sp>
@@ -8717,13 +8549,6 @@
               </a:rPr>
               <a:t>→</a:t>
             </a:r>
-            <a:endParaRPr lang="zh-CN" sz="1300" b="0" dirty="0">
-              <a:solidFill>
-                <a:srgbClr val="2563EB"/>
-              </a:solidFill>
-              <a:latin typeface="微软雅黑" panose="020B0503020204020204" pitchFamily="34" charset="-122"/>
-              <a:ea typeface="微软雅黑" panose="020B0503020204020204" pitchFamily="34" charset="-122"/>
-            </a:endParaRPr>
           </a:p>
         </p:txBody>
       </p:sp>
@@ -8758,13 +8583,6 @@
               </a:rPr>
               <a:t>≤ 2000 字符</a:t>
             </a:r>
-            <a:endParaRPr lang="zh-CN" sz="1200" b="1" dirty="0">
-              <a:solidFill>
-                <a:srgbClr val="1F2937"/>
-              </a:solidFill>
-              <a:latin typeface="微软雅黑" panose="020B0503020204020204" pitchFamily="34" charset="-122"/>
-              <a:ea typeface="微软雅黑" panose="020B0503020204020204" pitchFamily="34" charset="-122"/>
-            </a:endParaRPr>
           </a:p>
         </p:txBody>
       </p:sp>
@@ -8799,13 +8617,6 @@
               </a:rPr>
               <a:t>maxlength=2000 · varchar(2000)</a:t>
             </a:r>
-            <a:endParaRPr lang="zh-CN" sz="1000" b="0" dirty="0">
-              <a:solidFill>
-                <a:srgbClr val="2563EB"/>
-              </a:solidFill>
-              <a:latin typeface="微软雅黑" panose="020B0503020204020204" pitchFamily="34" charset="-122"/>
-              <a:ea typeface="微软雅黑" panose="020B0503020204020204" pitchFamily="34" charset="-122"/>
-            </a:endParaRPr>
           </a:p>
         </p:txBody>
       </p:sp>
@@ -8838,7 +8649,9 @@
         <p:txBody>
           <a:bodyPr/>
           <a:lstStyle/>
-          <a:p/>
+          <a:p>
+            <a:endParaRPr/>
+          </a:p>
         </p:txBody>
       </p:sp>
       <p:sp>
@@ -8865,7 +8678,9 @@
         <p:txBody>
           <a:bodyPr/>
           <a:lstStyle/>
-          <a:p/>
+          <a:p>
+            <a:endParaRPr/>
+          </a:p>
         </p:txBody>
       </p:sp>
       <p:sp>
@@ -8899,13 +8714,6 @@
               </a:rPr>
               <a:t>密码</a:t>
             </a:r>
-            <a:endParaRPr lang="zh-CN" sz="1300" b="1" dirty="0">
-              <a:solidFill>
-                <a:srgbClr val="122D4E"/>
-              </a:solidFill>
-              <a:latin typeface="微软雅黑" panose="020B0503020204020204" pitchFamily="34" charset="-122"/>
-              <a:ea typeface="微软雅黑" panose="020B0503020204020204" pitchFamily="34" charset="-122"/>
-            </a:endParaRPr>
           </a:p>
         </p:txBody>
       </p:sp>
@@ -8940,13 +8748,6 @@
               </a:rPr>
               <a:t>无长度要求</a:t>
             </a:r>
-            <a:endParaRPr lang="zh-CN" sz="1000" b="0" dirty="0">
-              <a:solidFill>
-                <a:srgbClr val="64748B"/>
-              </a:solidFill>
-              <a:latin typeface="微软雅黑" panose="020B0503020204020204" pitchFamily="34" charset="-122"/>
-              <a:ea typeface="微软雅黑" panose="020B0503020204020204" pitchFamily="34" charset="-122"/>
-            </a:endParaRPr>
           </a:p>
         </p:txBody>
       </p:sp>
@@ -8981,13 +8782,6 @@
               </a:rPr>
               <a:t>→</a:t>
             </a:r>
-            <a:endParaRPr lang="zh-CN" sz="1300" b="0" dirty="0">
-              <a:solidFill>
-                <a:srgbClr val="2563EB"/>
-              </a:solidFill>
-              <a:latin typeface="微软雅黑" panose="020B0503020204020204" pitchFamily="34" charset="-122"/>
-              <a:ea typeface="微软雅黑" panose="020B0503020204020204" pitchFamily="34" charset="-122"/>
-            </a:endParaRPr>
           </a:p>
         </p:txBody>
       </p:sp>
@@ -9022,13 +8816,6 @@
               </a:rPr>
               <a:t>≥ 8 位（不设上限）</a:t>
             </a:r>
-            <a:endParaRPr lang="zh-CN" sz="1200" b="1" dirty="0">
-              <a:solidFill>
-                <a:srgbClr val="1F2937"/>
-              </a:solidFill>
-              <a:latin typeface="微软雅黑" panose="020B0503020204020204" pitchFamily="34" charset="-122"/>
-              <a:ea typeface="微软雅黑" panose="020B0503020204020204" pitchFamily="34" charset="-122"/>
-            </a:endParaRPr>
           </a:p>
         </p:txBody>
       </p:sp>
@@ -9063,13 +8850,6 @@
               </a:rPr>
               <a:t>minlength=8 + pattern</a:t>
             </a:r>
-            <a:endParaRPr lang="zh-CN" sz="1000" b="0" dirty="0">
-              <a:solidFill>
-                <a:srgbClr val="2563EB"/>
-              </a:solidFill>
-              <a:latin typeface="微软雅黑" panose="020B0503020204020204" pitchFamily="34" charset="-122"/>
-              <a:ea typeface="微软雅黑" panose="020B0503020204020204" pitchFamily="34" charset="-122"/>
-            </a:endParaRPr>
           </a:p>
         </p:txBody>
       </p:sp>
@@ -9102,7 +8882,9 @@
         <p:txBody>
           <a:bodyPr/>
           <a:lstStyle/>
-          <a:p/>
+          <a:p>
+            <a:endParaRPr/>
+          </a:p>
         </p:txBody>
       </p:sp>
       <p:sp>
@@ -9129,7 +8911,9 @@
         <p:txBody>
           <a:bodyPr/>
           <a:lstStyle/>
-          <a:p/>
+          <a:p>
+            <a:endParaRPr/>
+          </a:p>
         </p:txBody>
       </p:sp>
       <p:sp>
@@ -9163,13 +8947,6 @@
               </a:rPr>
               <a:t>① HTML 约束属性先挡</a:t>
             </a:r>
-            <a:endParaRPr lang="zh-CN" sz="1300" b="1" dirty="0">
-              <a:solidFill>
-                <a:srgbClr val="122D4E"/>
-              </a:solidFill>
-              <a:latin typeface="微软雅黑" panose="020B0503020204020204" pitchFamily="34" charset="-122"/>
-              <a:ea typeface="微软雅黑" panose="020B0503020204020204" pitchFamily="34" charset="-122"/>
-            </a:endParaRPr>
           </a:p>
         </p:txBody>
       </p:sp>
@@ -9202,7 +8979,9 @@
         <p:txBody>
           <a:bodyPr/>
           <a:lstStyle/>
-          <a:p/>
+          <a:p>
+            <a:endParaRPr/>
+          </a:p>
         </p:txBody>
       </p:sp>
       <p:sp>
@@ -9229,7 +9008,9 @@
         <p:txBody>
           <a:bodyPr/>
           <a:lstStyle/>
-          <a:p/>
+          <a:p>
+            <a:endParaRPr/>
+          </a:p>
         </p:txBody>
       </p:sp>
       <p:sp>
@@ -9263,13 +9044,6 @@
               </a:rPr>
               <a:t>② 提交前脚本校验</a:t>
             </a:r>
-            <a:endParaRPr lang="zh-CN" sz="1300" b="1" dirty="0">
-              <a:solidFill>
-                <a:srgbClr val="122D4E"/>
-              </a:solidFill>
-              <a:latin typeface="微软雅黑" panose="020B0503020204020204" pitchFamily="34" charset="-122"/>
-              <a:ea typeface="微软雅黑" panose="020B0503020204020204" pitchFamily="34" charset="-122"/>
-            </a:endParaRPr>
           </a:p>
         </p:txBody>
       </p:sp>
@@ -9302,7 +9076,9 @@
         <p:txBody>
           <a:bodyPr/>
           <a:lstStyle/>
-          <a:p/>
+          <a:p>
+            <a:endParaRPr/>
+          </a:p>
         </p:txBody>
       </p:sp>
       <p:sp>
@@ -9329,7 +9105,9 @@
         <p:txBody>
           <a:bodyPr/>
           <a:lstStyle/>
-          <a:p/>
+          <a:p>
+            <a:endParaRPr/>
+          </a:p>
         </p:txBody>
       </p:sp>
       <p:sp>
@@ -9363,13 +9141,6 @@
               </a:rPr>
               <a:t>③ 服务端兜底</a:t>
             </a:r>
-            <a:endParaRPr lang="zh-CN" sz="1300" b="1" dirty="0">
-              <a:solidFill>
-                <a:srgbClr val="122D4E"/>
-              </a:solidFill>
-              <a:latin typeface="微软雅黑" panose="020B0503020204020204" pitchFamily="34" charset="-122"/>
-              <a:ea typeface="微软雅黑" panose="020B0503020204020204" pitchFamily="34" charset="-122"/>
-            </a:endParaRPr>
           </a:p>
         </p:txBody>
       </p:sp>
@@ -9404,13 +9175,6 @@
               </a:rPr>
               <a:t>→</a:t>
             </a:r>
-            <a:endParaRPr lang="zh-CN" sz="1400" b="0" dirty="0">
-              <a:solidFill>
-                <a:srgbClr val="2563EB"/>
-              </a:solidFill>
-              <a:latin typeface="微软雅黑" panose="020B0503020204020204" pitchFamily="34" charset="-122"/>
-              <a:ea typeface="微软雅黑" panose="020B0503020204020204" pitchFamily="34" charset="-122"/>
-            </a:endParaRPr>
           </a:p>
         </p:txBody>
       </p:sp>
@@ -9445,13 +9209,6 @@
               </a:rPr>
               <a:t>→</a:t>
             </a:r>
-            <a:endParaRPr lang="zh-CN" sz="1400" b="0" dirty="0">
-              <a:solidFill>
-                <a:srgbClr val="2563EB"/>
-              </a:solidFill>
-              <a:latin typeface="微软雅黑" panose="020B0503020204020204" pitchFamily="34" charset="-122"/>
-              <a:ea typeface="微软雅黑" panose="020B0503020204020204" pitchFamily="34" charset="-122"/>
-            </a:endParaRPr>
           </a:p>
         </p:txBody>
       </p:sp>
@@ -9484,7 +9241,9 @@
         <p:txBody>
           <a:bodyPr/>
           <a:lstStyle/>
-          <a:p/>
+          <a:p>
+            <a:endParaRPr/>
+          </a:p>
         </p:txBody>
       </p:sp>
       <p:sp>
@@ -9511,7 +9270,9 @@
         <p:txBody>
           <a:bodyPr/>
           <a:lstStyle/>
-          <a:p/>
+          <a:p>
+            <a:endParaRPr/>
+          </a:p>
         </p:txBody>
       </p:sp>
       <p:sp>
@@ -9545,13 +9306,6 @@
               </a:rPr>
               <a:t>约束的判定点前移：需求文档先写清楚，实现才有依据</a:t>
             </a:r>
-            <a:endParaRPr lang="zh-CN" sz="1400" b="1" dirty="0">
-              <a:solidFill>
-                <a:srgbClr val="122D4E"/>
-              </a:solidFill>
-              <a:latin typeface="微软雅黑" panose="020B0503020204020204" pitchFamily="34" charset="-122"/>
-              <a:ea typeface="微软雅黑" panose="020B0503020204020204" pitchFamily="34" charset="-122"/>
-            </a:endParaRPr>
           </a:p>
         </p:txBody>
       </p:sp>
@@ -9586,13 +9340,6 @@
               </a:rPr>
               <a:t>DEF-001 验证：修复后浏览器端即时拒绝 5000 位价格、不产生请求；绕过前端直连接口仍返回 400</a:t>
             </a:r>
-            <a:endParaRPr lang="zh-CN" sz="1000" b="0" dirty="0">
-              <a:solidFill>
-                <a:srgbClr val="64748B"/>
-              </a:solidFill>
-              <a:latin typeface="微软雅黑" panose="020B0503020204020204" pitchFamily="34" charset="-122"/>
-              <a:ea typeface="微软雅黑" panose="020B0503020204020204" pitchFamily="34" charset="-122"/>
-            </a:endParaRPr>
           </a:p>
         </p:txBody>
       </p:sp>
@@ -9652,15 +9399,8 @@
                 <a:latin typeface="微软雅黑" panose="020B0503020204020204" pitchFamily="34" charset="-122"/>
                 <a:ea typeface="微软雅黑" panose="020B0503020204020204" pitchFamily="34" charset="-122"/>
               </a:rPr>
-              <a:t>周展羽：表的设计思路</a:t>
-            </a:r>
-            <a:endParaRPr lang="zh-CN" sz="2700" b="1" dirty="0">
-              <a:solidFill>
-                <a:srgbClr val="122D4E"/>
-              </a:solidFill>
-              <a:latin typeface="微软雅黑" panose="020B0503020204020204" pitchFamily="34" charset="-122"/>
-              <a:ea typeface="微软雅黑" panose="020B0503020204020204" pitchFamily="34" charset="-122"/>
-            </a:endParaRPr>
+              <a:t>表的设计思路</a:t>
+            </a:r>
           </a:p>
         </p:txBody>
       </p:sp>
@@ -9688,7 +9428,9 @@
         <p:txBody>
           <a:bodyPr/>
           <a:lstStyle/>
-          <a:p/>
+          <a:p>
+            <a:endParaRPr/>
+          </a:p>
         </p:txBody>
       </p:sp>
       <p:sp>
@@ -9724,13 +9466,6 @@
               </a:rPr>
               <a:t>软件工程实践 · 第 2 组 · 在线购物系统 MVP</a:t>
             </a:r>
-            <a:endParaRPr lang="zh-CN" sz="900" b="0" dirty="0">
-              <a:solidFill>
-                <a:srgbClr val="64748B"/>
-              </a:solidFill>
-              <a:latin typeface="微软雅黑" panose="020B0503020204020204" pitchFamily="34" charset="-122"/>
-              <a:ea typeface="微软雅黑" panose="020B0503020204020204" pitchFamily="34" charset="-122"/>
-            </a:endParaRPr>
           </a:p>
         </p:txBody>
       </p:sp>
@@ -9763,7 +9498,9 @@
         <p:txBody>
           <a:bodyPr/>
           <a:lstStyle/>
-          <a:p/>
+          <a:p>
+            <a:endParaRPr/>
+          </a:p>
         </p:txBody>
       </p:sp>
       <p:sp>
@@ -9790,7 +9527,9 @@
         <p:txBody>
           <a:bodyPr/>
           <a:lstStyle/>
-          <a:p/>
+          <a:p>
+            <a:endParaRPr/>
+          </a:p>
         </p:txBody>
       </p:sp>
       <p:sp>
@@ -9824,13 +9563,6 @@
               </a:rPr>
               <a:t>seller · 4 列</a:t>
             </a:r>
-            <a:endParaRPr lang="zh-CN" sz="1600" b="1" dirty="0">
-              <a:solidFill>
-                <a:srgbClr val="122D4E"/>
-              </a:solidFill>
-              <a:latin typeface="微软雅黑" panose="020B0503020204020204" pitchFamily="34" charset="-122"/>
-              <a:ea typeface="微软雅黑" panose="020B0503020204020204" pitchFamily="34" charset="-122"/>
-            </a:endParaRPr>
           </a:p>
         </p:txBody>
       </p:sp>
@@ -9865,13 +9597,6 @@
               </a:rPr>
               <a:t>username 唯一（登录名）</a:t>
             </a:r>
-            <a:endParaRPr lang="zh-CN" sz="1100" b="0" dirty="0">
-              <a:solidFill>
-                <a:srgbClr val="1F2937"/>
-              </a:solidFill>
-              <a:latin typeface="微软雅黑" panose="020B0503020204020204" pitchFamily="34" charset="-122"/>
-              <a:ea typeface="微软雅黑" panose="020B0503020204020204" pitchFamily="34" charset="-122"/>
-            </a:endParaRPr>
           </a:p>
           <a:p>
             <a:pPr algn="l"/>
@@ -9885,13 +9610,6 @@
               </a:rPr>
               <a:t>密码只存 scrypt 哈希，无明文</a:t>
             </a:r>
-            <a:endParaRPr lang="zh-CN" sz="1100" b="0" dirty="0">
-              <a:solidFill>
-                <a:srgbClr val="1F2937"/>
-              </a:solidFill>
-              <a:latin typeface="微软雅黑" panose="020B0503020204020204" pitchFamily="34" charset="-122"/>
-              <a:ea typeface="微软雅黑" panose="020B0503020204020204" pitchFamily="34" charset="-122"/>
-            </a:endParaRPr>
           </a:p>
           <a:p>
             <a:pPr algn="l"/>
@@ -9905,13 +9623,6 @@
               </a:rPr>
               <a:t>系统预置且仅一个卖家账号</a:t>
             </a:r>
-            <a:endParaRPr lang="zh-CN" sz="1100" b="0" dirty="0">
-              <a:solidFill>
-                <a:srgbClr val="1F2937"/>
-              </a:solidFill>
-              <a:latin typeface="微软雅黑" panose="020B0503020204020204" pitchFamily="34" charset="-122"/>
-              <a:ea typeface="微软雅黑" panose="020B0503020204020204" pitchFamily="34" charset="-122"/>
-            </a:endParaRPr>
           </a:p>
         </p:txBody>
       </p:sp>
@@ -9944,7 +9655,9 @@
         <p:txBody>
           <a:bodyPr/>
           <a:lstStyle/>
-          <a:p/>
+          <a:p>
+            <a:endParaRPr/>
+          </a:p>
         </p:txBody>
       </p:sp>
       <p:sp>
@@ -9971,7 +9684,9 @@
         <p:txBody>
           <a:bodyPr/>
           <a:lstStyle/>
-          <a:p/>
+          <a:p>
+            <a:endParaRPr/>
+          </a:p>
         </p:txBody>
       </p:sp>
       <p:sp>
@@ -10005,13 +9720,6 @@
               </a:rPr>
               <a:t>product · 11 列</a:t>
             </a:r>
-            <a:endParaRPr lang="zh-CN" sz="1600" b="1" dirty="0">
-              <a:solidFill>
-                <a:srgbClr val="122D4E"/>
-              </a:solidFill>
-              <a:latin typeface="微软雅黑" panose="020B0503020204020204" pitchFamily="34" charset="-122"/>
-              <a:ea typeface="微软雅黑" panose="020B0503020204020204" pitchFamily="34" charset="-122"/>
-            </a:endParaRPr>
           </a:p>
         </p:txBody>
       </p:sp>
@@ -10046,13 +9754,6 @@
               </a:rPr>
               <a:t>price_cents 存「分」，避免浮点误差</a:t>
             </a:r>
-            <a:endParaRPr lang="zh-CN" sz="1100" b="0" dirty="0">
-              <a:solidFill>
-                <a:srgbClr val="1F2937"/>
-              </a:solidFill>
-              <a:latin typeface="微软雅黑" panose="020B0503020204020204" pitchFamily="34" charset="-122"/>
-              <a:ea typeface="微软雅黑" panose="020B0503020204020204" pitchFamily="34" charset="-122"/>
-            </a:endParaRPr>
           </a:p>
           <a:p>
             <a:pPr algn="l"/>
@@ -10066,13 +9767,6 @@
               </a:rPr>
               <a:t>status 四态 + 索引 idx_product_status</a:t>
             </a:r>
-            <a:endParaRPr lang="zh-CN" sz="1100" b="0" dirty="0">
-              <a:solidFill>
-                <a:srgbClr val="1F2937"/>
-              </a:solidFill>
-              <a:latin typeface="微软雅黑" panose="020B0503020204020204" pitchFamily="34" charset="-122"/>
-              <a:ea typeface="微软雅黑" panose="020B0503020204020204" pitchFamily="34" charset="-122"/>
-            </a:endParaRPr>
           </a:p>
           <a:p>
             <a:pPr algn="l"/>
@@ -10086,13 +9780,6 @@
               </a:rPr>
               <a:t>任意时刻至多一件未售出商品</a:t>
             </a:r>
-            <a:endParaRPr lang="zh-CN" sz="1100" b="0" dirty="0">
-              <a:solidFill>
-                <a:srgbClr val="1F2937"/>
-              </a:solidFill>
-              <a:latin typeface="微软雅黑" panose="020B0503020204020204" pitchFamily="34" charset="-122"/>
-              <a:ea typeface="微软雅黑" panose="020B0503020204020204" pitchFamily="34" charset="-122"/>
-            </a:endParaRPr>
           </a:p>
         </p:txBody>
       </p:sp>
@@ -10125,7 +9812,9 @@
         <p:txBody>
           <a:bodyPr/>
           <a:lstStyle/>
-          <a:p/>
+          <a:p>
+            <a:endParaRPr/>
+          </a:p>
         </p:txBody>
       </p:sp>
       <p:sp>
@@ -10152,7 +9841,9 @@
         <p:txBody>
           <a:bodyPr/>
           <a:lstStyle/>
-          <a:p/>
+          <a:p>
+            <a:endParaRPr/>
+          </a:p>
         </p:txBody>
       </p:sp>
       <p:sp>
@@ -10186,13 +9877,6 @@
               </a:rPr>
               <a:t>intent · 8 列</a:t>
             </a:r>
-            <a:endParaRPr lang="zh-CN" sz="1600" b="1" dirty="0">
-              <a:solidFill>
-                <a:srgbClr val="122D4E"/>
-              </a:solidFill>
-              <a:latin typeface="微软雅黑" panose="020B0503020204020204" pitchFamily="34" charset="-122"/>
-              <a:ea typeface="微软雅黑" panose="020B0503020204020204" pitchFamily="34" charset="-122"/>
-            </a:endParaRPr>
           </a:p>
         </p:txBody>
       </p:sp>
@@ -10227,13 +9911,6 @@
               </a:rPr>
               <a:t>passcode 唯一（买家认领凭证）</a:t>
             </a:r>
-            <a:endParaRPr lang="zh-CN" sz="1100" b="0" dirty="0">
-              <a:solidFill>
-                <a:srgbClr val="1F2937"/>
-              </a:solidFill>
-              <a:latin typeface="微软雅黑" panose="020B0503020204020204" pitchFamily="34" charset="-122"/>
-              <a:ea typeface="微软雅黑" panose="020B0503020204020204" pitchFamily="34" charset="-122"/>
-            </a:endParaRPr>
           </a:p>
           <a:p>
             <a:pPr algn="l"/>
@@ -10247,13 +9924,6 @@
               </a:rPr>
               <a:t>submitted_at 决定位次，不可变</a:t>
             </a:r>
-            <a:endParaRPr lang="zh-CN" sz="1100" b="0" dirty="0">
-              <a:solidFill>
-                <a:srgbClr val="1F2937"/>
-              </a:solidFill>
-              <a:latin typeface="微软雅黑" panose="020B0503020204020204" pitchFamily="34" charset="-122"/>
-              <a:ea typeface="微软雅黑" panose="020B0503020204020204" pitchFamily="34" charset="-122"/>
-            </a:endParaRPr>
           </a:p>
           <a:p>
             <a:pPr algn="l"/>
@@ -10267,13 +9937,6 @@
               </a:rPr>
               <a:t>stage 三态 · 2 个索引</a:t>
             </a:r>
-            <a:endParaRPr lang="zh-CN" sz="1100" b="0" dirty="0">
-              <a:solidFill>
-                <a:srgbClr val="1F2937"/>
-              </a:solidFill>
-              <a:latin typeface="微软雅黑" panose="020B0503020204020204" pitchFamily="34" charset="-122"/>
-              <a:ea typeface="微软雅黑" panose="020B0503020204020204" pitchFamily="34" charset="-122"/>
-            </a:endParaRPr>
           </a:p>
         </p:txBody>
       </p:sp>
@@ -10308,13 +9971,6 @@
               </a:rPr>
               <a:t>三个刻意的设计取舍</a:t>
             </a:r>
-            <a:endParaRPr lang="zh-CN" sz="1800" b="1" dirty="0">
-              <a:solidFill>
-                <a:srgbClr val="122D4E"/>
-              </a:solidFill>
-              <a:latin typeface="微软雅黑" panose="020B0503020204020204" pitchFamily="34" charset="-122"/>
-              <a:ea typeface="微软雅黑" panose="020B0503020204020204" pitchFamily="34" charset="-122"/>
-            </a:endParaRPr>
           </a:p>
         </p:txBody>
       </p:sp>
@@ -10347,7 +10003,9 @@
         <p:txBody>
           <a:bodyPr/>
           <a:lstStyle/>
-          <a:p/>
+          <a:p>
+            <a:endParaRPr/>
+          </a:p>
         </p:txBody>
       </p:sp>
       <p:sp>
@@ -10374,7 +10032,9 @@
         <p:txBody>
           <a:bodyPr/>
           <a:lstStyle/>
-          <a:p/>
+          <a:p>
+            <a:endParaRPr/>
+          </a:p>
         </p:txBody>
       </p:sp>
       <p:sp>
@@ -10408,13 +10068,6 @@
               </a:rPr>
               <a:t>① 排队位次不落库</a:t>
             </a:r>
-            <a:endParaRPr lang="zh-CN" sz="1400" b="1" dirty="0">
-              <a:solidFill>
-                <a:srgbClr val="122D4E"/>
-              </a:solidFill>
-              <a:latin typeface="微软雅黑" panose="020B0503020204020204" pitchFamily="34" charset="-122"/>
-              <a:ea typeface="微软雅黑" panose="020B0503020204020204" pitchFamily="34" charset="-122"/>
-            </a:endParaRPr>
           </a:p>
         </p:txBody>
       </p:sp>
@@ -10449,13 +10102,6 @@
               </a:rPr>
               <a:t>位次按（提交时间, id）实时算；</a:t>
             </a:r>
-            <a:endParaRPr lang="zh-CN" sz="1100" b="0" dirty="0">
-              <a:solidFill>
-                <a:srgbClr val="1F2937"/>
-              </a:solidFill>
-              <a:latin typeface="微软雅黑" panose="020B0503020204020204" pitchFamily="34" charset="-122"/>
-              <a:ea typeface="微软雅黑" panose="020B0503020204020204" pitchFamily="34" charset="-122"/>
-            </a:endParaRPr>
           </a:p>
           <a:p>
             <a:pPr algn="l"/>
@@ -10469,13 +10115,6 @@
               </a:rPr>
               <a:t>落库反而每次撤销都要重排，容易错。</a:t>
             </a:r>
-            <a:endParaRPr lang="zh-CN" sz="1100" b="0" dirty="0">
-              <a:solidFill>
-                <a:srgbClr val="1F2937"/>
-              </a:solidFill>
-              <a:latin typeface="微软雅黑" panose="020B0503020204020204" pitchFamily="34" charset="-122"/>
-              <a:ea typeface="微软雅黑" panose="020B0503020204020204" pitchFamily="34" charset="-122"/>
-            </a:endParaRPr>
           </a:p>
         </p:txBody>
       </p:sp>
@@ -10508,7 +10147,9 @@
         <p:txBody>
           <a:bodyPr/>
           <a:lstStyle/>
-          <a:p/>
+          <a:p>
+            <a:endParaRPr/>
+          </a:p>
         </p:txBody>
       </p:sp>
       <p:sp>
@@ -10535,7 +10176,9 @@
         <p:txBody>
           <a:bodyPr/>
           <a:lstStyle/>
-          <a:p/>
+          <a:p>
+            <a:endParaRPr/>
+          </a:p>
         </p:txBody>
       </p:sp>
       <p:sp>
@@ -10569,13 +10212,6 @@
               </a:rPr>
               <a:t>② 不建硬外键</a:t>
             </a:r>
-            <a:endParaRPr lang="zh-CN" sz="1400" b="1" dirty="0">
-              <a:solidFill>
-                <a:srgbClr val="122D4E"/>
-              </a:solidFill>
-              <a:latin typeface="微软雅黑" panose="020B0503020204020204" pitchFamily="34" charset="-122"/>
-              <a:ea typeface="微软雅黑" panose="020B0503020204020204" pitchFamily="34" charset="-122"/>
-            </a:endParaRPr>
           </a:p>
         </p:txBody>
       </p:sp>
@@ -10610,13 +10246,6 @@
               </a:rPr>
               <a:t>SQLite 默认外键不生效；交易失败要</a:t>
             </a:r>
-            <a:endParaRPr lang="zh-CN" sz="1100" b="0" dirty="0">
-              <a:solidFill>
-                <a:srgbClr val="1F2937"/>
-              </a:solidFill>
-              <a:latin typeface="微软雅黑" panose="020B0503020204020204" pitchFamily="34" charset="-122"/>
-              <a:ea typeface="微软雅黑" panose="020B0503020204020204" pitchFamily="34" charset="-122"/>
-            </a:endParaRPr>
           </a:p>
           <a:p>
             <a:pPr algn="l"/>
@@ -10630,13 +10259,6 @@
               </a:rPr>
               <a:t>「先解绑后结案」，一致性由服务层保证。</a:t>
             </a:r>
-            <a:endParaRPr lang="zh-CN" sz="1100" b="0" dirty="0">
-              <a:solidFill>
-                <a:srgbClr val="1F2937"/>
-              </a:solidFill>
-              <a:latin typeface="微软雅黑" panose="020B0503020204020204" pitchFamily="34" charset="-122"/>
-              <a:ea typeface="微软雅黑" panose="020B0503020204020204" pitchFamily="34" charset="-122"/>
-            </a:endParaRPr>
           </a:p>
         </p:txBody>
       </p:sp>
@@ -10669,7 +10291,9 @@
         <p:txBody>
           <a:bodyPr/>
           <a:lstStyle/>
-          <a:p/>
+          <a:p>
+            <a:endParaRPr/>
+          </a:p>
         </p:txBody>
       </p:sp>
       <p:sp>
@@ -10696,7 +10320,9 @@
         <p:txBody>
           <a:bodyPr/>
           <a:lstStyle/>
-          <a:p/>
+          <a:p>
+            <a:endParaRPr/>
+          </a:p>
         </p:txBody>
       </p:sp>
       <p:sp>
@@ -10730,13 +10356,6 @@
               </a:rPr>
               <a:t>③ 枚举存小写字面量</a:t>
             </a:r>
-            <a:endParaRPr lang="zh-CN" sz="1400" b="1" dirty="0">
-              <a:solidFill>
-                <a:srgbClr val="122D4E"/>
-              </a:solidFill>
-              <a:latin typeface="微软雅黑" panose="020B0503020204020204" pitchFamily="34" charset="-122"/>
-              <a:ea typeface="微软雅黑" panose="020B0503020204020204" pitchFamily="34" charset="-122"/>
-            </a:endParaRPr>
           </a:p>
         </p:txBody>
       </p:sp>
@@ -10771,13 +10390,6 @@
               </a:rPr>
               <a:t>不用 @Enumerated —— 它会生成 check</a:t>
             </a:r>
-            <a:endParaRPr lang="zh-CN" sz="1100" b="0" dirty="0">
-              <a:solidFill>
-                <a:srgbClr val="1F2937"/>
-              </a:solidFill>
-              <a:latin typeface="微软雅黑" panose="020B0503020204020204" pitchFamily="34" charset="-122"/>
-              <a:ea typeface="微软雅黑" panose="020B0503020204020204" pitchFamily="34" charset="-122"/>
-            </a:endParaRPr>
           </a:p>
           <a:p>
             <a:pPr algn="l"/>
@@ -10791,13 +10403,6 @@
               </a:rPr>
               <a:t>约束，SQLite 不支持，ddl-auto 会报错。</a:t>
             </a:r>
-            <a:endParaRPr lang="zh-CN" sz="1100" b="0" dirty="0">
-              <a:solidFill>
-                <a:srgbClr val="1F2937"/>
-              </a:solidFill>
-              <a:latin typeface="微软雅黑" panose="020B0503020204020204" pitchFamily="34" charset="-122"/>
-              <a:ea typeface="微软雅黑" panose="020B0503020204020204" pitchFamily="34" charset="-122"/>
-            </a:endParaRPr>
           </a:p>
         </p:txBody>
       </p:sp>
@@ -10830,7 +10435,9 @@
         <p:txBody>
           <a:bodyPr/>
           <a:lstStyle/>
-          <a:p/>
+          <a:p>
+            <a:endParaRPr/>
+          </a:p>
         </p:txBody>
       </p:sp>
       <p:sp>
@@ -10857,7 +10464,9 @@
         <p:txBody>
           <a:bodyPr/>
           <a:lstStyle/>
-          <a:p/>
+          <a:p>
+            <a:endParaRPr/>
+          </a:p>
         </p:txBody>
       </p:sp>
       <p:sp>
@@ -10891,13 +10500,6 @@
               </a:rPr>
               <a:t>每一条取舍都写进了 Wiki《数据库构建说明》，可现场打开逐条核对</a:t>
             </a:r>
-            <a:endParaRPr lang="zh-CN" sz="1400" b="1" dirty="0">
-              <a:solidFill>
-                <a:srgbClr val="122D4E"/>
-              </a:solidFill>
-              <a:latin typeface="微软雅黑" panose="020B0503020204020204" pitchFamily="34" charset="-122"/>
-              <a:ea typeface="微软雅黑" panose="020B0503020204020204" pitchFamily="34" charset="-122"/>
-            </a:endParaRPr>
           </a:p>
         </p:txBody>
       </p:sp>
@@ -10932,13 +10534,6 @@
               </a:rPr>
               <a:t>三张表共 23 列 · 3 个索引 · 逐列定义见 Wiki《数据库构建说明》第 3 节</a:t>
             </a:r>
-            <a:endParaRPr lang="zh-CN" sz="1000" b="0" dirty="0">
-              <a:solidFill>
-                <a:srgbClr val="64748B"/>
-              </a:solidFill>
-              <a:latin typeface="微软雅黑" panose="020B0503020204020204" pitchFamily="34" charset="-122"/>
-              <a:ea typeface="微软雅黑" panose="020B0503020204020204" pitchFamily="34" charset="-122"/>
-            </a:endParaRPr>
           </a:p>
         </p:txBody>
       </p:sp>
@@ -10998,15 +10593,8 @@
                 <a:latin typeface="微软雅黑" panose="020B0503020204020204" pitchFamily="34" charset="-122"/>
                 <a:ea typeface="微软雅黑" panose="020B0503020204020204" pitchFamily="34" charset="-122"/>
               </a:rPr>
-              <a:t>周展羽：如何建表 · 旧数据迁移</a:t>
-            </a:r>
-            <a:endParaRPr lang="zh-CN" sz="2700" b="1" dirty="0">
-              <a:solidFill>
-                <a:srgbClr val="122D4E"/>
-              </a:solidFill>
-              <a:latin typeface="微软雅黑" panose="020B0503020204020204" pitchFamily="34" charset="-122"/>
-              <a:ea typeface="微软雅黑" panose="020B0503020204020204" pitchFamily="34" charset="-122"/>
-            </a:endParaRPr>
+              <a:t>如何建表 · 旧数据迁移</a:t>
+            </a:r>
           </a:p>
         </p:txBody>
       </p:sp>
@@ -11034,7 +10622,9 @@
         <p:txBody>
           <a:bodyPr/>
           <a:lstStyle/>
-          <a:p/>
+          <a:p>
+            <a:endParaRPr/>
+          </a:p>
         </p:txBody>
       </p:sp>
       <p:sp>
@@ -11070,13 +10660,6 @@
               </a:rPr>
               <a:t>软件工程实践 · 第 2 组 · 在线购物系统 MVP</a:t>
             </a:r>
-            <a:endParaRPr lang="zh-CN" sz="900" b="0" dirty="0">
-              <a:solidFill>
-                <a:srgbClr val="64748B"/>
-              </a:solidFill>
-              <a:latin typeface="微软雅黑" panose="020B0503020204020204" pitchFamily="34" charset="-122"/>
-              <a:ea typeface="微软雅黑" panose="020B0503020204020204" pitchFamily="34" charset="-122"/>
-            </a:endParaRPr>
           </a:p>
         </p:txBody>
       </p:sp>
@@ -11109,7 +10692,9 @@
         <p:txBody>
           <a:bodyPr/>
           <a:lstStyle/>
-          <a:p/>
+          <a:p>
+            <a:endParaRPr/>
+          </a:p>
         </p:txBody>
       </p:sp>
       <p:sp>
@@ -11136,7 +10721,9 @@
         <p:txBody>
           <a:bodyPr/>
           <a:lstStyle/>
-          <a:p/>
+          <a:p>
+            <a:endParaRPr/>
+          </a:p>
         </p:txBody>
       </p:sp>
       <p:sp>
@@ -11170,13 +10757,6 @@
               </a:rPr>
               <a:t>数据库选 SQLite：单文件 data/shop.db，免安装、拷走即跑；表由实体类自动建出来</a:t>
             </a:r>
-            <a:endParaRPr lang="zh-CN" sz="1300" b="1" dirty="0">
-              <a:solidFill>
-                <a:srgbClr val="122D4E"/>
-              </a:solidFill>
-              <a:latin typeface="微软雅黑" panose="020B0503020204020204" pitchFamily="34" charset="-122"/>
-              <a:ea typeface="微软雅黑" panose="020B0503020204020204" pitchFamily="34" charset="-122"/>
-            </a:endParaRPr>
           </a:p>
         </p:txBody>
       </p:sp>
@@ -11209,7 +10789,9 @@
         <p:txBody>
           <a:bodyPr/>
           <a:lstStyle/>
-          <a:p/>
+          <a:p>
+            <a:endParaRPr/>
+          </a:p>
         </p:txBody>
       </p:sp>
       <p:sp>
@@ -11236,7 +10818,9 @@
         <p:txBody>
           <a:bodyPr/>
           <a:lstStyle/>
-          <a:p/>
+          <a:p>
+            <a:endParaRPr/>
+          </a:p>
         </p:txBody>
       </p:sp>
       <p:sp>
@@ -11270,13 +10854,6 @@
               </a:rPr>
               <a:t>① 写 Java 类描述表</a:t>
             </a:r>
-            <a:endParaRPr lang="zh-CN" sz="1300" b="1" dirty="0">
-              <a:solidFill>
-                <a:srgbClr val="122D4E"/>
-              </a:solidFill>
-              <a:latin typeface="微软雅黑" panose="020B0503020204020204" pitchFamily="34" charset="-122"/>
-              <a:ea typeface="微软雅黑" panose="020B0503020204020204" pitchFamily="34" charset="-122"/>
-            </a:endParaRPr>
           </a:p>
         </p:txBody>
       </p:sp>
@@ -11309,7 +10886,9 @@
         <p:txBody>
           <a:bodyPr/>
           <a:lstStyle/>
-          <a:p/>
+          <a:p>
+            <a:endParaRPr/>
+          </a:p>
         </p:txBody>
       </p:sp>
       <p:sp>
@@ -11336,7 +10915,9 @@
         <p:txBody>
           <a:bodyPr/>
           <a:lstStyle/>
-          <a:p/>
+          <a:p>
+            <a:endParaRPr/>
+          </a:p>
         </p:txBody>
       </p:sp>
       <p:sp>
@@ -11370,13 +10951,6 @@
               </a:rPr>
               <a:t>② 启动时框架生成 SQL</a:t>
             </a:r>
-            <a:endParaRPr lang="zh-CN" sz="1300" b="1" dirty="0">
-              <a:solidFill>
-                <a:srgbClr val="122D4E"/>
-              </a:solidFill>
-              <a:latin typeface="微软雅黑" panose="020B0503020204020204" pitchFamily="34" charset="-122"/>
-              <a:ea typeface="微软雅黑" panose="020B0503020204020204" pitchFamily="34" charset="-122"/>
-            </a:endParaRPr>
           </a:p>
         </p:txBody>
       </p:sp>
@@ -11409,7 +10983,9 @@
         <p:txBody>
           <a:bodyPr/>
           <a:lstStyle/>
-          <a:p/>
+          <a:p>
+            <a:endParaRPr/>
+          </a:p>
         </p:txBody>
       </p:sp>
       <p:sp>
@@ -11436,7 +11012,9 @@
         <p:txBody>
           <a:bodyPr/>
           <a:lstStyle/>
-          <a:p/>
+          <a:p>
+            <a:endParaRPr/>
+          </a:p>
         </p:txBody>
       </p:sp>
       <p:sp>
@@ -11470,13 +11048,6 @@
               </a:rPr>
               <a:t>③ 字段变了自动补列</a:t>
             </a:r>
-            <a:endParaRPr lang="zh-CN" sz="1300" b="1" dirty="0">
-              <a:solidFill>
-                <a:srgbClr val="122D4E"/>
-              </a:solidFill>
-              <a:latin typeface="微软雅黑" panose="020B0503020204020204" pitchFamily="34" charset="-122"/>
-              <a:ea typeface="微软雅黑" panose="020B0503020204020204" pitchFamily="34" charset="-122"/>
-            </a:endParaRPr>
           </a:p>
         </p:txBody>
       </p:sp>
@@ -11511,13 +11082,6 @@
               </a:rPr>
               <a:t>→</a:t>
             </a:r>
-            <a:endParaRPr lang="zh-CN" sz="1400" b="0" dirty="0">
-              <a:solidFill>
-                <a:srgbClr val="2563EB"/>
-              </a:solidFill>
-              <a:latin typeface="微软雅黑" panose="020B0503020204020204" pitchFamily="34" charset="-122"/>
-              <a:ea typeface="微软雅黑" panose="020B0503020204020204" pitchFamily="34" charset="-122"/>
-            </a:endParaRPr>
           </a:p>
         </p:txBody>
       </p:sp>
@@ -11552,13 +11116,6 @@
               </a:rPr>
               <a:t>→</a:t>
             </a:r>
-            <a:endParaRPr lang="zh-CN" sz="1400" b="0" dirty="0">
-              <a:solidFill>
-                <a:srgbClr val="2563EB"/>
-              </a:solidFill>
-              <a:latin typeface="微软雅黑" panose="020B0503020204020204" pitchFamily="34" charset="-122"/>
-              <a:ea typeface="微软雅黑" panose="020B0503020204020204" pitchFamily="34" charset="-122"/>
-            </a:endParaRPr>
           </a:p>
         </p:txBody>
       </p:sp>
@@ -11591,7 +11148,9 @@
         <p:txBody>
           <a:bodyPr/>
           <a:lstStyle/>
-          <a:p/>
+          <a:p>
+            <a:endParaRPr/>
+          </a:p>
         </p:txBody>
       </p:sp>
       <p:sp>
@@ -11618,7 +11177,9 @@
         <p:txBody>
           <a:bodyPr/>
           <a:lstStyle/>
-          <a:p/>
+          <a:p>
+            <a:endParaRPr/>
+          </a:p>
         </p:txBody>
       </p:sp>
       <p:sp>
@@ -11652,13 +11213,6 @@
               </a:rPr>
               <a:t>我写的：ProductEntity.java</a:t>
             </a:r>
-            <a:endParaRPr lang="zh-CN" sz="1800" b="1" dirty="0">
-              <a:solidFill>
-                <a:srgbClr val="122D4E"/>
-              </a:solidFill>
-              <a:latin typeface="微软雅黑" panose="020B0503020204020204" pitchFamily="34" charset="-122"/>
-              <a:ea typeface="微软雅黑" panose="020B0503020204020204" pitchFamily="34" charset="-122"/>
-            </a:endParaRPr>
           </a:p>
         </p:txBody>
       </p:sp>
@@ -11703,13 +11257,6 @@
               </a:rPr>
               <a:t>@Entity</a:t>
             </a:r>
-            <a:endParaRPr lang="zh-CN" sz="950" b="0" dirty="0">
-              <a:solidFill>
-                <a:srgbClr val="1F2937"/>
-              </a:solidFill>
-              <a:latin typeface="微软雅黑" panose="020B0503020204020204" pitchFamily="34" charset="-122"/>
-              <a:ea typeface="微软雅黑" panose="020B0503020204020204" pitchFamily="34" charset="-122"/>
-            </a:endParaRPr>
           </a:p>
           <a:p>
             <a:pPr algn="l"/>
@@ -11723,13 +11270,6 @@
               </a:rPr>
               <a:t>@Table(name = "product", indexes = @Index(...))</a:t>
             </a:r>
-            <a:endParaRPr lang="zh-CN" sz="950" b="0" dirty="0">
-              <a:solidFill>
-                <a:srgbClr val="1F2937"/>
-              </a:solidFill>
-              <a:latin typeface="微软雅黑" panose="020B0503020204020204" pitchFamily="34" charset="-122"/>
-              <a:ea typeface="微软雅黑" panose="020B0503020204020204" pitchFamily="34" charset="-122"/>
-            </a:endParaRPr>
           </a:p>
           <a:p>
             <a:pPr algn="l"/>
@@ -11743,13 +11283,6 @@
               </a:rPr>
               <a:t>public class ProductEntity {</a:t>
             </a:r>
-            <a:endParaRPr lang="zh-CN" sz="950" b="0" dirty="0">
-              <a:solidFill>
-                <a:srgbClr val="1F2937"/>
-              </a:solidFill>
-              <a:latin typeface="微软雅黑" panose="020B0503020204020204" pitchFamily="34" charset="-122"/>
-              <a:ea typeface="微软雅黑" panose="020B0503020204020204" pitchFamily="34" charset="-122"/>
-            </a:endParaRPr>
           </a:p>
           <a:p>
             <a:pPr algn="l"/>
@@ -11763,13 +11296,6 @@
               </a:rPr>
               <a:t>    @Id @GeneratedValue(IDENTITY) Long id;</a:t>
             </a:r>
-            <a:endParaRPr lang="zh-CN" sz="950" b="0" dirty="0">
-              <a:solidFill>
-                <a:srgbClr val="1F2937"/>
-              </a:solidFill>
-              <a:latin typeface="微软雅黑" panose="020B0503020204020204" pitchFamily="34" charset="-122"/>
-              <a:ea typeface="微软雅黑" panose="020B0503020204020204" pitchFamily="34" charset="-122"/>
-            </a:endParaRPr>
           </a:p>
           <a:p>
             <a:pPr algn="l"/>
@@ -11783,13 +11309,6 @@
               </a:rPr>
               <a:t>    @Column(nullable=false, length=128)  String name;</a:t>
             </a:r>
-            <a:endParaRPr lang="zh-CN" sz="950" b="0" dirty="0">
-              <a:solidFill>
-                <a:srgbClr val="1F2937"/>
-              </a:solidFill>
-              <a:latin typeface="微软雅黑" panose="020B0503020204020204" pitchFamily="34" charset="-122"/>
-              <a:ea typeface="微软雅黑" panose="020B0503020204020204" pitchFamily="34" charset="-122"/>
-            </a:endParaRPr>
           </a:p>
           <a:p>
             <a:pPr algn="l"/>
@@ -11803,13 +11322,6 @@
               </a:rPr>
               <a:t>    @Column(name="price_cents")          long priceCents;</a:t>
             </a:r>
-            <a:endParaRPr lang="zh-CN" sz="950" b="0" dirty="0">
-              <a:solidFill>
-                <a:srgbClr val="1F2937"/>
-              </a:solidFill>
-              <a:latin typeface="微软雅黑" panose="020B0503020204020204" pitchFamily="34" charset="-122"/>
-              <a:ea typeface="微软雅黑" panose="020B0503020204020204" pitchFamily="34" charset="-122"/>
-            </a:endParaRPr>
           </a:p>
         </p:txBody>
       </p:sp>
@@ -11844,13 +11356,6 @@
               </a:rPr>
               <a:t>→</a:t>
             </a:r>
-            <a:endParaRPr lang="zh-CN" sz="2200" b="0" dirty="0">
-              <a:solidFill>
-                <a:srgbClr val="2563EB"/>
-              </a:solidFill>
-              <a:latin typeface="微软雅黑" panose="020B0503020204020204" pitchFamily="34" charset="-122"/>
-              <a:ea typeface="微软雅黑" panose="020B0503020204020204" pitchFamily="34" charset="-122"/>
-            </a:endParaRPr>
           </a:p>
         </p:txBody>
       </p:sp>
@@ -11883,7 +11388,9 @@
         <p:txBody>
           <a:bodyPr/>
           <a:lstStyle/>
-          <a:p/>
+          <a:p>
+            <a:endParaRPr/>
+          </a:p>
         </p:txBody>
       </p:sp>
       <p:sp>
@@ -11910,7 +11417,9 @@
         <p:txBody>
           <a:bodyPr/>
           <a:lstStyle/>
-          <a:p/>
+          <a:p>
+            <a:endParaRPr/>
+          </a:p>
         </p:txBody>
       </p:sp>
       <p:sp>
@@ -11950,13 +11459,6 @@
               </a:rPr>
               <a:t>框架生成的：</a:t>
             </a:r>
-            <a:endParaRPr lang="zh-CN" sz="1800" b="1" dirty="0">
-              <a:solidFill>
-                <a:srgbClr val="122D4E"/>
-              </a:solidFill>
-              <a:latin typeface="微软雅黑" panose="020B0503020204020204" pitchFamily="34" charset="-122"/>
-              <a:ea typeface="微软雅黑" panose="020B0503020204020204" pitchFamily="34" charset="-122"/>
-            </a:endParaRPr>
           </a:p>
         </p:txBody>
       </p:sp>
@@ -12001,13 +11503,6 @@
               </a:rPr>
               <a:t>CREATE TABLE product (</a:t>
             </a:r>
-            <a:endParaRPr lang="zh-CN" sz="950" b="0" dirty="0">
-              <a:solidFill>
-                <a:srgbClr val="1F2937"/>
-              </a:solidFill>
-              <a:latin typeface="微软雅黑" panose="020B0503020204020204" pitchFamily="34" charset="-122"/>
-              <a:ea typeface="微软雅黑" panose="020B0503020204020204" pitchFamily="34" charset="-122"/>
-            </a:endParaRPr>
           </a:p>
           <a:p>
             <a:pPr algn="l"/>
@@ -12021,13 +11516,6 @@
               </a:rPr>
               <a:t>  id INTEGER PRIMARY KEY AUTOINCREMENT,</a:t>
             </a:r>
-            <a:endParaRPr lang="zh-CN" sz="950" b="0" dirty="0">
-              <a:solidFill>
-                <a:srgbClr val="1F2937"/>
-              </a:solidFill>
-              <a:latin typeface="微软雅黑" panose="020B0503020204020204" pitchFamily="34" charset="-122"/>
-              <a:ea typeface="微软雅黑" panose="020B0503020204020204" pitchFamily="34" charset="-122"/>
-            </a:endParaRPr>
           </a:p>
           <a:p>
             <a:pPr algn="l"/>
@@ -12041,13 +11529,6 @@
               </a:rPr>
               <a:t>  name varchar(128) not null,</a:t>
             </a:r>
-            <a:endParaRPr lang="zh-CN" sz="950" b="0" dirty="0">
-              <a:solidFill>
-                <a:srgbClr val="1F2937"/>
-              </a:solidFill>
-              <a:latin typeface="微软雅黑" panose="020B0503020204020204" pitchFamily="34" charset="-122"/>
-              <a:ea typeface="微软雅黑" panose="020B0503020204020204" pitchFamily="34" charset="-122"/>
-            </a:endParaRPr>
           </a:p>
           <a:p>
             <a:pPr algn="l"/>
@@ -12061,13 +11542,6 @@
               </a:rPr>
               <a:t>  price_cents integer not null,  … );</a:t>
             </a:r>
-            <a:endParaRPr lang="zh-CN" sz="950" b="0" dirty="0">
-              <a:solidFill>
-                <a:srgbClr val="1F2937"/>
-              </a:solidFill>
-              <a:latin typeface="微软雅黑" panose="020B0503020204020204" pitchFamily="34" charset="-122"/>
-              <a:ea typeface="微软雅黑" panose="020B0503020204020204" pitchFamily="34" charset="-122"/>
-            </a:endParaRPr>
           </a:p>
           <a:p>
             <a:pPr algn="l"/>
@@ -12081,13 +11555,6 @@
               </a:rPr>
               <a:t>CREATE INDEX idx_product_status ON product(status);</a:t>
             </a:r>
-            <a:endParaRPr lang="zh-CN" sz="950" b="0" dirty="0">
-              <a:solidFill>
-                <a:srgbClr val="1F2937"/>
-              </a:solidFill>
-              <a:latin typeface="微软雅黑" panose="020B0503020204020204" pitchFamily="34" charset="-122"/>
-              <a:ea typeface="微软雅黑" panose="020B0503020204020204" pitchFamily="34" charset="-122"/>
-            </a:endParaRPr>
           </a:p>
         </p:txBody>
       </p:sp>
@@ -12120,7 +11587,9 @@
         <p:txBody>
           <a:bodyPr/>
           <a:lstStyle/>
-          <a:p/>
+          <a:p>
+            <a:endParaRPr/>
+          </a:p>
         </p:txBody>
       </p:sp>
       <p:sp>
@@ -12147,7 +11616,9 @@
         <p:txBody>
           <a:bodyPr/>
           <a:lstStyle/>
-          <a:p/>
+          <a:p>
+            <a:endParaRPr/>
+          </a:p>
         </p:txBody>
       </p:sp>
       <p:sp>
@@ -12181,13 +11652,6 @@
               </a:rPr>
               <a:t>旧 data.json 怎么搬进来</a:t>
             </a:r>
-            <a:endParaRPr lang="zh-CN" sz="1800" b="1" dirty="0">
-              <a:solidFill>
-                <a:srgbClr val="122D4E"/>
-              </a:solidFill>
-              <a:latin typeface="微软雅黑" panose="020B0503020204020204" pitchFamily="34" charset="-122"/>
-              <a:ea typeface="微软雅黑" panose="020B0503020204020204" pitchFamily="34" charset="-122"/>
-            </a:endParaRPr>
           </a:p>
         </p:txBody>
       </p:sp>
@@ -12222,13 +11686,6 @@
               </a:rPr>
               <a:t>seller / products[] / intents[] 分别搬进三张表；</a:t>
             </a:r>
-            <a:endParaRPr lang="zh-CN" sz="1100" b="0" dirty="0">
-              <a:solidFill>
-                <a:srgbClr val="1F2937"/>
-              </a:solidFill>
-              <a:latin typeface="微软雅黑" panose="020B0503020204020204" pitchFamily="34" charset="-122"/>
-              <a:ea typeface="微软雅黑" panose="020B0503020204020204" pitchFamily="34" charset="-122"/>
-            </a:endParaRPr>
           </a:p>
           <a:p>
             <a:pPr algn="l"/>
@@ -12242,13 +11699,6 @@
               </a:rPr>
               <a:t>id 与密码哈希原样搬运，引用关系不断；</a:t>
             </a:r>
-            <a:endParaRPr lang="zh-CN" sz="1100" b="0" dirty="0">
-              <a:solidFill>
-                <a:srgbClr val="1F2937"/>
-              </a:solidFill>
-              <a:latin typeface="微软雅黑" panose="020B0503020204020204" pitchFamily="34" charset="-122"/>
-              <a:ea typeface="微软雅黑" panose="020B0503020204020204" pitchFamily="34" charset="-122"/>
-            </a:endParaRPr>
           </a:p>
           <a:p>
             <a:pPr algn="l"/>
@@ -12262,13 +11712,6 @@
               </a:rPr>
               <a:t>两个计数器作废，交给数据库自增。</a:t>
             </a:r>
-            <a:endParaRPr lang="zh-CN" sz="1100" b="0" dirty="0">
-              <a:solidFill>
-                <a:srgbClr val="1F2937"/>
-              </a:solidFill>
-              <a:latin typeface="微软雅黑" panose="020B0503020204020204" pitchFamily="34" charset="-122"/>
-              <a:ea typeface="微软雅黑" panose="020B0503020204020204" pitchFamily="34" charset="-122"/>
-            </a:endParaRPr>
           </a:p>
         </p:txBody>
       </p:sp>
@@ -12334,13 +11777,6 @@
               </a:rPr>
               <a:t>三表全空且旧文件存在才迁移，否则跳过；</a:t>
             </a:r>
-            <a:endParaRPr lang="zh-CN" sz="1100" b="0" dirty="0">
-              <a:solidFill>
-                <a:srgbClr val="1F2937"/>
-              </a:solidFill>
-              <a:latin typeface="微软雅黑" panose="020B0503020204020204" pitchFamily="34" charset="-122"/>
-              <a:ea typeface="微软雅黑" panose="020B0503020204020204" pitchFamily="34" charset="-122"/>
-            </a:endParaRPr>
           </a:p>
           <a:p>
             <a:pPr algn="l"/>
@@ -12354,13 +11790,6 @@
               </a:rPr>
               <a:t>一个事务内完成，失败整体回滚；</a:t>
             </a:r>
-            <a:endParaRPr lang="zh-CN" sz="1100" b="0" dirty="0">
-              <a:solidFill>
-                <a:srgbClr val="1F2937"/>
-              </a:solidFill>
-              <a:latin typeface="微软雅黑" panose="020B0503020204020204" pitchFamily="34" charset="-122"/>
-              <a:ea typeface="微软雅黑" panose="020B0503020204020204" pitchFamily="34" charset="-122"/>
-            </a:endParaRPr>
           </a:p>
           <a:p>
             <a:pPr algn="l"/>
@@ -12374,13 +11803,6 @@
               </a:rPr>
               <a:t>搬完打日志：N 个商品、M 条意向。</a:t>
             </a:r>
-            <a:endParaRPr lang="zh-CN" sz="1100" b="0" dirty="0">
-              <a:solidFill>
-                <a:srgbClr val="1F2937"/>
-              </a:solidFill>
-              <a:latin typeface="微软雅黑" panose="020B0503020204020204" pitchFamily="34" charset="-122"/>
-              <a:ea typeface="微软雅黑" panose="020B0503020204020204" pitchFamily="34" charset="-122"/>
-            </a:endParaRPr>
           </a:p>
         </p:txBody>
       </p:sp>
@@ -12413,7 +11835,9 @@
         <p:txBody>
           <a:bodyPr/>
           <a:lstStyle/>
-          <a:p/>
+          <a:p>
+            <a:endParaRPr/>
+          </a:p>
         </p:txBody>
       </p:sp>
       <p:sp>
@@ -12440,7 +11864,9 @@
         <p:txBody>
           <a:bodyPr/>
           <a:lstStyle/>
-          <a:p/>
+          <a:p>
+            <a:endParaRPr/>
+          </a:p>
         </p:txBody>
       </p:sp>
       <p:sp>
@@ -12474,13 +11900,6 @@
               </a:rPr>
               <a:t>关键提示词 · 迁移轮：「启动时把 data.json 迁进 SQLite：有数据绝不迁、旧 id 原样保留、哈希原样搬运、整个过程在一个事务里。」</a:t>
             </a:r>
-            <a:endParaRPr lang="zh-CN" sz="1000" b="0" dirty="0">
-              <a:solidFill>
-                <a:srgbClr val="1F2937"/>
-              </a:solidFill>
-              <a:latin typeface="微软雅黑" panose="020B0503020204020204" pitchFamily="34" charset="-122"/>
-              <a:ea typeface="微软雅黑" panose="020B0503020204020204" pitchFamily="34" charset="-122"/>
-            </a:endParaRPr>
           </a:p>
         </p:txBody>
       </p:sp>
@@ -12515,13 +11934,6 @@
               </a:rPr>
               <a:t>三张表共 23 列 · 逐列定义见 Wiki《数据库构建说明》，可随时打开核对</a:t>
             </a:r>
-            <a:endParaRPr lang="zh-CN" sz="1000" b="0" dirty="0">
-              <a:solidFill>
-                <a:srgbClr val="64748B"/>
-              </a:solidFill>
-              <a:latin typeface="微软雅黑" panose="020B0503020204020204" pitchFamily="34" charset="-122"/>
-              <a:ea typeface="微软雅黑" panose="020B0503020204020204" pitchFamily="34" charset="-122"/>
-            </a:endParaRPr>
           </a:p>
         </p:txBody>
       </p:sp>
@@ -12704,14 +12116,6 @@
               </a:rPr>
               <a:t>谭梓良：系统功能测试与缺陷修复</a:t>
             </a:r>
-            <a:endParaRPr sz="2600" b="1">
-              <a:solidFill>
-                <a:srgbClr val="122D4E"/>
-              </a:solidFill>
-              <a:latin typeface="微软雅黑" panose="020B0503020204020204" pitchFamily="34" charset="-122"/>
-              <a:ea typeface="微软雅黑" panose="020B0503020204020204" pitchFamily="34" charset="-122"/>
-              <a:cs typeface="微软雅黑" panose="020B0503020204020204" pitchFamily="34" charset="-122"/>
-            </a:endParaRPr>
           </a:p>
         </p:txBody>
       </p:sp>
@@ -12869,14 +12273,6 @@
               </a:rPr>
               <a:t>11</a:t>
             </a:r>
-            <a:endParaRPr sz="1800" b="1">
-              <a:solidFill>
-                <a:srgbClr val="2563EB"/>
-              </a:solidFill>
-              <a:latin typeface="微软雅黑" panose="020B0503020204020204" pitchFamily="34" charset="-122"/>
-              <a:ea typeface="微软雅黑" panose="020B0503020204020204" pitchFamily="34" charset="-122"/>
-              <a:cs typeface="微软雅黑" panose="020B0503020204020204" pitchFamily="34" charset="-122"/>
-            </a:endParaRPr>
           </a:p>
         </p:txBody>
       </p:sp>
@@ -13059,14 +12455,6 @@
               </a:rPr>
               <a:t>软件工程实践 · 第 2 组 · 在线购物系统</a:t>
             </a:r>
-            <a:endParaRPr sz="900">
-              <a:solidFill>
-                <a:srgbClr val="64748B"/>
-              </a:solidFill>
-              <a:latin typeface="微软雅黑" panose="020B0503020204020204" pitchFamily="34" charset="-122"/>
-              <a:ea typeface="微软雅黑" panose="020B0503020204020204" pitchFamily="34" charset="-122"/>
-              <a:cs typeface="微软雅黑" panose="020B0503020204020204" pitchFamily="34" charset="-122"/>
-            </a:endParaRPr>
           </a:p>
         </p:txBody>
       </p:sp>
@@ -13224,14 +12612,6 @@
               </a:rPr>
               <a:t>个人负责内容</a:t>
             </a:r>
-            <a:endParaRPr sz="1700" b="1">
-              <a:solidFill>
-                <a:srgbClr val="122D4E"/>
-              </a:solidFill>
-              <a:latin typeface="微软雅黑" panose="020B0503020204020204" pitchFamily="34" charset="-122"/>
-              <a:ea typeface="微软雅黑" panose="020B0503020204020204" pitchFamily="34" charset="-122"/>
-              <a:cs typeface="微软雅黑" panose="020B0503020204020204" pitchFamily="34" charset="-122"/>
-            </a:endParaRPr>
           </a:p>
         </p:txBody>
       </p:sp>
@@ -13414,14 +12794,6 @@
               </a:rPr>
               <a:t>① 设计并执行 84 项 Java 接口与静态资源测试用例。</a:t>
             </a:r>
-            <a:endParaRPr sz="1350">
-              <a:solidFill>
-                <a:srgbClr val="1F2937"/>
-              </a:solidFill>
-              <a:latin typeface="微软雅黑" panose="020B0503020204020204" pitchFamily="34" charset="-122"/>
-              <a:ea typeface="微软雅黑" panose="020B0503020204020204" pitchFamily="34" charset="-122"/>
-              <a:cs typeface="微软雅黑" panose="020B0503020204020204" pitchFamily="34" charset="-122"/>
-            </a:endParaRPr>
           </a:p>
         </p:txBody>
       </p:sp>
@@ -13604,14 +12976,6 @@
               </a:rPr>
               <a:t>② 核对商品、意向队列、交易状态和异常输入的处理结果。</a:t>
             </a:r>
-            <a:endParaRPr sz="1350">
-              <a:solidFill>
-                <a:srgbClr val="1F2937"/>
-              </a:solidFill>
-              <a:latin typeface="微软雅黑" panose="020B0503020204020204" pitchFamily="34" charset="-122"/>
-              <a:ea typeface="微软雅黑" panose="020B0503020204020204" pitchFamily="34" charset="-122"/>
-              <a:cs typeface="微软雅黑" panose="020B0503020204020204" pitchFamily="34" charset="-122"/>
-            </a:endParaRPr>
           </a:p>
         </p:txBody>
       </p:sp>
@@ -13794,14 +13158,6 @@
               </a:rPr>
               <a:t>③ 复现缺陷，记录问题原因、修复内容及对应回归用例。</a:t>
             </a:r>
-            <a:endParaRPr sz="1350">
-              <a:solidFill>
-                <a:srgbClr val="1F2937"/>
-              </a:solidFill>
-              <a:latin typeface="微软雅黑" panose="020B0503020204020204" pitchFamily="34" charset="-122"/>
-              <a:ea typeface="微软雅黑" panose="020B0503020204020204" pitchFamily="34" charset="-122"/>
-              <a:cs typeface="微软雅黑" panose="020B0503020204020204" pitchFamily="34" charset="-122"/>
-            </a:endParaRPr>
           </a:p>
         </p:txBody>
       </p:sp>
@@ -13984,14 +13340,6 @@
               </a:rPr>
               <a:t>④ 编写 Java 自动化脚本，完成 Edge 网页流程录屏。</a:t>
             </a:r>
-            <a:endParaRPr sz="1350">
-              <a:solidFill>
-                <a:srgbClr val="1F2937"/>
-              </a:solidFill>
-              <a:latin typeface="微软雅黑" panose="020B0503020204020204" pitchFamily="34" charset="-122"/>
-              <a:ea typeface="微软雅黑" panose="020B0503020204020204" pitchFamily="34" charset="-122"/>
-              <a:cs typeface="微软雅黑" panose="020B0503020204020204" pitchFamily="34" charset="-122"/>
-            </a:endParaRPr>
           </a:p>
         </p:txBody>
       </p:sp>
@@ -14174,14 +13522,6 @@
               </a:rPr>
               <a:t>⑤ 整理四份测试成果，保留版本、执行记录和结果证据。</a:t>
             </a:r>
-            <a:endParaRPr sz="1350">
-              <a:solidFill>
-                <a:srgbClr val="1F2937"/>
-              </a:solidFill>
-              <a:latin typeface="微软雅黑" panose="020B0503020204020204" pitchFamily="34" charset="-122"/>
-              <a:ea typeface="微软雅黑" panose="020B0503020204020204" pitchFamily="34" charset="-122"/>
-              <a:cs typeface="微软雅黑" panose="020B0503020204020204" pitchFamily="34" charset="-122"/>
-            </a:endParaRPr>
           </a:p>
         </p:txBody>
       </p:sp>
@@ -14339,14 +13679,6 @@
               </a:rPr>
               <a:t>测试交付物</a:t>
             </a:r>
-            <a:endParaRPr sz="1700" b="1">
-              <a:solidFill>
-                <a:srgbClr val="122D4E"/>
-              </a:solidFill>
-              <a:latin typeface="微软雅黑" panose="020B0503020204020204" pitchFamily="34" charset="-122"/>
-              <a:ea typeface="微软雅黑" panose="020B0503020204020204" pitchFamily="34" charset="-122"/>
-              <a:cs typeface="微软雅黑" panose="020B0503020204020204" pitchFamily="34" charset="-122"/>
-            </a:endParaRPr>
           </a:p>
         </p:txBody>
       </p:sp>
@@ -14529,14 +13861,6 @@
               </a:rPr>
               <a:t>测试用例</a:t>
             </a:r>
-            <a:endParaRPr sz="1350" b="1">
-              <a:solidFill>
-                <a:srgbClr val="1F2937"/>
-              </a:solidFill>
-              <a:latin typeface="微软雅黑" panose="020B0503020204020204" pitchFamily="34" charset="-122"/>
-              <a:ea typeface="微软雅黑" panose="020B0503020204020204" pitchFamily="34" charset="-122"/>
-              <a:cs typeface="微软雅黑" panose="020B0503020204020204" pitchFamily="34" charset="-122"/>
-            </a:endParaRPr>
           </a:p>
         </p:txBody>
       </p:sp>
@@ -14694,14 +14018,6 @@
               </a:rPr>
               <a:t>docs/测试用例.md</a:t>
             </a:r>
-            <a:endParaRPr sz="1200">
-              <a:solidFill>
-                <a:srgbClr val="64748B"/>
-              </a:solidFill>
-              <a:latin typeface="微软雅黑" panose="020B0503020204020204" pitchFamily="34" charset="-122"/>
-              <a:ea typeface="微软雅黑" panose="020B0503020204020204" pitchFamily="34" charset="-122"/>
-              <a:cs typeface="微软雅黑" panose="020B0503020204020204" pitchFamily="34" charset="-122"/>
-            </a:endParaRPr>
           </a:p>
         </p:txBody>
       </p:sp>
@@ -14859,14 +14175,6 @@
               </a:rPr>
               <a:t>Java 黑盒测试脚本</a:t>
             </a:r>
-            <a:endParaRPr sz="1350" b="1">
-              <a:solidFill>
-                <a:srgbClr val="1F2937"/>
-              </a:solidFill>
-              <a:latin typeface="微软雅黑" panose="020B0503020204020204" pitchFamily="34" charset="-122"/>
-              <a:ea typeface="微软雅黑" panose="020B0503020204020204" pitchFamily="34" charset="-122"/>
-              <a:cs typeface="微软雅黑" panose="020B0503020204020204" pitchFamily="34" charset="-122"/>
-            </a:endParaRPr>
           </a:p>
         </p:txBody>
       </p:sp>
@@ -15024,14 +14332,6 @@
               </a:rPr>
               <a:t>ShoppingSystemBlackBoxTest.java</a:t>
             </a:r>
-            <a:endParaRPr sz="1200">
-              <a:solidFill>
-                <a:srgbClr val="64748B"/>
-              </a:solidFill>
-              <a:latin typeface="微软雅黑" panose="020B0503020204020204" pitchFamily="34" charset="-122"/>
-              <a:ea typeface="微软雅黑" panose="020B0503020204020204" pitchFamily="34" charset="-122"/>
-              <a:cs typeface="微软雅黑" panose="020B0503020204020204" pitchFamily="34" charset="-122"/>
-            </a:endParaRPr>
           </a:p>
         </p:txBody>
       </p:sp>
@@ -15189,14 +14489,6 @@
               </a:rPr>
               <a:t>测试报告</a:t>
             </a:r>
-            <a:endParaRPr sz="1350" b="1">
-              <a:solidFill>
-                <a:srgbClr val="1F2937"/>
-              </a:solidFill>
-              <a:latin typeface="微软雅黑" panose="020B0503020204020204" pitchFamily="34" charset="-122"/>
-              <a:ea typeface="微软雅黑" panose="020B0503020204020204" pitchFamily="34" charset="-122"/>
-              <a:cs typeface="微软雅黑" panose="020B0503020204020204" pitchFamily="34" charset="-122"/>
-            </a:endParaRPr>
           </a:p>
         </p:txBody>
       </p:sp>
@@ -15354,14 +14646,6 @@
               </a:rPr>
               <a:t>docs/测试报告.md</a:t>
             </a:r>
-            <a:endParaRPr sz="1200">
-              <a:solidFill>
-                <a:srgbClr val="64748B"/>
-              </a:solidFill>
-              <a:latin typeface="微软雅黑" panose="020B0503020204020204" pitchFamily="34" charset="-122"/>
-              <a:ea typeface="微软雅黑" panose="020B0503020204020204" pitchFamily="34" charset="-122"/>
-              <a:cs typeface="微软雅黑" panose="020B0503020204020204" pitchFamily="34" charset="-122"/>
-            </a:endParaRPr>
           </a:p>
         </p:txBody>
       </p:sp>
@@ -15519,14 +14803,6 @@
               </a:rPr>
               <a:t>缺陷迭代记录</a:t>
             </a:r>
-            <a:endParaRPr sz="1350" b="1">
-              <a:solidFill>
-                <a:srgbClr val="1F2937"/>
-              </a:solidFill>
-              <a:latin typeface="微软雅黑" panose="020B0503020204020204" pitchFamily="34" charset="-122"/>
-              <a:ea typeface="微软雅黑" panose="020B0503020204020204" pitchFamily="34" charset="-122"/>
-              <a:cs typeface="微软雅黑" panose="020B0503020204020204" pitchFamily="34" charset="-122"/>
-            </a:endParaRPr>
           </a:p>
         </p:txBody>
       </p:sp>
@@ -15684,14 +14960,6 @@
               </a:rPr>
               <a:t>docs/缺陷迭代记录报告.md</a:t>
             </a:r>
-            <a:endParaRPr sz="1200">
-              <a:solidFill>
-                <a:srgbClr val="64748B"/>
-              </a:solidFill>
-              <a:latin typeface="微软雅黑" panose="020B0503020204020204" pitchFamily="34" charset="-122"/>
-              <a:ea typeface="微软雅黑" panose="020B0503020204020204" pitchFamily="34" charset="-122"/>
-              <a:cs typeface="微软雅黑" panose="020B0503020204020204" pitchFamily="34" charset="-122"/>
-            </a:endParaRPr>
           </a:p>
         </p:txBody>
       </p:sp>
@@ -15849,14 +15117,6 @@
               </a:rPr>
               <a:t>84</a:t>
             </a:r>
-            <a:endParaRPr sz="3000" b="1">
-              <a:solidFill>
-                <a:srgbClr val="2563EB"/>
-              </a:solidFill>
-              <a:latin typeface="微软雅黑" panose="020B0503020204020204" pitchFamily="34" charset="-122"/>
-              <a:ea typeface="微软雅黑" panose="020B0503020204020204" pitchFamily="34" charset="-122"/>
-              <a:cs typeface="微软雅黑" panose="020B0503020204020204" pitchFamily="34" charset="-122"/>
-            </a:endParaRPr>
           </a:p>
         </p:txBody>
       </p:sp>
@@ -16014,14 +15274,6 @@
               </a:rPr>
               <a:t>接口用例</a:t>
             </a:r>
-            <a:endParaRPr sz="1100">
-              <a:solidFill>
-                <a:srgbClr val="64748B"/>
-              </a:solidFill>
-              <a:latin typeface="微软雅黑" panose="020B0503020204020204" pitchFamily="34" charset="-122"/>
-              <a:ea typeface="微软雅黑" panose="020B0503020204020204" pitchFamily="34" charset="-122"/>
-              <a:cs typeface="微软雅黑" panose="020B0503020204020204" pitchFamily="34" charset="-122"/>
-            </a:endParaRPr>
           </a:p>
         </p:txBody>
       </p:sp>
@@ -16179,14 +15431,6 @@
               </a:rPr>
               <a:t>17</a:t>
             </a:r>
-            <a:endParaRPr sz="3000" b="1">
-              <a:solidFill>
-                <a:srgbClr val="0EA5E9"/>
-              </a:solidFill>
-              <a:latin typeface="微软雅黑" panose="020B0503020204020204" pitchFamily="34" charset="-122"/>
-              <a:ea typeface="微软雅黑" panose="020B0503020204020204" pitchFamily="34" charset="-122"/>
-              <a:cs typeface="微软雅黑" panose="020B0503020204020204" pitchFamily="34" charset="-122"/>
-            </a:endParaRPr>
           </a:p>
         </p:txBody>
       </p:sp>
@@ -16344,14 +15588,6 @@
               </a:rPr>
               <a:t>网页检查（v4）</a:t>
             </a:r>
-            <a:endParaRPr sz="1100">
-              <a:solidFill>
-                <a:srgbClr val="64748B"/>
-              </a:solidFill>
-              <a:latin typeface="微软雅黑" panose="020B0503020204020204" pitchFamily="34" charset="-122"/>
-              <a:ea typeface="微软雅黑" panose="020B0503020204020204" pitchFamily="34" charset="-122"/>
-              <a:cs typeface="微软雅黑" panose="020B0503020204020204" pitchFamily="34" charset="-122"/>
-            </a:endParaRPr>
           </a:p>
         </p:txBody>
       </p:sp>
@@ -16509,14 +15745,6 @@
               </a:rPr>
               <a:t>4</a:t>
             </a:r>
-            <a:endParaRPr sz="3000" b="1">
-              <a:solidFill>
-                <a:srgbClr val="EA841B"/>
-              </a:solidFill>
-              <a:latin typeface="微软雅黑" panose="020B0503020204020204" pitchFamily="34" charset="-122"/>
-              <a:ea typeface="微软雅黑" panose="020B0503020204020204" pitchFamily="34" charset="-122"/>
-              <a:cs typeface="微软雅黑" panose="020B0503020204020204" pitchFamily="34" charset="-122"/>
-            </a:endParaRPr>
           </a:p>
         </p:txBody>
       </p:sp>
@@ -16674,14 +15902,6 @@
               </a:rPr>
               <a:t>份测试交付</a:t>
             </a:r>
-            <a:endParaRPr sz="1100">
-              <a:solidFill>
-                <a:srgbClr val="64748B"/>
-              </a:solidFill>
-              <a:latin typeface="微软雅黑" panose="020B0503020204020204" pitchFamily="34" charset="-122"/>
-              <a:ea typeface="微软雅黑" panose="020B0503020204020204" pitchFamily="34" charset="-122"/>
-              <a:cs typeface="微软雅黑" panose="020B0503020204020204" pitchFamily="34" charset="-122"/>
-            </a:endParaRPr>
           </a:p>
         </p:txBody>
       </p:sp>
@@ -16864,14 +16084,6 @@
               </a:rPr>
               <a:t>测试设计：84 项用例覆盖</a:t>
             </a:r>
-            <a:endParaRPr sz="2600" b="1">
-              <a:solidFill>
-                <a:srgbClr val="122D4E"/>
-              </a:solidFill>
-              <a:latin typeface="微软雅黑" panose="020B0503020204020204" pitchFamily="34" charset="-122"/>
-              <a:ea typeface="微软雅黑" panose="020B0503020204020204" pitchFamily="34" charset="-122"/>
-              <a:cs typeface="微软雅黑" panose="020B0503020204020204" pitchFamily="34" charset="-122"/>
-            </a:endParaRPr>
           </a:p>
         </p:txBody>
       </p:sp>
@@ -17029,14 +16241,6 @@
               </a:rPr>
               <a:t>11-1</a:t>
             </a:r>
-            <a:endParaRPr sz="1800" b="1">
-              <a:solidFill>
-                <a:srgbClr val="2563EB"/>
-              </a:solidFill>
-              <a:latin typeface="微软雅黑" panose="020B0503020204020204" pitchFamily="34" charset="-122"/>
-              <a:ea typeface="微软雅黑" panose="020B0503020204020204" pitchFamily="34" charset="-122"/>
-              <a:cs typeface="微软雅黑" panose="020B0503020204020204" pitchFamily="34" charset="-122"/>
-            </a:endParaRPr>
           </a:p>
         </p:txBody>
       </p:sp>
@@ -17219,14 +16423,6 @@
               </a:rPr>
               <a:t>软件工程实践 · 第 2 组 · 在线购物系统</a:t>
             </a:r>
-            <a:endParaRPr sz="900">
-              <a:solidFill>
-                <a:srgbClr val="64748B"/>
-              </a:solidFill>
-              <a:latin typeface="微软雅黑" panose="020B0503020204020204" pitchFamily="34" charset="-122"/>
-              <a:ea typeface="微软雅黑" panose="020B0503020204020204" pitchFamily="34" charset="-122"/>
-              <a:cs typeface="微软雅黑" panose="020B0503020204020204" pitchFamily="34" charset="-122"/>
-            </a:endParaRPr>
           </a:p>
         </p:txBody>
       </p:sp>
@@ -17384,14 +16580,6 @@
               </a:rPr>
               <a:t>按功能、状态、边界和异常拆分用例</a:t>
             </a:r>
-            <a:endParaRPr sz="1700" b="1">
-              <a:solidFill>
-                <a:srgbClr val="122D4E"/>
-              </a:solidFill>
-              <a:latin typeface="微软雅黑" panose="020B0503020204020204" pitchFamily="34" charset="-122"/>
-              <a:ea typeface="微软雅黑" panose="020B0503020204020204" pitchFamily="34" charset="-122"/>
-              <a:cs typeface="微软雅黑" panose="020B0503020204020204" pitchFamily="34" charset="-122"/>
-            </a:endParaRPr>
           </a:p>
         </p:txBody>
       </p:sp>
@@ -17410,9 +16598,27 @@
             <a:tbl>
               <a:tblPr firstRow="1"/>
               <a:tblGrid>
-                <a:gridCol w="3143250"/>
-                <a:gridCol w="800100"/>
-                <a:gridCol w="2762250"/>
+                <a:gridCol w="3143250">
+                  <a:extLst>
+                    <a:ext uri="{9D8B030D-6E8A-4147-A177-3AD203B41FA5}">
+                      <a16:colId xmlns:a16="http://schemas.microsoft.com/office/drawing/2014/main" val="20000"/>
+                    </a:ext>
+                  </a:extLst>
+                </a:gridCol>
+                <a:gridCol w="800100">
+                  <a:extLst>
+                    <a:ext uri="{9D8B030D-6E8A-4147-A177-3AD203B41FA5}">
+                      <a16:colId xmlns:a16="http://schemas.microsoft.com/office/drawing/2014/main" val="20001"/>
+                    </a:ext>
+                  </a:extLst>
+                </a:gridCol>
+                <a:gridCol w="2762250">
+                  <a:extLst>
+                    <a:ext uri="{9D8B030D-6E8A-4147-A177-3AD203B41FA5}">
+                      <a16:colId xmlns:a16="http://schemas.microsoft.com/office/drawing/2014/main" val="20002"/>
+                    </a:ext>
+                  </a:extLst>
+                </a:gridCol>
               </a:tblGrid>
               <a:tr h="444500">
                 <a:tc>
@@ -17432,14 +16638,6 @@
                         </a:rPr>
                         <a:t>测试范围</a:t>
                       </a:r>
-                      <a:endParaRPr sz="1350" b="1">
-                        <a:solidFill>
-                          <a:srgbClr val="FFFFFF"/>
-                        </a:solidFill>
-                        <a:latin typeface="微软雅黑" panose="020B0503020204020204" pitchFamily="34" charset="-122"/>
-                        <a:ea typeface="微软雅黑" panose="020B0503020204020204" pitchFamily="34" charset="-122"/>
-                        <a:cs typeface="微软雅黑" panose="020B0503020204020204" pitchFamily="34" charset="-122"/>
-                      </a:endParaRPr>
                     </a:p>
                   </a:txBody>
                   <a:tcPr marL="114300" marR="95250" marT="66675" marB="66675" anchor="ctr">
@@ -17489,14 +16687,6 @@
                         </a:rPr>
                         <a:t>项数</a:t>
                       </a:r>
-                      <a:endParaRPr sz="1350" b="1">
-                        <a:solidFill>
-                          <a:srgbClr val="FFFFFF"/>
-                        </a:solidFill>
-                        <a:latin typeface="微软雅黑" panose="020B0503020204020204" pitchFamily="34" charset="-122"/>
-                        <a:ea typeface="微软雅黑" panose="020B0503020204020204" pitchFamily="34" charset="-122"/>
-                        <a:cs typeface="微软雅黑" panose="020B0503020204020204" pitchFamily="34" charset="-122"/>
-                      </a:endParaRPr>
                     </a:p>
                   </a:txBody>
                   <a:tcPr marL="114300" marR="95250" marT="66675" marB="66675" anchor="ctr">
@@ -17549,14 +16739,6 @@
                         </a:rPr>
                         <a:t>用例编号</a:t>
                       </a:r>
-                      <a:endParaRPr sz="1350" b="1">
-                        <a:solidFill>
-                          <a:srgbClr val="FFFFFF"/>
-                        </a:solidFill>
-                        <a:latin typeface="微软雅黑" panose="020B0503020204020204" pitchFamily="34" charset="-122"/>
-                        <a:ea typeface="微软雅黑" panose="020B0503020204020204" pitchFamily="34" charset="-122"/>
-                        <a:cs typeface="微软雅黑" panose="020B0503020204020204" pitchFamily="34" charset="-122"/>
-                      </a:endParaRPr>
                     </a:p>
                   </a:txBody>
                   <a:tcPr marL="114300" marR="95250" marT="66675" marB="66675" anchor="ctr">
@@ -17592,6 +16774,11 @@
                     </a:solidFill>
                   </a:tcPr>
                 </a:tc>
+                <a:extLst>
+                  <a:ext uri="{0D108BD9-81ED-4DB2-BD59-A6C34878D82A}">
+                    <a16:rowId xmlns:a16="http://schemas.microsoft.com/office/drawing/2014/main" val="10000"/>
+                  </a:ext>
+                </a:extLst>
               </a:tr>
               <a:tr h="444500">
                 <a:tc>
@@ -17611,14 +16798,6 @@
                         </a:rPr>
                         <a:t>空库与静态资源</a:t>
                       </a:r>
-                      <a:endParaRPr sz="1350">
-                        <a:solidFill>
-                          <a:srgbClr val="1F2937"/>
-                        </a:solidFill>
-                        <a:latin typeface="微软雅黑" panose="020B0503020204020204" pitchFamily="34" charset="-122"/>
-                        <a:ea typeface="微软雅黑" panose="020B0503020204020204" pitchFamily="34" charset="-122"/>
-                        <a:cs typeface="微软雅黑" panose="020B0503020204020204" pitchFamily="34" charset="-122"/>
-                      </a:endParaRPr>
                     </a:p>
                   </a:txBody>
                   <a:tcPr marL="114300" marR="95250" marT="66675" marB="66675" anchor="ctr">
@@ -17671,14 +16850,6 @@
                         </a:rPr>
                         <a:t>7</a:t>
                       </a:r>
-                      <a:endParaRPr sz="1350">
-                        <a:solidFill>
-                          <a:srgbClr val="1F2937"/>
-                        </a:solidFill>
-                        <a:latin typeface="微软雅黑" panose="020B0503020204020204" pitchFamily="34" charset="-122"/>
-                        <a:ea typeface="微软雅黑" panose="020B0503020204020204" pitchFamily="34" charset="-122"/>
-                        <a:cs typeface="微软雅黑" panose="020B0503020204020204" pitchFamily="34" charset="-122"/>
-                      </a:endParaRPr>
                     </a:p>
                   </a:txBody>
                   <a:tcPr marL="114300" marR="95250" marT="66675" marB="66675" anchor="ctr">
@@ -17734,14 +16905,6 @@
                         </a:rPr>
                         <a:t>AT-001～007</a:t>
                       </a:r>
-                      <a:endParaRPr sz="1350">
-                        <a:solidFill>
-                          <a:srgbClr val="1F2937"/>
-                        </a:solidFill>
-                        <a:latin typeface="微软雅黑" panose="020B0503020204020204" pitchFamily="34" charset="-122"/>
-                        <a:ea typeface="微软雅黑" panose="020B0503020204020204" pitchFamily="34" charset="-122"/>
-                        <a:cs typeface="微软雅黑" panose="020B0503020204020204" pitchFamily="34" charset="-122"/>
-                      </a:endParaRPr>
                     </a:p>
                   </a:txBody>
                   <a:tcPr marL="114300" marR="95250" marT="66675" marB="66675" anchor="ctr">
@@ -17780,6 +16943,11 @@
                     </a:solidFill>
                   </a:tcPr>
                 </a:tc>
+                <a:extLst>
+                  <a:ext uri="{0D108BD9-81ED-4DB2-BD59-A6C34878D82A}">
+                    <a16:rowId xmlns:a16="http://schemas.microsoft.com/office/drawing/2014/main" val="10001"/>
+                  </a:ext>
+                </a:extLst>
               </a:tr>
               <a:tr h="444500">
                 <a:tc>
@@ -17799,14 +16967,6 @@
                         </a:rPr>
                         <a:t>后台鉴权与登录</a:t>
                       </a:r>
-                      <a:endParaRPr sz="1350">
-                        <a:solidFill>
-                          <a:srgbClr val="1F2937"/>
-                        </a:solidFill>
-                        <a:latin typeface="微软雅黑" panose="020B0503020204020204" pitchFamily="34" charset="-122"/>
-                        <a:ea typeface="微软雅黑" panose="020B0503020204020204" pitchFamily="34" charset="-122"/>
-                        <a:cs typeface="微软雅黑" panose="020B0503020204020204" pitchFamily="34" charset="-122"/>
-                      </a:endParaRPr>
                     </a:p>
                   </a:txBody>
                   <a:tcPr marL="114300" marR="95250" marT="66675" marB="66675" anchor="ctr">
@@ -17859,14 +17019,6 @@
                         </a:rPr>
                         <a:t>13</a:t>
                       </a:r>
-                      <a:endParaRPr sz="1350">
-                        <a:solidFill>
-                          <a:srgbClr val="1F2937"/>
-                        </a:solidFill>
-                        <a:latin typeface="微软雅黑" panose="020B0503020204020204" pitchFamily="34" charset="-122"/>
-                        <a:ea typeface="微软雅黑" panose="020B0503020204020204" pitchFamily="34" charset="-122"/>
-                        <a:cs typeface="微软雅黑" panose="020B0503020204020204" pitchFamily="34" charset="-122"/>
-                      </a:endParaRPr>
                     </a:p>
                   </a:txBody>
                   <a:tcPr marL="114300" marR="95250" marT="66675" marB="66675" anchor="ctr">
@@ -17922,14 +17074,6 @@
                         </a:rPr>
                         <a:t>AT-008～020</a:t>
                       </a:r>
-                      <a:endParaRPr sz="1350">
-                        <a:solidFill>
-                          <a:srgbClr val="1F2937"/>
-                        </a:solidFill>
-                        <a:latin typeface="微软雅黑" panose="020B0503020204020204" pitchFamily="34" charset="-122"/>
-                        <a:ea typeface="微软雅黑" panose="020B0503020204020204" pitchFamily="34" charset="-122"/>
-                        <a:cs typeface="微软雅黑" panose="020B0503020204020204" pitchFamily="34" charset="-122"/>
-                      </a:endParaRPr>
                     </a:p>
                   </a:txBody>
                   <a:tcPr marL="114300" marR="95250" marT="66675" marB="66675" anchor="ctr">
@@ -17968,6 +17112,11 @@
                     </a:solidFill>
                   </a:tcPr>
                 </a:tc>
+                <a:extLst>
+                  <a:ext uri="{0D108BD9-81ED-4DB2-BD59-A6C34878D82A}">
+                    <a16:rowId xmlns:a16="http://schemas.microsoft.com/office/drawing/2014/main" val="10002"/>
+                  </a:ext>
+                </a:extLst>
               </a:tr>
               <a:tr h="444500">
                 <a:tc>
@@ -17987,14 +17136,6 @@
                         </a:rPr>
                         <a:t>密码修改与规则</a:t>
                       </a:r>
-                      <a:endParaRPr sz="1350">
-                        <a:solidFill>
-                          <a:srgbClr val="1F2937"/>
-                        </a:solidFill>
-                        <a:latin typeface="微软雅黑" panose="020B0503020204020204" pitchFamily="34" charset="-122"/>
-                        <a:ea typeface="微软雅黑" panose="020B0503020204020204" pitchFamily="34" charset="-122"/>
-                        <a:cs typeface="微软雅黑" panose="020B0503020204020204" pitchFamily="34" charset="-122"/>
-                      </a:endParaRPr>
                     </a:p>
                   </a:txBody>
                   <a:tcPr marL="114300" marR="95250" marT="66675" marB="66675" anchor="ctr">
@@ -18047,14 +17188,6 @@
                         </a:rPr>
                         <a:t>6</a:t>
                       </a:r>
-                      <a:endParaRPr sz="1350">
-                        <a:solidFill>
-                          <a:srgbClr val="1F2937"/>
-                        </a:solidFill>
-                        <a:latin typeface="微软雅黑" panose="020B0503020204020204" pitchFamily="34" charset="-122"/>
-                        <a:ea typeface="微软雅黑" panose="020B0503020204020204" pitchFamily="34" charset="-122"/>
-                        <a:cs typeface="微软雅黑" panose="020B0503020204020204" pitchFamily="34" charset="-122"/>
-                      </a:endParaRPr>
                     </a:p>
                   </a:txBody>
                   <a:tcPr marL="114300" marR="95250" marT="66675" marB="66675" anchor="ctr">
@@ -18110,14 +17243,6 @@
                         </a:rPr>
                         <a:t>AT-021～026</a:t>
                       </a:r>
-                      <a:endParaRPr sz="1350">
-                        <a:solidFill>
-                          <a:srgbClr val="1F2937"/>
-                        </a:solidFill>
-                        <a:latin typeface="微软雅黑" panose="020B0503020204020204" pitchFamily="34" charset="-122"/>
-                        <a:ea typeface="微软雅黑" panose="020B0503020204020204" pitchFamily="34" charset="-122"/>
-                        <a:cs typeface="微软雅黑" panose="020B0503020204020204" pitchFamily="34" charset="-122"/>
-                      </a:endParaRPr>
                     </a:p>
                   </a:txBody>
                   <a:tcPr marL="114300" marR="95250" marT="66675" marB="66675" anchor="ctr">
@@ -18156,6 +17281,11 @@
                     </a:solidFill>
                   </a:tcPr>
                 </a:tc>
+                <a:extLst>
+                  <a:ext uri="{0D108BD9-81ED-4DB2-BD59-A6C34878D82A}">
+                    <a16:rowId xmlns:a16="http://schemas.microsoft.com/office/drawing/2014/main" val="10003"/>
+                  </a:ext>
+                </a:extLst>
               </a:tr>
               <a:tr h="444500">
                 <a:tc>
@@ -18175,14 +17305,6 @@
                         </a:rPr>
                         <a:t>商品、金额与图片</a:t>
                       </a:r>
-                      <a:endParaRPr sz="1350">
-                        <a:solidFill>
-                          <a:srgbClr val="1F2937"/>
-                        </a:solidFill>
-                        <a:latin typeface="微软雅黑" panose="020B0503020204020204" pitchFamily="34" charset="-122"/>
-                        <a:ea typeface="微软雅黑" panose="020B0503020204020204" pitchFamily="34" charset="-122"/>
-                        <a:cs typeface="微软雅黑" panose="020B0503020204020204" pitchFamily="34" charset="-122"/>
-                      </a:endParaRPr>
                     </a:p>
                   </a:txBody>
                   <a:tcPr marL="114300" marR="95250" marT="66675" marB="66675" anchor="ctr">
@@ -18235,14 +17357,6 @@
                         </a:rPr>
                         <a:t>21</a:t>
                       </a:r>
-                      <a:endParaRPr sz="1350">
-                        <a:solidFill>
-                          <a:srgbClr val="1F2937"/>
-                        </a:solidFill>
-                        <a:latin typeface="微软雅黑" panose="020B0503020204020204" pitchFamily="34" charset="-122"/>
-                        <a:ea typeface="微软雅黑" panose="020B0503020204020204" pitchFamily="34" charset="-122"/>
-                        <a:cs typeface="微软雅黑" panose="020B0503020204020204" pitchFamily="34" charset="-122"/>
-                      </a:endParaRPr>
                     </a:p>
                   </a:txBody>
                   <a:tcPr marL="114300" marR="95250" marT="66675" marB="66675" anchor="ctr">
@@ -18298,14 +17412,6 @@
                         </a:rPr>
                         <a:t>AT-027～047</a:t>
                       </a:r>
-                      <a:endParaRPr sz="1350">
-                        <a:solidFill>
-                          <a:srgbClr val="1F2937"/>
-                        </a:solidFill>
-                        <a:latin typeface="微软雅黑" panose="020B0503020204020204" pitchFamily="34" charset="-122"/>
-                        <a:ea typeface="微软雅黑" panose="020B0503020204020204" pitchFamily="34" charset="-122"/>
-                        <a:cs typeface="微软雅黑" panose="020B0503020204020204" pitchFamily="34" charset="-122"/>
-                      </a:endParaRPr>
                     </a:p>
                   </a:txBody>
                   <a:tcPr marL="114300" marR="95250" marT="66675" marB="66675" anchor="ctr">
@@ -18344,6 +17450,11 @@
                     </a:solidFill>
                   </a:tcPr>
                 </a:tc>
+                <a:extLst>
+                  <a:ext uri="{0D108BD9-81ED-4DB2-BD59-A6C34878D82A}">
+                    <a16:rowId xmlns:a16="http://schemas.microsoft.com/office/drawing/2014/main" val="10004"/>
+                  </a:ext>
+                </a:extLst>
               </a:tr>
               <a:tr h="444500">
                 <a:tc>
@@ -18363,14 +17474,6 @@
                         </a:rPr>
                         <a:t>买家意向与冻结</a:t>
                       </a:r>
-                      <a:endParaRPr sz="1350">
-                        <a:solidFill>
-                          <a:srgbClr val="1F2937"/>
-                        </a:solidFill>
-                        <a:latin typeface="微软雅黑" panose="020B0503020204020204" pitchFamily="34" charset="-122"/>
-                        <a:ea typeface="微软雅黑" panose="020B0503020204020204" pitchFamily="34" charset="-122"/>
-                        <a:cs typeface="微软雅黑" panose="020B0503020204020204" pitchFamily="34" charset="-122"/>
-                      </a:endParaRPr>
                     </a:p>
                   </a:txBody>
                   <a:tcPr marL="114300" marR="95250" marT="66675" marB="66675" anchor="ctr">
@@ -18423,14 +17526,6 @@
                         </a:rPr>
                         <a:t>12</a:t>
                       </a:r>
-                      <a:endParaRPr sz="1350">
-                        <a:solidFill>
-                          <a:srgbClr val="1F2937"/>
-                        </a:solidFill>
-                        <a:latin typeface="微软雅黑" panose="020B0503020204020204" pitchFamily="34" charset="-122"/>
-                        <a:ea typeface="微软雅黑" panose="020B0503020204020204" pitchFamily="34" charset="-122"/>
-                        <a:cs typeface="微软雅黑" panose="020B0503020204020204" pitchFamily="34" charset="-122"/>
-                      </a:endParaRPr>
                     </a:p>
                   </a:txBody>
                   <a:tcPr marL="114300" marR="95250" marT="66675" marB="66675" anchor="ctr">
@@ -18486,14 +17581,6 @@
                         </a:rPr>
                         <a:t>AT-048～059</a:t>
                       </a:r>
-                      <a:endParaRPr sz="1350">
-                        <a:solidFill>
-                          <a:srgbClr val="1F2937"/>
-                        </a:solidFill>
-                        <a:latin typeface="微软雅黑" panose="020B0503020204020204" pitchFamily="34" charset="-122"/>
-                        <a:ea typeface="微软雅黑" panose="020B0503020204020204" pitchFamily="34" charset="-122"/>
-                        <a:cs typeface="微软雅黑" panose="020B0503020204020204" pitchFamily="34" charset="-122"/>
-                      </a:endParaRPr>
                     </a:p>
                   </a:txBody>
                   <a:tcPr marL="114300" marR="95250" marT="66675" marB="66675" anchor="ctr">
@@ -18532,6 +17619,11 @@
                     </a:solidFill>
                   </a:tcPr>
                 </a:tc>
+                <a:extLst>
+                  <a:ext uri="{0D108BD9-81ED-4DB2-BD59-A6C34878D82A}">
+                    <a16:rowId xmlns:a16="http://schemas.microsoft.com/office/drawing/2014/main" val="10005"/>
+                  </a:ext>
+                </a:extLst>
               </a:tr>
               <a:tr h="444500">
                 <a:tc>
@@ -18551,14 +17643,6 @@
                         </a:rPr>
                         <a:t>交易状态与递补</a:t>
                       </a:r>
-                      <a:endParaRPr sz="1350">
-                        <a:solidFill>
-                          <a:srgbClr val="1F2937"/>
-                        </a:solidFill>
-                        <a:latin typeface="微软雅黑" panose="020B0503020204020204" pitchFamily="34" charset="-122"/>
-                        <a:ea typeface="微软雅黑" panose="020B0503020204020204" pitchFamily="34" charset="-122"/>
-                        <a:cs typeface="微软雅黑" panose="020B0503020204020204" pitchFamily="34" charset="-122"/>
-                      </a:endParaRPr>
                     </a:p>
                   </a:txBody>
                   <a:tcPr marL="114300" marR="95250" marT="66675" marB="66675" anchor="ctr">
@@ -18611,14 +17695,6 @@
                         </a:rPr>
                         <a:t>8</a:t>
                       </a:r>
-                      <a:endParaRPr sz="1350">
-                        <a:solidFill>
-                          <a:srgbClr val="1F2937"/>
-                        </a:solidFill>
-                        <a:latin typeface="微软雅黑" panose="020B0503020204020204" pitchFamily="34" charset="-122"/>
-                        <a:ea typeface="微软雅黑" panose="020B0503020204020204" pitchFamily="34" charset="-122"/>
-                        <a:cs typeface="微软雅黑" panose="020B0503020204020204" pitchFamily="34" charset="-122"/>
-                      </a:endParaRPr>
                     </a:p>
                   </a:txBody>
                   <a:tcPr marL="114300" marR="95250" marT="66675" marB="66675" anchor="ctr">
@@ -18674,14 +17750,6 @@
                         </a:rPr>
                         <a:t>AT-060～067</a:t>
                       </a:r>
-                      <a:endParaRPr sz="1350">
-                        <a:solidFill>
-                          <a:srgbClr val="1F2937"/>
-                        </a:solidFill>
-                        <a:latin typeface="微软雅黑" panose="020B0503020204020204" pitchFamily="34" charset="-122"/>
-                        <a:ea typeface="微软雅黑" panose="020B0503020204020204" pitchFamily="34" charset="-122"/>
-                        <a:cs typeface="微软雅黑" panose="020B0503020204020204" pitchFamily="34" charset="-122"/>
-                      </a:endParaRPr>
                     </a:p>
                   </a:txBody>
                   <a:tcPr marL="114300" marR="95250" marT="66675" marB="66675" anchor="ctr">
@@ -18720,6 +17788,11 @@
                     </a:solidFill>
                   </a:tcPr>
                 </a:tc>
+                <a:extLst>
+                  <a:ext uri="{0D108BD9-81ED-4DB2-BD59-A6C34878D82A}">
+                    <a16:rowId xmlns:a16="http://schemas.microsoft.com/office/drawing/2014/main" val="10006"/>
+                  </a:ext>
+                </a:extLst>
               </a:tr>
               <a:tr h="444500">
                 <a:tc>
@@ -18739,14 +17812,6 @@
                         </a:rPr>
                         <a:t>持久化与旧数据迁移</a:t>
                       </a:r>
-                      <a:endParaRPr sz="1350">
-                        <a:solidFill>
-                          <a:srgbClr val="1F2937"/>
-                        </a:solidFill>
-                        <a:latin typeface="微软雅黑" panose="020B0503020204020204" pitchFamily="34" charset="-122"/>
-                        <a:ea typeface="微软雅黑" panose="020B0503020204020204" pitchFamily="34" charset="-122"/>
-                        <a:cs typeface="微软雅黑" panose="020B0503020204020204" pitchFamily="34" charset="-122"/>
-                      </a:endParaRPr>
                     </a:p>
                   </a:txBody>
                   <a:tcPr marL="114300" marR="95250" marT="66675" marB="66675" anchor="ctr">
@@ -18799,14 +17864,6 @@
                         </a:rPr>
                         <a:t>4</a:t>
                       </a:r>
-                      <a:endParaRPr sz="1350">
-                        <a:solidFill>
-                          <a:srgbClr val="1F2937"/>
-                        </a:solidFill>
-                        <a:latin typeface="微软雅黑" panose="020B0503020204020204" pitchFamily="34" charset="-122"/>
-                        <a:ea typeface="微软雅黑" panose="020B0503020204020204" pitchFamily="34" charset="-122"/>
-                        <a:cs typeface="微软雅黑" panose="020B0503020204020204" pitchFamily="34" charset="-122"/>
-                      </a:endParaRPr>
                     </a:p>
                   </a:txBody>
                   <a:tcPr marL="114300" marR="95250" marT="66675" marB="66675" anchor="ctr">
@@ -18862,14 +17919,6 @@
                         </a:rPr>
                         <a:t>AT-068～071</a:t>
                       </a:r>
-                      <a:endParaRPr sz="1350">
-                        <a:solidFill>
-                          <a:srgbClr val="1F2937"/>
-                        </a:solidFill>
-                        <a:latin typeface="微软雅黑" panose="020B0503020204020204" pitchFamily="34" charset="-122"/>
-                        <a:ea typeface="微软雅黑" panose="020B0503020204020204" pitchFamily="34" charset="-122"/>
-                        <a:cs typeface="微软雅黑" panose="020B0503020204020204" pitchFamily="34" charset="-122"/>
-                      </a:endParaRPr>
                     </a:p>
                   </a:txBody>
                   <a:tcPr marL="114300" marR="95250" marT="66675" marB="66675" anchor="ctr">
@@ -18908,6 +17957,11 @@
                     </a:solidFill>
                   </a:tcPr>
                 </a:tc>
+                <a:extLst>
+                  <a:ext uri="{0D108BD9-81ED-4DB2-BD59-A6C34878D82A}">
+                    <a16:rowId xmlns:a16="http://schemas.microsoft.com/office/drawing/2014/main" val="10007"/>
+                  </a:ext>
+                </a:extLst>
               </a:tr>
               <a:tr h="444500">
                 <a:tc>
@@ -18927,14 +17981,6 @@
                         </a:rPr>
                         <a:t>并发、非法请求与路径</a:t>
                       </a:r>
-                      <a:endParaRPr sz="1350">
-                        <a:solidFill>
-                          <a:srgbClr val="1F2937"/>
-                        </a:solidFill>
-                        <a:latin typeface="微软雅黑" panose="020B0503020204020204" pitchFamily="34" charset="-122"/>
-                        <a:ea typeface="微软雅黑" panose="020B0503020204020204" pitchFamily="34" charset="-122"/>
-                        <a:cs typeface="微软雅黑" panose="020B0503020204020204" pitchFamily="34" charset="-122"/>
-                      </a:endParaRPr>
                     </a:p>
                   </a:txBody>
                   <a:tcPr marL="114300" marR="95250" marT="66675" marB="66675" anchor="ctr">
@@ -18987,14 +18033,6 @@
                         </a:rPr>
                         <a:t>13</a:t>
                       </a:r>
-                      <a:endParaRPr sz="1350">
-                        <a:solidFill>
-                          <a:srgbClr val="1F2937"/>
-                        </a:solidFill>
-                        <a:latin typeface="微软雅黑" panose="020B0503020204020204" pitchFamily="34" charset="-122"/>
-                        <a:ea typeface="微软雅黑" panose="020B0503020204020204" pitchFamily="34" charset="-122"/>
-                        <a:cs typeface="微软雅黑" panose="020B0503020204020204" pitchFamily="34" charset="-122"/>
-                      </a:endParaRPr>
                     </a:p>
                   </a:txBody>
                   <a:tcPr marL="114300" marR="95250" marT="66675" marB="66675" anchor="ctr">
@@ -19050,14 +18088,6 @@
                         </a:rPr>
                         <a:t>AT-072～084</a:t>
                       </a:r>
-                      <a:endParaRPr sz="1350">
-                        <a:solidFill>
-                          <a:srgbClr val="1F2937"/>
-                        </a:solidFill>
-                        <a:latin typeface="微软雅黑" panose="020B0503020204020204" pitchFamily="34" charset="-122"/>
-                        <a:ea typeface="微软雅黑" panose="020B0503020204020204" pitchFamily="34" charset="-122"/>
-                        <a:cs typeface="微软雅黑" panose="020B0503020204020204" pitchFamily="34" charset="-122"/>
-                      </a:endParaRPr>
                     </a:p>
                   </a:txBody>
                   <a:tcPr marL="114300" marR="95250" marT="66675" marB="66675" anchor="ctr">
@@ -19096,6 +18126,11 @@
                     </a:solidFill>
                   </a:tcPr>
                 </a:tc>
+                <a:extLst>
+                  <a:ext uri="{0D108BD9-81ED-4DB2-BD59-A6C34878D82A}">
+                    <a16:rowId xmlns:a16="http://schemas.microsoft.com/office/drawing/2014/main" val="10008"/>
+                  </a:ext>
+                </a:extLst>
               </a:tr>
             </a:tbl>
           </a:graphicData>
@@ -19255,14 +18290,6 @@
               </a:rPr>
               <a:t>关键测试数据</a:t>
             </a:r>
-            <a:endParaRPr sz="1700" b="1">
-              <a:solidFill>
-                <a:srgbClr val="122D4E"/>
-              </a:solidFill>
-              <a:latin typeface="微软雅黑" panose="020B0503020204020204" pitchFamily="34" charset="-122"/>
-              <a:ea typeface="微软雅黑" panose="020B0503020204020204" pitchFamily="34" charset="-122"/>
-              <a:cs typeface="微软雅黑" panose="020B0503020204020204" pitchFamily="34" charset="-122"/>
-            </a:endParaRPr>
           </a:p>
         </p:txBody>
       </p:sp>
@@ -19420,14 +18447,6 @@
               </a:rPr>
               <a:t>价格</a:t>
             </a:r>
-            <a:endParaRPr sz="1500" b="1">
-              <a:solidFill>
-                <a:srgbClr val="2563EB"/>
-              </a:solidFill>
-              <a:latin typeface="微软雅黑" panose="020B0503020204020204" pitchFamily="34" charset="-122"/>
-              <a:ea typeface="微软雅黑" panose="020B0503020204020204" pitchFamily="34" charset="-122"/>
-              <a:cs typeface="微软雅黑" panose="020B0503020204020204" pitchFamily="34" charset="-122"/>
-            </a:endParaRPr>
           </a:p>
         </p:txBody>
       </p:sp>
@@ -19585,14 +18604,6 @@
               </a:rPr>
               <a:t>0 元、负数、三位小数、5000 位输入</a:t>
             </a:r>
-            <a:endParaRPr sz="1350">
-              <a:solidFill>
-                <a:srgbClr val="1F2937"/>
-              </a:solidFill>
-              <a:latin typeface="微软雅黑" panose="020B0503020204020204" pitchFamily="34" charset="-122"/>
-              <a:ea typeface="微软雅黑" panose="020B0503020204020204" pitchFamily="34" charset="-122"/>
-              <a:cs typeface="微软雅黑" panose="020B0503020204020204" pitchFamily="34" charset="-122"/>
-            </a:endParaRPr>
           </a:p>
         </p:txBody>
       </p:sp>
@@ -19750,14 +18761,6 @@
               </a:rPr>
               <a:t>图片</a:t>
             </a:r>
-            <a:endParaRPr sz="1500" b="1">
-              <a:solidFill>
-                <a:srgbClr val="2563EB"/>
-              </a:solidFill>
-              <a:latin typeface="微软雅黑" panose="020B0503020204020204" pitchFamily="34" charset="-122"/>
-              <a:ea typeface="微软雅黑" panose="020B0503020204020204" pitchFamily="34" charset="-122"/>
-              <a:cs typeface="微软雅黑" panose="020B0503020204020204" pitchFamily="34" charset="-122"/>
-            </a:endParaRPr>
           </a:p>
         </p:txBody>
       </p:sp>
@@ -19915,14 +18918,6 @@
               </a:rPr>
               <a:t>有效与伪造图片，5 MiB 和超出 1 字节</a:t>
             </a:r>
-            <a:endParaRPr sz="1350">
-              <a:solidFill>
-                <a:srgbClr val="1F2937"/>
-              </a:solidFill>
-              <a:latin typeface="微软雅黑" panose="020B0503020204020204" pitchFamily="34" charset="-122"/>
-              <a:ea typeface="微软雅黑" panose="020B0503020204020204" pitchFamily="34" charset="-122"/>
-              <a:cs typeface="微软雅黑" panose="020B0503020204020204" pitchFamily="34" charset="-122"/>
-            </a:endParaRPr>
           </a:p>
         </p:txBody>
       </p:sp>
@@ -20080,14 +19075,6 @@
               </a:rPr>
               <a:t>并发</a:t>
             </a:r>
-            <a:endParaRPr sz="1500" b="1">
-              <a:solidFill>
-                <a:srgbClr val="2563EB"/>
-              </a:solidFill>
-              <a:latin typeface="微软雅黑" panose="020B0503020204020204" pitchFamily="34" charset="-122"/>
-              <a:ea typeface="微软雅黑" panose="020B0503020204020204" pitchFamily="34" charset="-122"/>
-              <a:cs typeface="微软雅黑" panose="020B0503020204020204" pitchFamily="34" charset="-122"/>
-            </a:endParaRPr>
           </a:p>
         </p:txBody>
       </p:sp>
@@ -20245,14 +19232,6 @@
               </a:rPr>
               <a:t>20 个买家提交，两名卖家同时操作</a:t>
             </a:r>
-            <a:endParaRPr sz="1350">
-              <a:solidFill>
-                <a:srgbClr val="1F2937"/>
-              </a:solidFill>
-              <a:latin typeface="微软雅黑" panose="020B0503020204020204" pitchFamily="34" charset="-122"/>
-              <a:ea typeface="微软雅黑" panose="020B0503020204020204" pitchFamily="34" charset="-122"/>
-              <a:cs typeface="微软雅黑" panose="020B0503020204020204" pitchFamily="34" charset="-122"/>
-            </a:endParaRPr>
           </a:p>
         </p:txBody>
       </p:sp>
@@ -20410,14 +19389,6 @@
               </a:rPr>
               <a:t>迁移</a:t>
             </a:r>
-            <a:endParaRPr sz="1500" b="1">
-              <a:solidFill>
-                <a:srgbClr val="2563EB"/>
-              </a:solidFill>
-              <a:latin typeface="微软雅黑" panose="020B0503020204020204" pitchFamily="34" charset="-122"/>
-              <a:ea typeface="微软雅黑" panose="020B0503020204020204" pitchFamily="34" charset="-122"/>
-              <a:cs typeface="微软雅黑" panose="020B0503020204020204" pitchFamily="34" charset="-122"/>
-            </a:endParaRPr>
           </a:p>
         </p:txBody>
       </p:sp>
@@ -20575,14 +19546,6 @@
               </a:rPr>
               <a:t>商品 ID 41、意向 ID 73 及原有口令</a:t>
             </a:r>
-            <a:endParaRPr sz="1350">
-              <a:solidFill>
-                <a:srgbClr val="1F2937"/>
-              </a:solidFill>
-              <a:latin typeface="微软雅黑" panose="020B0503020204020204" pitchFamily="34" charset="-122"/>
-              <a:ea typeface="微软雅黑" panose="020B0503020204020204" pitchFamily="34" charset="-122"/>
-              <a:cs typeface="微软雅黑" panose="020B0503020204020204" pitchFamily="34" charset="-122"/>
-            </a:endParaRPr>
           </a:p>
         </p:txBody>
       </p:sp>
@@ -20740,14 +19703,6 @@
               </a:rPr>
               <a:t>AT-001～AT-084 与 Java 脚本中的用例编号一一对应</a:t>
             </a:r>
-            <a:endParaRPr sz="1350">
-              <a:solidFill>
-                <a:srgbClr val="64748B"/>
-              </a:solidFill>
-              <a:latin typeface="微软雅黑" panose="020B0503020204020204" pitchFamily="34" charset="-122"/>
-              <a:ea typeface="微软雅黑" panose="020B0503020204020204" pitchFamily="34" charset="-122"/>
-              <a:cs typeface="微软雅黑" panose="020B0503020204020204" pitchFamily="34" charset="-122"/>
-            </a:endParaRPr>
           </a:p>
         </p:txBody>
       </p:sp>
@@ -20930,14 +19885,6 @@
               </a:rPr>
               <a:t>最终版复测：84 项全部通过</a:t>
             </a:r>
-            <a:endParaRPr sz="2600" b="1">
-              <a:solidFill>
-                <a:srgbClr val="122D4E"/>
-              </a:solidFill>
-              <a:latin typeface="微软雅黑" panose="020B0503020204020204" pitchFamily="34" charset="-122"/>
-              <a:ea typeface="微软雅黑" panose="020B0503020204020204" pitchFamily="34" charset="-122"/>
-              <a:cs typeface="微软雅黑" panose="020B0503020204020204" pitchFamily="34" charset="-122"/>
-            </a:endParaRPr>
           </a:p>
         </p:txBody>
       </p:sp>
@@ -21095,14 +20042,6 @@
               </a:rPr>
               <a:t>11-2</a:t>
             </a:r>
-            <a:endParaRPr sz="1800" b="1">
-              <a:solidFill>
-                <a:srgbClr val="2563EB"/>
-              </a:solidFill>
-              <a:latin typeface="微软雅黑" panose="020B0503020204020204" pitchFamily="34" charset="-122"/>
-              <a:ea typeface="微软雅黑" panose="020B0503020204020204" pitchFamily="34" charset="-122"/>
-              <a:cs typeface="微软雅黑" panose="020B0503020204020204" pitchFamily="34" charset="-122"/>
-            </a:endParaRPr>
           </a:p>
         </p:txBody>
       </p:sp>
@@ -21285,14 +20224,6 @@
               </a:rPr>
               <a:t>软件工程实践 · 第 2 组 · 在线购物系统</a:t>
             </a:r>
-            <a:endParaRPr sz="900">
-              <a:solidFill>
-                <a:srgbClr val="64748B"/>
-              </a:solidFill>
-              <a:latin typeface="微软雅黑" panose="020B0503020204020204" pitchFamily="34" charset="-122"/>
-              <a:ea typeface="微软雅黑" panose="020B0503020204020204" pitchFamily="34" charset="-122"/>
-              <a:cs typeface="微软雅黑" panose="020B0503020204020204" pitchFamily="34" charset="-122"/>
-            </a:endParaRPr>
           </a:p>
         </p:txBody>
       </p:sp>
@@ -21450,14 +20381,6 @@
               </a:rPr>
               <a:t>84 / 84</a:t>
             </a:r>
-            <a:endParaRPr sz="5100" b="1">
-              <a:solidFill>
-                <a:srgbClr val="2563EB"/>
-              </a:solidFill>
-              <a:latin typeface="微软雅黑" panose="020B0503020204020204" pitchFamily="34" charset="-122"/>
-              <a:ea typeface="微软雅黑" panose="020B0503020204020204" pitchFamily="34" charset="-122"/>
-              <a:cs typeface="微软雅黑" panose="020B0503020204020204" pitchFamily="34" charset="-122"/>
-            </a:endParaRPr>
           </a:p>
         </p:txBody>
       </p:sp>
@@ -21615,14 +20538,6 @@
               </a:rPr>
               <a:t>First_accept 最终版接口回归</a:t>
             </a:r>
-            <a:endParaRPr sz="1800" b="1">
-              <a:solidFill>
-                <a:srgbClr val="122D4E"/>
-              </a:solidFill>
-              <a:latin typeface="微软雅黑" panose="020B0503020204020204" pitchFamily="34" charset="-122"/>
-              <a:ea typeface="微软雅黑" panose="020B0503020204020204" pitchFamily="34" charset="-122"/>
-              <a:cs typeface="微软雅黑" panose="020B0503020204020204" pitchFamily="34" charset="-122"/>
-            </a:endParaRPr>
           </a:p>
         </p:txBody>
       </p:sp>
@@ -21641,8 +20556,20 @@
             <a:tbl>
               <a:tblPr firstRow="1"/>
               <a:tblGrid>
-                <a:gridCol w="3390900"/>
-                <a:gridCol w="1962150"/>
+                <a:gridCol w="3390900">
+                  <a:extLst>
+                    <a:ext uri="{9D8B030D-6E8A-4147-A177-3AD203B41FA5}">
+                      <a16:colId xmlns:a16="http://schemas.microsoft.com/office/drawing/2014/main" val="20000"/>
+                    </a:ext>
+                  </a:extLst>
+                </a:gridCol>
+                <a:gridCol w="1962150">
+                  <a:extLst>
+                    <a:ext uri="{9D8B030D-6E8A-4147-A177-3AD203B41FA5}">
+                      <a16:colId xmlns:a16="http://schemas.microsoft.com/office/drawing/2014/main" val="20001"/>
+                    </a:ext>
+                  </a:extLst>
+                </a:gridCol>
               </a:tblGrid>
               <a:tr h="485775">
                 <a:tc>
@@ -21662,14 +20589,6 @@
                         </a:rPr>
                         <a:t>执行结果</a:t>
                       </a:r>
-                      <a:endParaRPr sz="1650" b="1">
-                        <a:solidFill>
-                          <a:srgbClr val="FFFFFF"/>
-                        </a:solidFill>
-                        <a:latin typeface="微软雅黑" panose="020B0503020204020204" pitchFamily="34" charset="-122"/>
-                        <a:ea typeface="微软雅黑" panose="020B0503020204020204" pitchFamily="34" charset="-122"/>
-                        <a:cs typeface="微软雅黑" panose="020B0503020204020204" pitchFamily="34" charset="-122"/>
-                      </a:endParaRPr>
                     </a:p>
                   </a:txBody>
                   <a:tcPr marL="114300" marR="95250" marT="66675" marB="66675" anchor="ctr">
@@ -21719,14 +20638,6 @@
                         </a:rPr>
                         <a:t>数量</a:t>
                       </a:r>
-                      <a:endParaRPr sz="1650" b="1">
-                        <a:solidFill>
-                          <a:srgbClr val="FFFFFF"/>
-                        </a:solidFill>
-                        <a:latin typeface="微软雅黑" panose="020B0503020204020204" pitchFamily="34" charset="-122"/>
-                        <a:ea typeface="微软雅黑" panose="020B0503020204020204" pitchFamily="34" charset="-122"/>
-                        <a:cs typeface="微软雅黑" panose="020B0503020204020204" pitchFamily="34" charset="-122"/>
-                      </a:endParaRPr>
                     </a:p>
                   </a:txBody>
                   <a:tcPr marL="114300" marR="95250" marT="66675" marB="66675" anchor="ctr">
@@ -21762,6 +20673,11 @@
                     </a:solidFill>
                   </a:tcPr>
                 </a:tc>
+                <a:extLst>
+                  <a:ext uri="{0D108BD9-81ED-4DB2-BD59-A6C34878D82A}">
+                    <a16:rowId xmlns:a16="http://schemas.microsoft.com/office/drawing/2014/main" val="10000"/>
+                  </a:ext>
+                </a:extLst>
               </a:tr>
               <a:tr h="485775">
                 <a:tc>
@@ -21781,14 +20697,6 @@
                         </a:rPr>
                         <a:t>通过</a:t>
                       </a:r>
-                      <a:endParaRPr sz="1650">
-                        <a:solidFill>
-                          <a:srgbClr val="1F2937"/>
-                        </a:solidFill>
-                        <a:latin typeface="微软雅黑" panose="020B0503020204020204" pitchFamily="34" charset="-122"/>
-                        <a:ea typeface="微软雅黑" panose="020B0503020204020204" pitchFamily="34" charset="-122"/>
-                        <a:cs typeface="微软雅黑" panose="020B0503020204020204" pitchFamily="34" charset="-122"/>
-                      </a:endParaRPr>
                     </a:p>
                   </a:txBody>
                   <a:tcPr marL="114300" marR="95250" marT="66675" marB="66675" anchor="ctr">
@@ -21841,14 +20749,6 @@
                         </a:rPr>
                         <a:t>84</a:t>
                       </a:r>
-                      <a:endParaRPr sz="1650">
-                        <a:solidFill>
-                          <a:srgbClr val="078657"/>
-                        </a:solidFill>
-                        <a:latin typeface="微软雅黑" panose="020B0503020204020204" pitchFamily="34" charset="-122"/>
-                        <a:ea typeface="微软雅黑" panose="020B0503020204020204" pitchFamily="34" charset="-122"/>
-                        <a:cs typeface="微软雅黑" panose="020B0503020204020204" pitchFamily="34" charset="-122"/>
-                      </a:endParaRPr>
                     </a:p>
                   </a:txBody>
                   <a:tcPr marL="114300" marR="95250" marT="66675" marB="66675" anchor="ctr">
@@ -21887,6 +20787,11 @@
                     </a:solidFill>
                   </a:tcPr>
                 </a:tc>
+                <a:extLst>
+                  <a:ext uri="{0D108BD9-81ED-4DB2-BD59-A6C34878D82A}">
+                    <a16:rowId xmlns:a16="http://schemas.microsoft.com/office/drawing/2014/main" val="10001"/>
+                  </a:ext>
+                </a:extLst>
               </a:tr>
               <a:tr h="485775">
                 <a:tc>
@@ -21906,14 +20811,6 @@
                         </a:rPr>
                         <a:t>失败</a:t>
                       </a:r>
-                      <a:endParaRPr sz="1650">
-                        <a:solidFill>
-                          <a:srgbClr val="1F2937"/>
-                        </a:solidFill>
-                        <a:latin typeface="微软雅黑" panose="020B0503020204020204" pitchFamily="34" charset="-122"/>
-                        <a:ea typeface="微软雅黑" panose="020B0503020204020204" pitchFamily="34" charset="-122"/>
-                        <a:cs typeface="微软雅黑" panose="020B0503020204020204" pitchFamily="34" charset="-122"/>
-                      </a:endParaRPr>
                     </a:p>
                   </a:txBody>
                   <a:tcPr marL="114300" marR="95250" marT="66675" marB="66675" anchor="ctr">
@@ -21966,14 +20863,6 @@
                         </a:rPr>
                         <a:t>0</a:t>
                       </a:r>
-                      <a:endParaRPr sz="1650">
-                        <a:solidFill>
-                          <a:srgbClr val="078657"/>
-                        </a:solidFill>
-                        <a:latin typeface="微软雅黑" panose="020B0503020204020204" pitchFamily="34" charset="-122"/>
-                        <a:ea typeface="微软雅黑" panose="020B0503020204020204" pitchFamily="34" charset="-122"/>
-                        <a:cs typeface="微软雅黑" panose="020B0503020204020204" pitchFamily="34" charset="-122"/>
-                      </a:endParaRPr>
                     </a:p>
                   </a:txBody>
                   <a:tcPr marL="114300" marR="95250" marT="66675" marB="66675" anchor="ctr">
@@ -22012,6 +20901,11 @@
                     </a:solidFill>
                   </a:tcPr>
                 </a:tc>
+                <a:extLst>
+                  <a:ext uri="{0D108BD9-81ED-4DB2-BD59-A6C34878D82A}">
+                    <a16:rowId xmlns:a16="http://schemas.microsoft.com/office/drawing/2014/main" val="10002"/>
+                  </a:ext>
+                </a:extLst>
               </a:tr>
               <a:tr h="485775">
                 <a:tc>
@@ -22031,14 +20925,6 @@
                         </a:rPr>
                         <a:t>错误</a:t>
                       </a:r>
-                      <a:endParaRPr sz="1650">
-                        <a:solidFill>
-                          <a:srgbClr val="1F2937"/>
-                        </a:solidFill>
-                        <a:latin typeface="微软雅黑" panose="020B0503020204020204" pitchFamily="34" charset="-122"/>
-                        <a:ea typeface="微软雅黑" panose="020B0503020204020204" pitchFamily="34" charset="-122"/>
-                        <a:cs typeface="微软雅黑" panose="020B0503020204020204" pitchFamily="34" charset="-122"/>
-                      </a:endParaRPr>
                     </a:p>
                   </a:txBody>
                   <a:tcPr marL="114300" marR="95250" marT="66675" marB="66675" anchor="ctr">
@@ -22091,14 +20977,6 @@
                         </a:rPr>
                         <a:t>0</a:t>
                       </a:r>
-                      <a:endParaRPr sz="1650">
-                        <a:solidFill>
-                          <a:srgbClr val="078657"/>
-                        </a:solidFill>
-                        <a:latin typeface="微软雅黑" panose="020B0503020204020204" pitchFamily="34" charset="-122"/>
-                        <a:ea typeface="微软雅黑" panose="020B0503020204020204" pitchFamily="34" charset="-122"/>
-                        <a:cs typeface="微软雅黑" panose="020B0503020204020204" pitchFamily="34" charset="-122"/>
-                      </a:endParaRPr>
                     </a:p>
                   </a:txBody>
                   <a:tcPr marL="114300" marR="95250" marT="66675" marB="66675" anchor="ctr">
@@ -22137,6 +21015,11 @@
                     </a:solidFill>
                   </a:tcPr>
                 </a:tc>
+                <a:extLst>
+                  <a:ext uri="{0D108BD9-81ED-4DB2-BD59-A6C34878D82A}">
+                    <a16:rowId xmlns:a16="http://schemas.microsoft.com/office/drawing/2014/main" val="10003"/>
+                  </a:ext>
+                </a:extLst>
               </a:tr>
               <a:tr h="485775">
                 <a:tc>
@@ -22156,14 +21039,6 @@
                         </a:rPr>
                         <a:t>跳过</a:t>
                       </a:r>
-                      <a:endParaRPr sz="1650">
-                        <a:solidFill>
-                          <a:srgbClr val="1F2937"/>
-                        </a:solidFill>
-                        <a:latin typeface="微软雅黑" panose="020B0503020204020204" pitchFamily="34" charset="-122"/>
-                        <a:ea typeface="微软雅黑" panose="020B0503020204020204" pitchFamily="34" charset="-122"/>
-                        <a:cs typeface="微软雅黑" panose="020B0503020204020204" pitchFamily="34" charset="-122"/>
-                      </a:endParaRPr>
                     </a:p>
                   </a:txBody>
                   <a:tcPr marL="114300" marR="95250" marT="66675" marB="66675" anchor="ctr">
@@ -22216,14 +21091,6 @@
                         </a:rPr>
                         <a:t>0</a:t>
                       </a:r>
-                      <a:endParaRPr sz="1650">
-                        <a:solidFill>
-                          <a:srgbClr val="078657"/>
-                        </a:solidFill>
-                        <a:latin typeface="微软雅黑" panose="020B0503020204020204" pitchFamily="34" charset="-122"/>
-                        <a:ea typeface="微软雅黑" panose="020B0503020204020204" pitchFamily="34" charset="-122"/>
-                        <a:cs typeface="微软雅黑" panose="020B0503020204020204" pitchFamily="34" charset="-122"/>
-                      </a:endParaRPr>
                     </a:p>
                   </a:txBody>
                   <a:tcPr marL="114300" marR="95250" marT="66675" marB="66675" anchor="ctr">
@@ -22262,6 +21129,11 @@
                     </a:solidFill>
                   </a:tcPr>
                 </a:tc>
+                <a:extLst>
+                  <a:ext uri="{0D108BD9-81ED-4DB2-BD59-A6C34878D82A}">
+                    <a16:rowId xmlns:a16="http://schemas.microsoft.com/office/drawing/2014/main" val="10004"/>
+                  </a:ext>
+                </a:extLst>
               </a:tr>
             </a:tbl>
           </a:graphicData>
@@ -22421,14 +21293,6 @@
               </a:rPr>
               <a:t>本次核验版本</a:t>
             </a:r>
-            <a:endParaRPr sz="1700" b="1">
-              <a:solidFill>
-                <a:srgbClr val="122D4E"/>
-              </a:solidFill>
-              <a:latin typeface="微软雅黑" panose="020B0503020204020204" pitchFamily="34" charset="-122"/>
-              <a:ea typeface="微软雅黑" panose="020B0503020204020204" pitchFamily="34" charset="-122"/>
-              <a:cs typeface="微软雅黑" panose="020B0503020204020204" pitchFamily="34" charset="-122"/>
-            </a:endParaRPr>
           </a:p>
         </p:txBody>
       </p:sp>
@@ -22586,14 +21450,6 @@
               </a:rPr>
               <a:t>First_accept   b390e8b</a:t>
             </a:r>
-            <a:endParaRPr sz="2025" b="1">
-              <a:solidFill>
-                <a:srgbClr val="122D4E"/>
-              </a:solidFill>
-              <a:latin typeface="微软雅黑" panose="020B0503020204020204" pitchFamily="34" charset="-122"/>
-              <a:ea typeface="微软雅黑" panose="020B0503020204020204" pitchFamily="34" charset="-122"/>
-              <a:cs typeface="微软雅黑" panose="020B0503020204020204" pitchFamily="34" charset="-122"/>
-            </a:endParaRPr>
           </a:p>
         </p:txBody>
       </p:sp>
@@ -22751,14 +21607,6 @@
               </a:rPr>
               <a:t>复测日期</a:t>
             </a:r>
-            <a:endParaRPr sz="1350" b="1">
-              <a:solidFill>
-                <a:srgbClr val="122D4E"/>
-              </a:solidFill>
-              <a:latin typeface="微软雅黑" panose="020B0503020204020204" pitchFamily="34" charset="-122"/>
-              <a:ea typeface="微软雅黑" panose="020B0503020204020204" pitchFamily="34" charset="-122"/>
-              <a:cs typeface="微软雅黑" panose="020B0503020204020204" pitchFamily="34" charset="-122"/>
-            </a:endParaRPr>
           </a:p>
         </p:txBody>
       </p:sp>
@@ -22916,14 +21764,6 @@
               </a:rPr>
               <a:t>2026-10-21</a:t>
             </a:r>
-            <a:endParaRPr sz="1350">
-              <a:solidFill>
-                <a:srgbClr val="1F2937"/>
-              </a:solidFill>
-              <a:latin typeface="微软雅黑" panose="020B0503020204020204" pitchFamily="34" charset="-122"/>
-              <a:ea typeface="微软雅黑" panose="020B0503020204020204" pitchFamily="34" charset="-122"/>
-              <a:cs typeface="微软雅黑" panose="020B0503020204020204" pitchFamily="34" charset="-122"/>
-            </a:endParaRPr>
           </a:p>
         </p:txBody>
       </p:sp>
@@ -23081,14 +21921,6 @@
               </a:rPr>
               <a:t>执行方式</a:t>
             </a:r>
-            <a:endParaRPr sz="1350" b="1">
-              <a:solidFill>
-                <a:srgbClr val="122D4E"/>
-              </a:solidFill>
-              <a:latin typeface="微软雅黑" panose="020B0503020204020204" pitchFamily="34" charset="-122"/>
-              <a:ea typeface="微软雅黑" panose="020B0503020204020204" pitchFamily="34" charset="-122"/>
-              <a:cs typeface="微软雅黑" panose="020B0503020204020204" pitchFamily="34" charset="-122"/>
-            </a:endParaRPr>
           </a:p>
         </p:txBody>
       </p:sp>
@@ -23246,14 +22078,6 @@
               </a:rPr>
               <a:t>JUnit 5，通过 HTTP 检查真实服务</a:t>
             </a:r>
-            <a:endParaRPr sz="1350">
-              <a:solidFill>
-                <a:srgbClr val="1F2937"/>
-              </a:solidFill>
-              <a:latin typeface="微软雅黑" panose="020B0503020204020204" pitchFamily="34" charset="-122"/>
-              <a:ea typeface="微软雅黑" panose="020B0503020204020204" pitchFamily="34" charset="-122"/>
-              <a:cs typeface="微软雅黑" panose="020B0503020204020204" pitchFamily="34" charset="-122"/>
-            </a:endParaRPr>
           </a:p>
         </p:txBody>
       </p:sp>
@@ -23411,14 +22235,6 @@
               </a:rPr>
               <a:t>运行环境</a:t>
             </a:r>
-            <a:endParaRPr sz="1350" b="1">
-              <a:solidFill>
-                <a:srgbClr val="122D4E"/>
-              </a:solidFill>
-              <a:latin typeface="微软雅黑" panose="020B0503020204020204" pitchFamily="34" charset="-122"/>
-              <a:ea typeface="微软雅黑" panose="020B0503020204020204" pitchFamily="34" charset="-122"/>
-              <a:cs typeface="微软雅黑" panose="020B0503020204020204" pitchFamily="34" charset="-122"/>
-            </a:endParaRPr>
           </a:p>
         </p:txBody>
       </p:sp>
@@ -23576,14 +22392,6 @@
               </a:rPr>
               <a:t>Java 25.0.1，项目编译目标为 Java 17</a:t>
             </a:r>
-            <a:endParaRPr sz="1350">
-              <a:solidFill>
-                <a:srgbClr val="1F2937"/>
-              </a:solidFill>
-              <a:latin typeface="微软雅黑" panose="020B0503020204020204" pitchFamily="34" charset="-122"/>
-              <a:ea typeface="微软雅黑" panose="020B0503020204020204" pitchFamily="34" charset="-122"/>
-              <a:cs typeface="微软雅黑" panose="020B0503020204020204" pitchFamily="34" charset="-122"/>
-            </a:endParaRPr>
           </a:p>
         </p:txBody>
       </p:sp>
@@ -23741,14 +22549,6 @@
               </a:rPr>
               <a:t>测试隔离</a:t>
             </a:r>
-            <a:endParaRPr sz="1350" b="1">
-              <a:solidFill>
-                <a:srgbClr val="122D4E"/>
-              </a:solidFill>
-              <a:latin typeface="微软雅黑" panose="020B0503020204020204" pitchFamily="34" charset="-122"/>
-              <a:ea typeface="微软雅黑" panose="020B0503020204020204" pitchFamily="34" charset="-122"/>
-              <a:cs typeface="微软雅黑" panose="020B0503020204020204" pitchFamily="34" charset="-122"/>
-            </a:endParaRPr>
           </a:p>
         </p:txBody>
       </p:sp>
@@ -23906,14 +22706,6 @@
               </a:rPr>
               <a:t>临时项目副本、SQLite 与图片目录</a:t>
             </a:r>
-            <a:endParaRPr sz="1350">
-              <a:solidFill>
-                <a:srgbClr val="1F2937"/>
-              </a:solidFill>
-              <a:latin typeface="微软雅黑" panose="020B0503020204020204" pitchFamily="34" charset="-122"/>
-              <a:ea typeface="微软雅黑" panose="020B0503020204020204" pitchFamily="34" charset="-122"/>
-              <a:cs typeface="微软雅黑" panose="020B0503020204020204" pitchFamily="34" charset="-122"/>
-            </a:endParaRPr>
           </a:p>
         </p:txBody>
       </p:sp>
@@ -24071,14 +22863,6 @@
               </a:rPr>
               <a:t>套件耗时</a:t>
             </a:r>
-            <a:endParaRPr sz="1350" b="1">
-              <a:solidFill>
-                <a:srgbClr val="122D4E"/>
-              </a:solidFill>
-              <a:latin typeface="微软雅黑" panose="020B0503020204020204" pitchFamily="34" charset="-122"/>
-              <a:ea typeface="微软雅黑" panose="020B0503020204020204" pitchFamily="34" charset="-122"/>
-              <a:cs typeface="微软雅黑" panose="020B0503020204020204" pitchFamily="34" charset="-122"/>
-            </a:endParaRPr>
           </a:p>
         </p:txBody>
       </p:sp>
@@ -24236,14 +23020,6 @@
               </a:rPr>
               <a:t>70.29 秒</a:t>
             </a:r>
-            <a:endParaRPr sz="1350">
-              <a:solidFill>
-                <a:srgbClr val="1F2937"/>
-              </a:solidFill>
-              <a:latin typeface="微软雅黑" panose="020B0503020204020204" pitchFamily="34" charset="-122"/>
-              <a:ea typeface="微软雅黑" panose="020B0503020204020204" pitchFamily="34" charset="-122"/>
-              <a:cs typeface="微软雅黑" panose="020B0503020204020204" pitchFamily="34" charset="-122"/>
-            </a:endParaRPr>
           </a:p>
         </p:txBody>
       </p:sp>
@@ -25155,14 +23931,6 @@
               </a:rPr>
               <a:t>缺陷迭代：问题、修复与复测</a:t>
             </a:r>
-            <a:endParaRPr sz="2600" b="1">
-              <a:solidFill>
-                <a:srgbClr val="122D4E"/>
-              </a:solidFill>
-              <a:latin typeface="微软雅黑" panose="020B0503020204020204" pitchFamily="34" charset="-122"/>
-              <a:ea typeface="微软雅黑" panose="020B0503020204020204" pitchFamily="34" charset="-122"/>
-              <a:cs typeface="微软雅黑" panose="020B0503020204020204" pitchFamily="34" charset="-122"/>
-            </a:endParaRPr>
           </a:p>
         </p:txBody>
       </p:sp>
@@ -25320,14 +24088,6 @@
               </a:rPr>
               <a:t>11-3</a:t>
             </a:r>
-            <a:endParaRPr sz="1800" b="1">
-              <a:solidFill>
-                <a:srgbClr val="2563EB"/>
-              </a:solidFill>
-              <a:latin typeface="微软雅黑" panose="020B0503020204020204" pitchFamily="34" charset="-122"/>
-              <a:ea typeface="微软雅黑" panose="020B0503020204020204" pitchFamily="34" charset="-122"/>
-              <a:cs typeface="微软雅黑" panose="020B0503020204020204" pitchFamily="34" charset="-122"/>
-            </a:endParaRPr>
           </a:p>
         </p:txBody>
       </p:sp>
@@ -25510,14 +24270,6 @@
               </a:rPr>
               <a:t>软件工程实践 · 第 2 组 · 在线购物系统</a:t>
             </a:r>
-            <a:endParaRPr sz="900">
-              <a:solidFill>
-                <a:srgbClr val="64748B"/>
-              </a:solidFill>
-              <a:latin typeface="微软雅黑" panose="020B0503020204020204" pitchFamily="34" charset="-122"/>
-              <a:ea typeface="微软雅黑" panose="020B0503020204020204" pitchFamily="34" charset="-122"/>
-              <a:cs typeface="微软雅黑" panose="020B0503020204020204" pitchFamily="34" charset="-122"/>
-            </a:endParaRPr>
           </a:p>
         </p:txBody>
       </p:sp>
@@ -25675,14 +24427,6 @@
               </a:rPr>
               <a:t>为每项问题保留修复前现象和对应回归用例</a:t>
             </a:r>
-            <a:endParaRPr sz="1700" b="1">
-              <a:solidFill>
-                <a:srgbClr val="122D4E"/>
-              </a:solidFill>
-              <a:latin typeface="微软雅黑" panose="020B0503020204020204" pitchFamily="34" charset="-122"/>
-              <a:ea typeface="微软雅黑" panose="020B0503020204020204" pitchFamily="34" charset="-122"/>
-              <a:cs typeface="微软雅黑" panose="020B0503020204020204" pitchFamily="34" charset="-122"/>
-            </a:endParaRPr>
           </a:p>
         </p:txBody>
       </p:sp>
@@ -25701,10 +24445,34 @@
             <a:tbl>
               <a:tblPr firstRow="1"/>
               <a:tblGrid>
-                <a:gridCol w="2133600"/>
-                <a:gridCol w="3124200"/>
-                <a:gridCol w="3810000"/>
-                <a:gridCol w="2133600"/>
+                <a:gridCol w="2133600">
+                  <a:extLst>
+                    <a:ext uri="{9D8B030D-6E8A-4147-A177-3AD203B41FA5}">
+                      <a16:colId xmlns:a16="http://schemas.microsoft.com/office/drawing/2014/main" val="20000"/>
+                    </a:ext>
+                  </a:extLst>
+                </a:gridCol>
+                <a:gridCol w="3124200">
+                  <a:extLst>
+                    <a:ext uri="{9D8B030D-6E8A-4147-A177-3AD203B41FA5}">
+                      <a16:colId xmlns:a16="http://schemas.microsoft.com/office/drawing/2014/main" val="20001"/>
+                    </a:ext>
+                  </a:extLst>
+                </a:gridCol>
+                <a:gridCol w="3810000">
+                  <a:extLst>
+                    <a:ext uri="{9D8B030D-6E8A-4147-A177-3AD203B41FA5}">
+                      <a16:colId xmlns:a16="http://schemas.microsoft.com/office/drawing/2014/main" val="20002"/>
+                    </a:ext>
+                  </a:extLst>
+                </a:gridCol>
+                <a:gridCol w="2133600">
+                  <a:extLst>
+                    <a:ext uri="{9D8B030D-6E8A-4147-A177-3AD203B41FA5}">
+                      <a16:colId xmlns:a16="http://schemas.microsoft.com/office/drawing/2014/main" val="20003"/>
+                    </a:ext>
+                  </a:extLst>
+                </a:gridCol>
               </a:tblGrid>
               <a:tr h="842010">
                 <a:tc>
@@ -25724,14 +24492,6 @@
                         </a:rPr>
                         <a:t>缺陷</a:t>
                       </a:r>
-                      <a:endParaRPr sz="1350" b="1">
-                        <a:solidFill>
-                          <a:srgbClr val="FFFFFF"/>
-                        </a:solidFill>
-                        <a:latin typeface="微软雅黑" panose="020B0503020204020204" pitchFamily="34" charset="-122"/>
-                        <a:ea typeface="微软雅黑" panose="020B0503020204020204" pitchFamily="34" charset="-122"/>
-                        <a:cs typeface="微软雅黑" panose="020B0503020204020204" pitchFamily="34" charset="-122"/>
-                      </a:endParaRPr>
                     </a:p>
                   </a:txBody>
                   <a:tcPr marL="114300" marR="95250" marT="66675" marB="66675" anchor="ctr">
@@ -25781,14 +24541,6 @@
                         </a:rPr>
                         <a:t>原因与修复</a:t>
                       </a:r>
-                      <a:endParaRPr sz="1350" b="1">
-                        <a:solidFill>
-                          <a:srgbClr val="FFFFFF"/>
-                        </a:solidFill>
-                        <a:latin typeface="微软雅黑" panose="020B0503020204020204" pitchFamily="34" charset="-122"/>
-                        <a:ea typeface="微软雅黑" panose="020B0503020204020204" pitchFamily="34" charset="-122"/>
-                        <a:cs typeface="微软雅黑" panose="020B0503020204020204" pitchFamily="34" charset="-122"/>
-                      </a:endParaRPr>
                     </a:p>
                   </a:txBody>
                   <a:tcPr marL="114300" marR="95250" marT="66675" marB="66675" anchor="ctr">
@@ -25841,14 +24593,6 @@
                         </a:rPr>
                         <a:t>最终版复测结果</a:t>
                       </a:r>
-                      <a:endParaRPr sz="1350" b="1">
-                        <a:solidFill>
-                          <a:srgbClr val="FFFFFF"/>
-                        </a:solidFill>
-                        <a:latin typeface="微软雅黑" panose="020B0503020204020204" pitchFamily="34" charset="-122"/>
-                        <a:ea typeface="微软雅黑" panose="020B0503020204020204" pitchFamily="34" charset="-122"/>
-                        <a:cs typeface="微软雅黑" panose="020B0503020204020204" pitchFamily="34" charset="-122"/>
-                      </a:endParaRPr>
                     </a:p>
                   </a:txBody>
                   <a:tcPr marL="114300" marR="95250" marT="66675" marB="66675" anchor="ctr">
@@ -25901,14 +24645,6 @@
                         </a:rPr>
                         <a:t>对应用例</a:t>
                       </a:r>
-                      <a:endParaRPr sz="1350" b="1">
-                        <a:solidFill>
-                          <a:srgbClr val="FFFFFF"/>
-                        </a:solidFill>
-                        <a:latin typeface="微软雅黑" panose="020B0503020204020204" pitchFamily="34" charset="-122"/>
-                        <a:ea typeface="微软雅黑" panose="020B0503020204020204" pitchFamily="34" charset="-122"/>
-                        <a:cs typeface="微软雅黑" panose="020B0503020204020204" pitchFamily="34" charset="-122"/>
-                      </a:endParaRPr>
                     </a:p>
                   </a:txBody>
                   <a:tcPr marL="114300" marR="95250" marT="66675" marB="66675" anchor="ctr">
@@ -25944,6 +24680,11 @@
                     </a:solidFill>
                   </a:tcPr>
                 </a:tc>
+                <a:extLst>
+                  <a:ext uri="{0D108BD9-81ED-4DB2-BD59-A6C34878D82A}">
+                    <a16:rowId xmlns:a16="http://schemas.microsoft.com/office/drawing/2014/main" val="10000"/>
+                  </a:ext>
+                </a:extLst>
               </a:tr>
               <a:tr h="842010">
                 <a:tc>
@@ -25963,14 +24704,6 @@
                         </a:rPr>
                         <a:t>DEF-001</a:t>
                       </a:r>
-                      <a:endParaRPr sz="1350">
-                        <a:solidFill>
-                          <a:srgbClr val="1F2937"/>
-                        </a:solidFill>
-                        <a:latin typeface="微软雅黑" panose="020B0503020204020204" pitchFamily="34" charset="-122"/>
-                        <a:ea typeface="微软雅黑" panose="020B0503020204020204" pitchFamily="34" charset="-122"/>
-                        <a:cs typeface="微软雅黑" panose="020B0503020204020204" pitchFamily="34" charset="-122"/>
-                      </a:endParaRPr>
                     </a:p>
                     <a:p>
                       <a:pPr algn="l"/>
@@ -25985,14 +24718,6 @@
                         </a:rPr>
                         <a:t>极长价格输入</a:t>
                       </a:r>
-                      <a:endParaRPr sz="1350">
-                        <a:solidFill>
-                          <a:srgbClr val="1F2937"/>
-                        </a:solidFill>
-                        <a:latin typeface="微软雅黑" panose="020B0503020204020204" pitchFamily="34" charset="-122"/>
-                        <a:ea typeface="微软雅黑" panose="020B0503020204020204" pitchFamily="34" charset="-122"/>
-                        <a:cs typeface="微软雅黑" panose="020B0503020204020204" pitchFamily="34" charset="-122"/>
-                      </a:endParaRPr>
                     </a:p>
                   </a:txBody>
                   <a:tcPr marL="114300" marR="95250" marT="66675" marB="66675" anchor="ctr">
@@ -26045,14 +24770,6 @@
                         </a:rPr>
                         <a:t>提前检查输入长度和金额范围</a:t>
                       </a:r>
-                      <a:endParaRPr sz="1350">
-                        <a:solidFill>
-                          <a:srgbClr val="1F2937"/>
-                        </a:solidFill>
-                        <a:latin typeface="微软雅黑" panose="020B0503020204020204" pitchFamily="34" charset="-122"/>
-                        <a:ea typeface="微软雅黑" panose="020B0503020204020204" pitchFamily="34" charset="-122"/>
-                        <a:cs typeface="微软雅黑" panose="020B0503020204020204" pitchFamily="34" charset="-122"/>
-                      </a:endParaRPr>
                     </a:p>
                     <a:p>
                       <a:pPr algn="l"/>
@@ -26067,14 +24784,6 @@
                         </a:rPr>
                         <a:t>异常输入不进入保存流程</a:t>
                       </a:r>
-                      <a:endParaRPr sz="1350">
-                        <a:solidFill>
-                          <a:srgbClr val="1F2937"/>
-                        </a:solidFill>
-                        <a:latin typeface="微软雅黑" panose="020B0503020204020204" pitchFamily="34" charset="-122"/>
-                        <a:ea typeface="微软雅黑" panose="020B0503020204020204" pitchFamily="34" charset="-122"/>
-                        <a:cs typeface="微软雅黑" panose="020B0503020204020204" pitchFamily="34" charset="-122"/>
-                      </a:endParaRPr>
                     </a:p>
                   </a:txBody>
                   <a:tcPr marL="114300" marR="95250" marT="66675" marB="66675" anchor="ctr">
@@ -26130,14 +24839,6 @@
                         </a:rPr>
                         <a:t>5000 位价格返回 400 JSON</a:t>
                       </a:r>
-                      <a:endParaRPr sz="1350">
-                        <a:solidFill>
-                          <a:srgbClr val="078657"/>
-                        </a:solidFill>
-                        <a:latin typeface="微软雅黑" panose="020B0503020204020204" pitchFamily="34" charset="-122"/>
-                        <a:ea typeface="微软雅黑" panose="020B0503020204020204" pitchFamily="34" charset="-122"/>
-                        <a:cs typeface="微软雅黑" panose="020B0503020204020204" pitchFamily="34" charset="-122"/>
-                      </a:endParaRPr>
                     </a:p>
                     <a:p>
                       <a:pPr algn="l"/>
@@ -26152,14 +24853,6 @@
                         </a:rPr>
                         <a:t>未新增商品和图片</a:t>
                       </a:r>
-                      <a:endParaRPr sz="1350">
-                        <a:solidFill>
-                          <a:srgbClr val="078657"/>
-                        </a:solidFill>
-                        <a:latin typeface="微软雅黑" panose="020B0503020204020204" pitchFamily="34" charset="-122"/>
-                        <a:ea typeface="微软雅黑" panose="020B0503020204020204" pitchFamily="34" charset="-122"/>
-                        <a:cs typeface="微软雅黑" panose="020B0503020204020204" pitchFamily="34" charset="-122"/>
-                      </a:endParaRPr>
                     </a:p>
                   </a:txBody>
                   <a:tcPr marL="114300" marR="95250" marT="66675" marB="66675" anchor="ctr">
@@ -26215,14 +24908,6 @@
                         </a:rPr>
                         <a:t>AT-043</a:t>
                       </a:r>
-                      <a:endParaRPr sz="1350">
-                        <a:solidFill>
-                          <a:srgbClr val="1F2937"/>
-                        </a:solidFill>
-                        <a:latin typeface="微软雅黑" panose="020B0503020204020204" pitchFamily="34" charset="-122"/>
-                        <a:ea typeface="微软雅黑" panose="020B0503020204020204" pitchFamily="34" charset="-122"/>
-                        <a:cs typeface="微软雅黑" panose="020B0503020204020204" pitchFamily="34" charset="-122"/>
-                      </a:endParaRPr>
                     </a:p>
                   </a:txBody>
                   <a:tcPr marL="114300" marR="95250" marT="66675" marB="66675" anchor="ctr">
@@ -26261,6 +24946,11 @@
                     </a:solidFill>
                   </a:tcPr>
                 </a:tc>
+                <a:extLst>
+                  <a:ext uri="{0D108BD9-81ED-4DB2-BD59-A6C34878D82A}">
+                    <a16:rowId xmlns:a16="http://schemas.microsoft.com/office/drawing/2014/main" val="10001"/>
+                  </a:ext>
+                </a:extLst>
               </a:tr>
               <a:tr h="842010">
                 <a:tc>
@@ -26280,14 +24970,6 @@
                         </a:rPr>
                         <a:t>DEF-002</a:t>
                       </a:r>
-                      <a:endParaRPr sz="1350">
-                        <a:solidFill>
-                          <a:srgbClr val="1F2937"/>
-                        </a:solidFill>
-                        <a:latin typeface="微软雅黑" panose="020B0503020204020204" pitchFamily="34" charset="-122"/>
-                        <a:ea typeface="微软雅黑" panose="020B0503020204020204" pitchFamily="34" charset="-122"/>
-                        <a:cs typeface="微软雅黑" panose="020B0503020204020204" pitchFamily="34" charset="-122"/>
-                      </a:endParaRPr>
                     </a:p>
                     <a:p>
                       <a:pPr algn="l"/>
@@ -26302,14 +24984,6 @@
                         </a:rPr>
                         <a:t>自定义目录图片 404</a:t>
                       </a:r>
-                      <a:endParaRPr sz="1350">
-                        <a:solidFill>
-                          <a:srgbClr val="1F2937"/>
-                        </a:solidFill>
-                        <a:latin typeface="微软雅黑" panose="020B0503020204020204" pitchFamily="34" charset="-122"/>
-                        <a:ea typeface="微软雅黑" panose="020B0503020204020204" pitchFamily="34" charset="-122"/>
-                        <a:cs typeface="微软雅黑" panose="020B0503020204020204" pitchFamily="34" charset="-122"/>
-                      </a:endParaRPr>
                     </a:p>
                   </a:txBody>
                   <a:tcPr marL="114300" marR="95250" marT="66675" marB="66675" anchor="ctr">
@@ -26362,14 +25036,6 @@
                         </a:rPr>
                         <a:t>上传与读取统一使用</a:t>
                       </a:r>
-                      <a:endParaRPr sz="1350">
-                        <a:solidFill>
-                          <a:srgbClr val="1F2937"/>
-                        </a:solidFill>
-                        <a:latin typeface="微软雅黑" panose="020B0503020204020204" pitchFamily="34" charset="-122"/>
-                        <a:ea typeface="微软雅黑" panose="020B0503020204020204" pitchFamily="34" charset="-122"/>
-                        <a:cs typeface="微软雅黑" panose="020B0503020204020204" pitchFamily="34" charset="-122"/>
-                      </a:endParaRPr>
                     </a:p>
                     <a:p>
                       <a:pPr algn="l"/>
@@ -26384,14 +25050,6 @@
                         </a:rPr>
                         <a:t>shopping.upload-dir 配置</a:t>
                       </a:r>
-                      <a:endParaRPr sz="1350">
-                        <a:solidFill>
-                          <a:srgbClr val="1F2937"/>
-                        </a:solidFill>
-                        <a:latin typeface="微软雅黑" panose="020B0503020204020204" pitchFamily="34" charset="-122"/>
-                        <a:ea typeface="微软雅黑" panose="020B0503020204020204" pitchFamily="34" charset="-122"/>
-                        <a:cs typeface="微软雅黑" panose="020B0503020204020204" pitchFamily="34" charset="-122"/>
-                      </a:endParaRPr>
                     </a:p>
                   </a:txBody>
                   <a:tcPr marL="114300" marR="95250" marT="66675" marB="66675" anchor="ctr">
@@ -26447,14 +25105,6 @@
                         </a:rPr>
                         <a:t>图片上传后可以读取</a:t>
                       </a:r>
-                      <a:endParaRPr sz="1350">
-                        <a:solidFill>
-                          <a:srgbClr val="078657"/>
-                        </a:solidFill>
-                        <a:latin typeface="微软雅黑" panose="020B0503020204020204" pitchFamily="34" charset="-122"/>
-                        <a:ea typeface="微软雅黑" panose="020B0503020204020204" pitchFamily="34" charset="-122"/>
-                        <a:cs typeface="微软雅黑" panose="020B0503020204020204" pitchFamily="34" charset="-122"/>
-                      </a:endParaRPr>
                     </a:p>
                     <a:p>
                       <a:pPr algn="l"/>
@@ -26469,14 +25119,6 @@
                         </a:rPr>
                         <a:t>新应用实例仍可读取</a:t>
                       </a:r>
-                      <a:endParaRPr sz="1350">
-                        <a:solidFill>
-                          <a:srgbClr val="078657"/>
-                        </a:solidFill>
-                        <a:latin typeface="微软雅黑" panose="020B0503020204020204" pitchFamily="34" charset="-122"/>
-                        <a:ea typeface="微软雅黑" panose="020B0503020204020204" pitchFamily="34" charset="-122"/>
-                        <a:cs typeface="微软雅黑" panose="020B0503020204020204" pitchFamily="34" charset="-122"/>
-                      </a:endParaRPr>
                     </a:p>
                   </a:txBody>
                   <a:tcPr marL="114300" marR="95250" marT="66675" marB="66675" anchor="ctr">
@@ -26532,14 +25174,6 @@
                         </a:rPr>
                         <a:t>AT-028</a:t>
                       </a:r>
-                      <a:endParaRPr sz="1350">
-                        <a:solidFill>
-                          <a:srgbClr val="1F2937"/>
-                        </a:solidFill>
-                        <a:latin typeface="微软雅黑" panose="020B0503020204020204" pitchFamily="34" charset="-122"/>
-                        <a:ea typeface="微软雅黑" panose="020B0503020204020204" pitchFamily="34" charset="-122"/>
-                        <a:cs typeface="微软雅黑" panose="020B0503020204020204" pitchFamily="34" charset="-122"/>
-                      </a:endParaRPr>
                     </a:p>
                     <a:p>
                       <a:pPr algn="l"/>
@@ -26554,14 +25188,6 @@
                         </a:rPr>
                         <a:t>AT-068</a:t>
                       </a:r>
-                      <a:endParaRPr sz="1350">
-                        <a:solidFill>
-                          <a:srgbClr val="1F2937"/>
-                        </a:solidFill>
-                        <a:latin typeface="微软雅黑" panose="020B0503020204020204" pitchFamily="34" charset="-122"/>
-                        <a:ea typeface="微软雅黑" panose="020B0503020204020204" pitchFamily="34" charset="-122"/>
-                        <a:cs typeface="微软雅黑" panose="020B0503020204020204" pitchFamily="34" charset="-122"/>
-                      </a:endParaRPr>
                     </a:p>
                   </a:txBody>
                   <a:tcPr marL="114300" marR="95250" marT="66675" marB="66675" anchor="ctr">
@@ -26600,6 +25226,11 @@
                     </a:solidFill>
                   </a:tcPr>
                 </a:tc>
+                <a:extLst>
+                  <a:ext uri="{0D108BD9-81ED-4DB2-BD59-A6C34878D82A}">
+                    <a16:rowId xmlns:a16="http://schemas.microsoft.com/office/drawing/2014/main" val="10002"/>
+                  </a:ext>
+                </a:extLst>
               </a:tr>
               <a:tr h="842010">
                 <a:tc>
@@ -26619,14 +25250,6 @@
                         </a:rPr>
                         <a:t>DEF-003</a:t>
                       </a:r>
-                      <a:endParaRPr sz="1350">
-                        <a:solidFill>
-                          <a:srgbClr val="1F2937"/>
-                        </a:solidFill>
-                        <a:latin typeface="微软雅黑" panose="020B0503020204020204" pitchFamily="34" charset="-122"/>
-                        <a:ea typeface="微软雅黑" panose="020B0503020204020204" pitchFamily="34" charset="-122"/>
-                        <a:cs typeface="微软雅黑" panose="020B0503020204020204" pitchFamily="34" charset="-122"/>
-                      </a:endParaRPr>
                     </a:p>
                     <a:p>
                       <a:pPr algn="l"/>
@@ -26641,14 +25264,6 @@
                         </a:rPr>
                         <a:t>并发开始交易 500</a:t>
                       </a:r>
-                      <a:endParaRPr sz="1350">
-                        <a:solidFill>
-                          <a:srgbClr val="1F2937"/>
-                        </a:solidFill>
-                        <a:latin typeface="微软雅黑" panose="020B0503020204020204" pitchFamily="34" charset="-122"/>
-                        <a:ea typeface="微软雅黑" panose="020B0503020204020204" pitchFamily="34" charset="-122"/>
-                        <a:cs typeface="微软雅黑" panose="020B0503020204020204" pitchFamily="34" charset="-122"/>
-                      </a:endParaRPr>
                     </a:p>
                   </a:txBody>
                   <a:tcPr marL="114300" marR="95250" marT="66675" marB="66675" anchor="ctr">
@@ -26701,14 +25316,6 @@
                         </a:rPr>
                         <a:t>锁的保护范围延续到</a:t>
                       </a:r>
-                      <a:endParaRPr sz="1350">
-                        <a:solidFill>
-                          <a:srgbClr val="1F2937"/>
-                        </a:solidFill>
-                        <a:latin typeface="微软雅黑" panose="020B0503020204020204" pitchFamily="34" charset="-122"/>
-                        <a:ea typeface="微软雅黑" panose="020B0503020204020204" pitchFamily="34" charset="-122"/>
-                        <a:cs typeface="微软雅黑" panose="020B0503020204020204" pitchFamily="34" charset="-122"/>
-                      </a:endParaRPr>
                     </a:p>
                     <a:p>
                       <a:pPr algn="l"/>
@@ -26723,14 +25330,6 @@
                         </a:rPr>
                         <a:t>数据库事务提交或回滚完成</a:t>
                       </a:r>
-                      <a:endParaRPr sz="1350">
-                        <a:solidFill>
-                          <a:srgbClr val="1F2937"/>
-                        </a:solidFill>
-                        <a:latin typeface="微软雅黑" panose="020B0503020204020204" pitchFamily="34" charset="-122"/>
-                        <a:ea typeface="微软雅黑" panose="020B0503020204020204" pitchFamily="34" charset="-122"/>
-                        <a:cs typeface="微软雅黑" panose="020B0503020204020204" pitchFamily="34" charset="-122"/>
-                      </a:endParaRPr>
                     </a:p>
                   </a:txBody>
                   <a:tcPr marL="114300" marR="95250" marT="66675" marB="66675" anchor="ctr">
@@ -26786,14 +25385,6 @@
                         </a:rPr>
                         <a:t>并发响应为 200 和 409</a:t>
                       </a:r>
-                      <a:endParaRPr sz="1350">
-                        <a:solidFill>
-                          <a:srgbClr val="078657"/>
-                        </a:solidFill>
-                        <a:latin typeface="微软雅黑" panose="020B0503020204020204" pitchFamily="34" charset="-122"/>
-                        <a:ea typeface="微软雅黑" panose="020B0503020204020204" pitchFamily="34" charset="-122"/>
-                        <a:cs typeface="微软雅黑" panose="020B0503020204020204" pitchFamily="34" charset="-122"/>
-                      </a:endParaRPr>
                     </a:p>
                     <a:p>
                       <a:pPr algn="l"/>
@@ -26808,14 +25399,6 @@
                         </a:rPr>
                         <a:t>只有一位买家进入交易</a:t>
                       </a:r>
-                      <a:endParaRPr sz="1350">
-                        <a:solidFill>
-                          <a:srgbClr val="078657"/>
-                        </a:solidFill>
-                        <a:latin typeface="微软雅黑" panose="020B0503020204020204" pitchFamily="34" charset="-122"/>
-                        <a:ea typeface="微软雅黑" panose="020B0503020204020204" pitchFamily="34" charset="-122"/>
-                        <a:cs typeface="微软雅黑" panose="020B0503020204020204" pitchFamily="34" charset="-122"/>
-                      </a:endParaRPr>
                     </a:p>
                   </a:txBody>
                   <a:tcPr marL="114300" marR="95250" marT="66675" marB="66675" anchor="ctr">
@@ -26871,14 +25454,6 @@
                         </a:rPr>
                         <a:t>AT-075</a:t>
                       </a:r>
-                      <a:endParaRPr sz="1350">
-                        <a:solidFill>
-                          <a:srgbClr val="1F2937"/>
-                        </a:solidFill>
-                        <a:latin typeface="微软雅黑" panose="020B0503020204020204" pitchFamily="34" charset="-122"/>
-                        <a:ea typeface="微软雅黑" panose="020B0503020204020204" pitchFamily="34" charset="-122"/>
-                        <a:cs typeface="微软雅黑" panose="020B0503020204020204" pitchFamily="34" charset="-122"/>
-                      </a:endParaRPr>
                     </a:p>
                     <a:p>
                       <a:pPr algn="l"/>
@@ -26893,14 +25468,6 @@
                         </a:rPr>
                         <a:t>AT-076</a:t>
                       </a:r>
-                      <a:endParaRPr sz="1350">
-                        <a:solidFill>
-                          <a:srgbClr val="1F2937"/>
-                        </a:solidFill>
-                        <a:latin typeface="微软雅黑" panose="020B0503020204020204" pitchFamily="34" charset="-122"/>
-                        <a:ea typeface="微软雅黑" panose="020B0503020204020204" pitchFamily="34" charset="-122"/>
-                        <a:cs typeface="微软雅黑" panose="020B0503020204020204" pitchFamily="34" charset="-122"/>
-                      </a:endParaRPr>
                     </a:p>
                   </a:txBody>
                   <a:tcPr marL="114300" marR="95250" marT="66675" marB="66675" anchor="ctr">
@@ -26939,6 +25506,11 @@
                     </a:solidFill>
                   </a:tcPr>
                 </a:tc>
+                <a:extLst>
+                  <a:ext uri="{0D108BD9-81ED-4DB2-BD59-A6C34878D82A}">
+                    <a16:rowId xmlns:a16="http://schemas.microsoft.com/office/drawing/2014/main" val="10003"/>
+                  </a:ext>
+                </a:extLst>
               </a:tr>
               <a:tr h="842010">
                 <a:tc>
@@ -26958,14 +25530,6 @@
                         </a:rPr>
                         <a:t>DEF-004</a:t>
                       </a:r>
-                      <a:endParaRPr sz="1350">
-                        <a:solidFill>
-                          <a:srgbClr val="1F2937"/>
-                        </a:solidFill>
-                        <a:latin typeface="微软雅黑" panose="020B0503020204020204" pitchFamily="34" charset="-122"/>
-                        <a:ea typeface="微软雅黑" panose="020B0503020204020204" pitchFamily="34" charset="-122"/>
-                        <a:cs typeface="微软雅黑" panose="020B0503020204020204" pitchFamily="34" charset="-122"/>
-                      </a:endParaRPr>
                     </a:p>
                     <a:p>
                       <a:pPr algn="l"/>
@@ -26980,14 +25544,6 @@
                         </a:rPr>
                         <a:t>旧 ID 迁移失败</a:t>
                       </a:r>
-                      <a:endParaRPr sz="1350">
-                        <a:solidFill>
-                          <a:srgbClr val="1F2937"/>
-                        </a:solidFill>
-                        <a:latin typeface="微软雅黑" panose="020B0503020204020204" pitchFamily="34" charset="-122"/>
-                        <a:ea typeface="微软雅黑" panose="020B0503020204020204" pitchFamily="34" charset="-122"/>
-                        <a:cs typeface="微软雅黑" panose="020B0503020204020204" pitchFamily="34" charset="-122"/>
-                      </a:endParaRPr>
                     </a:p>
                   </a:txBody>
                   <a:tcPr marL="114300" marR="95250" marT="66675" marB="66675" anchor="ctr">
@@ -27040,14 +25596,6 @@
                         </a:rPr>
                         <a:t>按原 ID 执行参数化插入</a:t>
                       </a:r>
-                      <a:endParaRPr sz="1350">
-                        <a:solidFill>
-                          <a:srgbClr val="1F2937"/>
-                        </a:solidFill>
-                        <a:latin typeface="微软雅黑" panose="020B0503020204020204" pitchFamily="34" charset="-122"/>
-                        <a:ea typeface="微软雅黑" panose="020B0503020204020204" pitchFamily="34" charset="-122"/>
-                        <a:cs typeface="微软雅黑" panose="020B0503020204020204" pitchFamily="34" charset="-122"/>
-                      </a:endParaRPr>
                     </a:p>
                     <a:p>
                       <a:pPr algn="l"/>
@@ -27062,14 +25610,6 @@
                         </a:rPr>
                         <a:t>保留历史记录与状态</a:t>
                       </a:r>
-                      <a:endParaRPr sz="1350">
-                        <a:solidFill>
-                          <a:srgbClr val="1F2937"/>
-                        </a:solidFill>
-                        <a:latin typeface="微软雅黑" panose="020B0503020204020204" pitchFamily="34" charset="-122"/>
-                        <a:ea typeface="微软雅黑" panose="020B0503020204020204" pitchFamily="34" charset="-122"/>
-                        <a:cs typeface="微软雅黑" panose="020B0503020204020204" pitchFamily="34" charset="-122"/>
-                      </a:endParaRPr>
                     </a:p>
                   </a:txBody>
                   <a:tcPr marL="114300" marR="95250" marT="66675" marB="66675" anchor="ctr">
@@ -27125,14 +25665,6 @@
                         </a:rPr>
                         <a:t>商品 ID 41、意向 ID 73 保留</a:t>
                       </a:r>
-                      <a:endParaRPr sz="1350">
-                        <a:solidFill>
-                          <a:srgbClr val="078657"/>
-                        </a:solidFill>
-                        <a:latin typeface="微软雅黑" panose="020B0503020204020204" pitchFamily="34" charset="-122"/>
-                        <a:ea typeface="微软雅黑" panose="020B0503020204020204" pitchFamily="34" charset="-122"/>
-                        <a:cs typeface="微软雅黑" panose="020B0503020204020204" pitchFamily="34" charset="-122"/>
-                      </a:endParaRPr>
                     </a:p>
                     <a:p>
                       <a:pPr algn="l"/>
@@ -27147,14 +25679,6 @@
                         </a:rPr>
                         <a:t>口令与原 JSON 文件仍存在</a:t>
                       </a:r>
-                      <a:endParaRPr sz="1350">
-                        <a:solidFill>
-                          <a:srgbClr val="078657"/>
-                        </a:solidFill>
-                        <a:latin typeface="微软雅黑" panose="020B0503020204020204" pitchFamily="34" charset="-122"/>
-                        <a:ea typeface="微软雅黑" panose="020B0503020204020204" pitchFamily="34" charset="-122"/>
-                        <a:cs typeface="微软雅黑" panose="020B0503020204020204" pitchFamily="34" charset="-122"/>
-                      </a:endParaRPr>
                     </a:p>
                   </a:txBody>
                   <a:tcPr marL="114300" marR="95250" marT="66675" marB="66675" anchor="ctr">
@@ -27210,14 +25734,6 @@
                         </a:rPr>
                         <a:t>AT-069～071</a:t>
                       </a:r>
-                      <a:endParaRPr sz="1350">
-                        <a:solidFill>
-                          <a:srgbClr val="1F2937"/>
-                        </a:solidFill>
-                        <a:latin typeface="微软雅黑" panose="020B0503020204020204" pitchFamily="34" charset="-122"/>
-                        <a:ea typeface="微软雅黑" panose="020B0503020204020204" pitchFamily="34" charset="-122"/>
-                        <a:cs typeface="微软雅黑" panose="020B0503020204020204" pitchFamily="34" charset="-122"/>
-                      </a:endParaRPr>
                     </a:p>
                   </a:txBody>
                   <a:tcPr marL="114300" marR="95250" marT="66675" marB="66675" anchor="ctr">
@@ -27256,6 +25772,11 @@
                     </a:solidFill>
                   </a:tcPr>
                 </a:tc>
+                <a:extLst>
+                  <a:ext uri="{0D108BD9-81ED-4DB2-BD59-A6C34878D82A}">
+                    <a16:rowId xmlns:a16="http://schemas.microsoft.com/office/drawing/2014/main" val="10004"/>
+                  </a:ext>
+                </a:extLst>
               </a:tr>
             </a:tbl>
           </a:graphicData>
@@ -27415,14 +25936,6 @@
               </a:rPr>
               <a:t>DEF-001 为旧版价格问题的回归，DEF-002～004 为 Java 版缺陷修复记录。</a:t>
             </a:r>
-            <a:endParaRPr sz="1200">
-              <a:solidFill>
-                <a:srgbClr val="64748B"/>
-              </a:solidFill>
-              <a:latin typeface="微软雅黑" panose="020B0503020204020204" pitchFamily="34" charset="-122"/>
-              <a:ea typeface="微软雅黑" panose="020B0503020204020204" pitchFamily="34" charset="-122"/>
-              <a:cs typeface="微软雅黑" panose="020B0503020204020204" pitchFamily="34" charset="-122"/>
-            </a:endParaRPr>
           </a:p>
         </p:txBody>
       </p:sp>
@@ -27605,14 +26118,6 @@
               </a:rPr>
               <a:t>浏览器自动化：17 项网页检查</a:t>
             </a:r>
-            <a:endParaRPr sz="2600" b="1">
-              <a:solidFill>
-                <a:srgbClr val="122D4E"/>
-              </a:solidFill>
-              <a:latin typeface="微软雅黑" panose="020B0503020204020204" pitchFamily="34" charset="-122"/>
-              <a:ea typeface="微软雅黑" panose="020B0503020204020204" pitchFamily="34" charset="-122"/>
-              <a:cs typeface="微软雅黑" panose="020B0503020204020204" pitchFamily="34" charset="-122"/>
-            </a:endParaRPr>
           </a:p>
         </p:txBody>
       </p:sp>
@@ -27770,14 +26275,6 @@
               </a:rPr>
               <a:t>11-4</a:t>
             </a:r>
-            <a:endParaRPr sz="1800" b="1">
-              <a:solidFill>
-                <a:srgbClr val="2563EB"/>
-              </a:solidFill>
-              <a:latin typeface="微软雅黑" panose="020B0503020204020204" pitchFamily="34" charset="-122"/>
-              <a:ea typeface="微软雅黑" panose="020B0503020204020204" pitchFamily="34" charset="-122"/>
-              <a:cs typeface="微软雅黑" panose="020B0503020204020204" pitchFamily="34" charset="-122"/>
-            </a:endParaRPr>
           </a:p>
         </p:txBody>
       </p:sp>
@@ -27960,14 +26457,6 @@
               </a:rPr>
               <a:t>软件工程实践 · 第 2 组 · 在线购物系统</a:t>
             </a:r>
-            <a:endParaRPr sz="900">
-              <a:solidFill>
-                <a:srgbClr val="64748B"/>
-              </a:solidFill>
-              <a:latin typeface="微软雅黑" panose="020B0503020204020204" pitchFamily="34" charset="-122"/>
-              <a:ea typeface="微软雅黑" panose="020B0503020204020204" pitchFamily="34" charset="-122"/>
-              <a:cs typeface="微软雅黑" panose="020B0503020204020204" pitchFamily="34" charset="-122"/>
-            </a:endParaRPr>
           </a:p>
         </p:txBody>
       </p:sp>
@@ -28125,14 +26614,6 @@
               </a:rPr>
               <a:t>Java Selenium 自动驱动 Edge，填写表单并核对页面结果</a:t>
             </a:r>
-            <a:endParaRPr sz="1700" b="1">
-              <a:solidFill>
-                <a:srgbClr val="122D4E"/>
-              </a:solidFill>
-              <a:latin typeface="微软雅黑" panose="020B0503020204020204" pitchFamily="34" charset="-122"/>
-              <a:ea typeface="微软雅黑" panose="020B0503020204020204" pitchFamily="34" charset="-122"/>
-              <a:cs typeface="微软雅黑" panose="020B0503020204020204" pitchFamily="34" charset="-122"/>
-            </a:endParaRPr>
           </a:p>
         </p:txBody>
       </p:sp>
@@ -28145,7 +26626,7 @@
           <p:nvPr/>
         </p:nvPicPr>
         <p:blipFill>
-          <a:blip r:embed="rId1"/>
+          <a:blip r:embed="rId3"/>
           <a:stretch>
             <a:fillRect/>
           </a:stretch>
@@ -28314,14 +26795,6 @@
               </a:rPr>
               <a:t>17 / 17</a:t>
             </a:r>
-            <a:endParaRPr sz="3525" b="1">
-              <a:solidFill>
-                <a:srgbClr val="078657"/>
-              </a:solidFill>
-              <a:latin typeface="微软雅黑" panose="020B0503020204020204" pitchFamily="34" charset="-122"/>
-              <a:ea typeface="微软雅黑" panose="020B0503020204020204" pitchFamily="34" charset="-122"/>
-              <a:cs typeface="微软雅黑" panose="020B0503020204020204" pitchFamily="34" charset="-122"/>
-            </a:endParaRPr>
           </a:p>
         </p:txBody>
       </p:sp>
@@ -28479,14 +26952,6 @@
               </a:rPr>
               <a:t>网页检查通过</a:t>
             </a:r>
-            <a:endParaRPr sz="1650" b="1">
-              <a:solidFill>
-                <a:srgbClr val="122D4E"/>
-              </a:solidFill>
-              <a:latin typeface="微软雅黑" panose="020B0503020204020204" pitchFamily="34" charset="-122"/>
-              <a:ea typeface="微软雅黑" panose="020B0503020204020204" pitchFamily="34" charset="-122"/>
-              <a:cs typeface="微软雅黑" panose="020B0503020204020204" pitchFamily="34" charset="-122"/>
-            </a:endParaRPr>
           </a:p>
         </p:txBody>
       </p:sp>
@@ -28644,14 +27109,6 @@
               </a:rPr>
               <a:t>1. 登录与错误密码</a:t>
             </a:r>
-            <a:endParaRPr sz="1350">
-              <a:solidFill>
-                <a:srgbClr val="1F2937"/>
-              </a:solidFill>
-              <a:latin typeface="微软雅黑" panose="020B0503020204020204" pitchFamily="34" charset="-122"/>
-              <a:ea typeface="微软雅黑" panose="020B0503020204020204" pitchFamily="34" charset="-122"/>
-              <a:cs typeface="微软雅黑" panose="020B0503020204020204" pitchFamily="34" charset="-122"/>
-            </a:endParaRPr>
           </a:p>
         </p:txBody>
       </p:sp>
@@ -28809,14 +27266,6 @@
               </a:rPr>
               <a:t>2. 商品发布与图片加载</a:t>
             </a:r>
-            <a:endParaRPr sz="1350">
-              <a:solidFill>
-                <a:srgbClr val="1F2937"/>
-              </a:solidFill>
-              <a:latin typeface="微软雅黑" panose="020B0503020204020204" pitchFamily="34" charset="-122"/>
-              <a:ea typeface="微软雅黑" panose="020B0503020204020204" pitchFamily="34" charset="-122"/>
-              <a:cs typeface="微软雅黑" panose="020B0503020204020204" pitchFamily="34" charset="-122"/>
-            </a:endParaRPr>
           </a:p>
         </p:txBody>
       </p:sp>
@@ -28974,14 +27423,6 @@
               </a:rPr>
               <a:t>3. 意向提交、口令查询与修改</a:t>
             </a:r>
-            <a:endParaRPr sz="1350">
-              <a:solidFill>
-                <a:srgbClr val="1F2937"/>
-              </a:solidFill>
-              <a:latin typeface="微软雅黑" panose="020B0503020204020204" pitchFamily="34" charset="-122"/>
-              <a:ea typeface="微软雅黑" panose="020B0503020204020204" pitchFamily="34" charset="-122"/>
-              <a:cs typeface="微软雅黑" panose="020B0503020204020204" pitchFamily="34" charset="-122"/>
-            </a:endParaRPr>
           </a:p>
         </p:txBody>
       </p:sp>
@@ -29139,14 +27580,6 @@
               </a:rPr>
               <a:t>4. 冻结、恢复与交易状态</a:t>
             </a:r>
-            <a:endParaRPr sz="1350">
-              <a:solidFill>
-                <a:srgbClr val="1F2937"/>
-              </a:solidFill>
-              <a:latin typeface="微软雅黑" panose="020B0503020204020204" pitchFamily="34" charset="-122"/>
-              <a:ea typeface="微软雅黑" panose="020B0503020204020204" pitchFamily="34" charset="-122"/>
-              <a:cs typeface="微软雅黑" panose="020B0503020204020204" pitchFamily="34" charset="-122"/>
-            </a:endParaRPr>
           </a:p>
         </p:txBody>
       </p:sp>
@@ -29304,14 +27737,6 @@
               </a:rPr>
               <a:t>5. 撤销递补与成交归档</a:t>
             </a:r>
-            <a:endParaRPr sz="1350">
-              <a:solidFill>
-                <a:srgbClr val="1F2937"/>
-              </a:solidFill>
-              <a:latin typeface="微软雅黑" panose="020B0503020204020204" pitchFamily="34" charset="-122"/>
-              <a:ea typeface="微软雅黑" panose="020B0503020204020204" pitchFamily="34" charset="-122"/>
-              <a:cs typeface="微软雅黑" panose="020B0503020204020204" pitchFamily="34" charset="-122"/>
-            </a:endParaRPr>
           </a:p>
         </p:txBody>
       </p:sp>
@@ -29623,14 +28048,6 @@
               </a:rPr>
               <a:t>图示为 2026-10-15 的 v4 网页录屏验证，独立于最终版 84 项接口复测。</a:t>
             </a:r>
-            <a:endParaRPr sz="1200">
-              <a:solidFill>
-                <a:srgbClr val="64748B"/>
-              </a:solidFill>
-              <a:latin typeface="微软雅黑" panose="020B0503020204020204" pitchFamily="34" charset="-122"/>
-              <a:ea typeface="微软雅黑" panose="020B0503020204020204" pitchFamily="34" charset="-122"/>
-              <a:cs typeface="微软雅黑" panose="020B0503020204020204" pitchFamily="34" charset="-122"/>
-            </a:endParaRPr>
           </a:p>
         </p:txBody>
       </p:sp>
@@ -29764,7 +28181,9 @@
         <p:txBody>
           <a:bodyPr/>
           <a:lstStyle/>
-          <a:p/>
+          <a:p>
+            <a:endParaRPr/>
+          </a:p>
         </p:txBody>
       </p:sp>
       <p:sp>
@@ -29866,7 +28285,9 @@
         <p:txBody>
           <a:bodyPr/>
           <a:lstStyle/>
-          <a:p/>
+          <a:p>
+            <a:endParaRPr/>
+          </a:p>
         </p:txBody>
       </p:sp>
       <p:sp>
@@ -29898,12 +28319,6 @@
               </a:rPr>
               <a:t>① 补齐构建配置（Dockerfile），编写 docker-compose.yml 容器化运行系统；</a:t>
             </a:r>
-            <a:endParaRPr sz="1300">
-              <a:solidFill>
-                <a:srgbClr val="1F2937"/>
-              </a:solidFill>
-              <a:latin typeface="微软雅黑" panose="020B0503020204020204" pitchFamily="34" charset="-122"/>
-            </a:endParaRPr>
           </a:p>
         </p:txBody>
       </p:sp>
@@ -29930,7 +28345,9 @@
         <p:txBody>
           <a:bodyPr/>
           <a:lstStyle/>
-          <a:p/>
+          <a:p>
+            <a:endParaRPr/>
+          </a:p>
         </p:txBody>
       </p:sp>
       <p:sp>
@@ -29959,9 +28376,6 @@
               </a:rPr>
               <a:t>② 构建并导出 Docker 镜像包 shopping-system.tar，发布至 Docker Hub 仓库 1.0.0 版本；</a:t>
             </a:r>
-            <a:endParaRPr sz="1300">
-              <a:latin typeface="微软雅黑" panose="020B0503020204020204" pitchFamily="34" charset="-122"/>
-            </a:endParaRPr>
           </a:p>
         </p:txBody>
       </p:sp>
@@ -29988,7 +28402,9 @@
         <p:txBody>
           <a:bodyPr/>
           <a:lstStyle/>
-          <a:p/>
+          <a:p>
+            <a:endParaRPr/>
+          </a:p>
         </p:txBody>
       </p:sp>
       <p:sp>
@@ -30020,12 +28436,6 @@
               </a:rPr>
               <a:t>③ 编写安装部署手册与一键启动脚本 run.sh / run.ps1。</a:t>
             </a:r>
-            <a:endParaRPr sz="1300">
-              <a:solidFill>
-                <a:srgbClr val="1F2937"/>
-              </a:solidFill>
-              <a:latin typeface="微软雅黑" panose="020B0503020204020204" pitchFamily="34" charset="-122"/>
-            </a:endParaRPr>
           </a:p>
         </p:txBody>
       </p:sp>
@@ -30096,7 +28506,9 @@
         <p:txBody>
           <a:bodyPr/>
           <a:lstStyle/>
-          <a:p/>
+          <a:p>
+            <a:endParaRPr/>
+          </a:p>
         </p:txBody>
       </p:sp>
       <p:sp>
@@ -30120,7 +28532,9 @@
         <p:txBody>
           <a:bodyPr/>
           <a:lstStyle/>
-          <a:p/>
+          <a:p>
+            <a:endParaRPr/>
+          </a:p>
         </p:txBody>
       </p:sp>
       <p:sp>
@@ -30324,12 +28738,6 @@
               </a:rPr>
               <a:t>Maven 构建 jar</a:t>
             </a:r>
-            <a:endParaRPr sz="1400" b="1">
-              <a:solidFill>
-                <a:srgbClr val="122D4E"/>
-              </a:solidFill>
-              <a:latin typeface="微软雅黑" panose="020B0503020204020204" pitchFamily="34" charset="-122"/>
-            </a:endParaRPr>
           </a:p>
         </p:txBody>
       </p:sp>
@@ -30365,12 +28773,6 @@
               </a:rPr>
               <a:t>→</a:t>
             </a:r>
-            <a:endParaRPr sz="2000" b="1">
-              <a:solidFill>
-                <a:srgbClr val="64748B"/>
-              </a:solidFill>
-              <a:latin typeface="微软雅黑" panose="020B0503020204020204" pitchFamily="34" charset="-122"/>
-            </a:endParaRPr>
           </a:p>
         </p:txBody>
       </p:sp>
@@ -30425,12 +28827,6 @@
               </a:rPr>
               <a:t>Dockerfile 打包镜像</a:t>
             </a:r>
-            <a:endParaRPr sz="1400" b="1">
-              <a:solidFill>
-                <a:srgbClr val="122D4E"/>
-              </a:solidFill>
-              <a:latin typeface="微软雅黑" panose="020B0503020204020204" pitchFamily="34" charset="-122"/>
-            </a:endParaRPr>
           </a:p>
         </p:txBody>
       </p:sp>
@@ -30466,12 +28862,6 @@
               </a:rPr>
               <a:t>→</a:t>
             </a:r>
-            <a:endParaRPr sz="2000" b="1">
-              <a:solidFill>
-                <a:srgbClr val="64748B"/>
-              </a:solidFill>
-              <a:latin typeface="微软雅黑" panose="020B0503020204020204" pitchFamily="34" charset="-122"/>
-            </a:endParaRPr>
           </a:p>
         </p:txBody>
       </p:sp>
@@ -30526,12 +28916,6 @@
               </a:rPr>
               <a:t>导出 shopping-system.tar</a:t>
             </a:r>
-            <a:endParaRPr sz="1400" b="1">
-              <a:solidFill>
-                <a:srgbClr val="122D4E"/>
-              </a:solidFill>
-              <a:latin typeface="微软雅黑" panose="020B0503020204020204" pitchFamily="34" charset="-122"/>
-            </a:endParaRPr>
           </a:p>
         </p:txBody>
       </p:sp>
@@ -30567,12 +28951,6 @@
               </a:rPr>
               <a:t>→</a:t>
             </a:r>
-            <a:endParaRPr sz="2000" b="1">
-              <a:solidFill>
-                <a:srgbClr val="64748B"/>
-              </a:solidFill>
-              <a:latin typeface="微软雅黑" panose="020B0503020204020204" pitchFamily="34" charset="-122"/>
-            </a:endParaRPr>
           </a:p>
         </p:txBody>
       </p:sp>
@@ -30627,12 +29005,6 @@
               </a:rPr>
               <a:t>docker compose up</a:t>
             </a:r>
-            <a:endParaRPr sz="1400" b="1">
-              <a:solidFill>
-                <a:srgbClr val="FFFFFF"/>
-              </a:solidFill>
-              <a:latin typeface="微软雅黑" panose="020B0503020204020204" pitchFamily="34" charset="-122"/>
-            </a:endParaRPr>
           </a:p>
         </p:txBody>
       </p:sp>
@@ -31917,14 +30289,6 @@
               </a:rPr>
               <a:t>字；</a:t>
             </a:r>
-            <a:endParaRPr lang="zh-CN" altLang="en-US" sz="1320">
-              <a:solidFill>
-                <a:srgbClr val="1F2F41"/>
-              </a:solidFill>
-              <a:latin typeface="微软雅黑" panose="020B0503020204020204" pitchFamily="34" charset="-122"/>
-              <a:ea typeface="微软雅黑" panose="020B0503020204020204" pitchFamily="34" charset="-122"/>
-              <a:cs typeface="微软雅黑" panose="020B0503020204020204" pitchFamily="34" charset="-120"/>
-            </a:endParaRPr>
           </a:p>
           <a:p>
             <a:pPr marL="127000" indent="-127000">
@@ -32014,14 +30378,6 @@
               </a:rPr>
               <a:t>；</a:t>
             </a:r>
-            <a:endParaRPr lang="zh-CN" altLang="en-US" sz="1320">
-              <a:solidFill>
-                <a:srgbClr val="1F2F41"/>
-              </a:solidFill>
-              <a:latin typeface="微软雅黑" panose="020B0503020204020204" pitchFamily="34" charset="-122"/>
-              <a:ea typeface="微软雅黑" panose="020B0503020204020204" pitchFamily="34" charset="-122"/>
-              <a:cs typeface="微软雅黑" panose="020B0503020204020204" pitchFamily="34" charset="-120"/>
-            </a:endParaRPr>
           </a:p>
           <a:p>
             <a:pPr marL="127000" indent="-127000">
@@ -32045,14 +30401,6 @@
               </a:rPr>
               <a:t>浏览器原生约束先拦截无效填写；</a:t>
             </a:r>
-            <a:endParaRPr lang="zh-CN" altLang="en-US" sz="1320">
-              <a:solidFill>
-                <a:srgbClr val="1F2F41"/>
-              </a:solidFill>
-              <a:latin typeface="微软雅黑" panose="020B0503020204020204" pitchFamily="34" charset="-122"/>
-              <a:ea typeface="微软雅黑" panose="020B0503020204020204" pitchFamily="34" charset="-122"/>
-              <a:cs typeface="微软雅黑" panose="020B0503020204020204" pitchFamily="34" charset="-120"/>
-            </a:endParaRPr>
           </a:p>
           <a:p>
             <a:pPr marL="127000" indent="-127000">
@@ -32076,14 +30424,6 @@
               </a:rPr>
               <a:t>提交后沿用口令码查询、修改、撤销流程；</a:t>
             </a:r>
-            <a:endParaRPr lang="zh-CN" altLang="en-US" sz="1320">
-              <a:solidFill>
-                <a:srgbClr val="1F2F41"/>
-              </a:solidFill>
-              <a:latin typeface="微软雅黑" panose="020B0503020204020204" pitchFamily="34" charset="-122"/>
-              <a:ea typeface="微软雅黑" panose="020B0503020204020204" pitchFamily="34" charset="-122"/>
-              <a:cs typeface="微软雅黑" panose="020B0503020204020204" pitchFamily="34" charset="-120"/>
-            </a:endParaRPr>
           </a:p>
           <a:p>
             <a:pPr marL="127000" indent="-127000">
@@ -32330,14 +30670,6 @@
               </a:rPr>
               <a:t>字；</a:t>
             </a:r>
-            <a:endParaRPr lang="zh-CN" altLang="en-US" sz="1320">
-              <a:solidFill>
-                <a:srgbClr val="1F2F41"/>
-              </a:solidFill>
-              <a:latin typeface="微软雅黑" panose="020B0503020204020204" pitchFamily="34" charset="-122"/>
-              <a:ea typeface="微软雅黑" panose="020B0503020204020204" pitchFamily="34" charset="-122"/>
-              <a:cs typeface="微软雅黑" panose="020B0503020204020204" pitchFamily="34" charset="-120"/>
-            </a:endParaRPr>
           </a:p>
           <a:p>
             <a:pPr marL="127000" indent="-127000">
@@ -32405,14 +30737,6 @@
               </a:rPr>
               <a:t>元；</a:t>
             </a:r>
-            <a:endParaRPr lang="zh-CN" altLang="en-US" sz="1320">
-              <a:solidFill>
-                <a:srgbClr val="1F2F41"/>
-              </a:solidFill>
-              <a:latin typeface="微软雅黑" panose="020B0503020204020204" pitchFamily="34" charset="-122"/>
-              <a:ea typeface="微软雅黑" panose="020B0503020204020204" pitchFamily="34" charset="-122"/>
-              <a:cs typeface="微软雅黑" panose="020B0503020204020204" pitchFamily="34" charset="-120"/>
-            </a:endParaRPr>
           </a:p>
           <a:p>
             <a:pPr marL="127000" indent="-127000">
@@ -32480,14 +30804,6 @@
               </a:rPr>
               <a:t>；</a:t>
             </a:r>
-            <a:endParaRPr lang="zh-CN" altLang="en-US" sz="1320">
-              <a:solidFill>
-                <a:srgbClr val="1F2F41"/>
-              </a:solidFill>
-              <a:latin typeface="微软雅黑" panose="020B0503020204020204" pitchFamily="34" charset="-122"/>
-              <a:ea typeface="微软雅黑" panose="020B0503020204020204" pitchFamily="34" charset="-122"/>
-              <a:cs typeface="微软雅黑" panose="020B0503020204020204" pitchFamily="34" charset="-120"/>
-            </a:endParaRPr>
           </a:p>
           <a:p>
             <a:pPr marL="127000" indent="-127000">
@@ -32533,14 +30849,6 @@
               </a:rPr>
               <a:t>位，且同时包含字母和数字；</a:t>
             </a:r>
-            <a:endParaRPr lang="zh-CN" altLang="en-US" sz="1320">
-              <a:solidFill>
-                <a:srgbClr val="1F2F41"/>
-              </a:solidFill>
-              <a:latin typeface="微软雅黑" panose="020B0503020204020204" pitchFamily="34" charset="-122"/>
-              <a:ea typeface="微软雅黑" panose="020B0503020204020204" pitchFamily="34" charset="-122"/>
-              <a:cs typeface="微软雅黑" panose="020B0503020204020204" pitchFamily="34" charset="-120"/>
-            </a:endParaRPr>
           </a:p>
           <a:p>
             <a:pPr marL="127000" indent="-127000">
@@ -32773,12 +31081,6 @@
               </a:rPr>
               <a:t>实际页面</a:t>
             </a:r>
-            <a:endParaRPr lang="zh-CN" altLang="en-US" sz="1600" b="1">
-              <a:solidFill>
-                <a:srgbClr val="14304E"/>
-              </a:solidFill>
-              <a:latin typeface="微软雅黑" panose="020B0503020204020204" pitchFamily="34" charset="-122"/>
-            </a:endParaRPr>
           </a:p>
         </p:txBody>
       </p:sp>
@@ -32853,7 +31155,7 @@
           <p:nvPr/>
         </p:nvPicPr>
         <p:blipFill>
-          <a:blip r:embed="rId1"/>
+          <a:blip r:embed="rId3"/>
           <a:stretch>
             <a:fillRect/>
           </a:stretch>
@@ -32904,12 +31206,6 @@
               </a:rPr>
               <a:t>代码实现</a:t>
             </a:r>
-            <a:endParaRPr lang="zh-CN" altLang="en-US" sz="1600" b="1">
-              <a:solidFill>
-                <a:srgbClr val="14304E"/>
-              </a:solidFill>
-              <a:latin typeface="微软雅黑" panose="020B0503020204020204" pitchFamily="34" charset="-122"/>
-            </a:endParaRPr>
           </a:p>
         </p:txBody>
       </p:sp>
@@ -32952,6 +31248,49 @@
                 <a:latin typeface="微软雅黑" panose="020B0503020204020204" pitchFamily="34" charset="-122"/>
               </a:rPr>
               <a:t>动态生成提交意向表单</a:t>
+            </a:r>
+          </a:p>
+        </p:txBody>
+      </p:sp>
+      <p:sp>
+        <p:nvSpPr>
+          <p:cNvPr id="22" name="文本框 21"/>
+          <p:cNvSpPr txBox="1"/>
+          <p:nvPr/>
+        </p:nvSpPr>
+        <p:spPr>
+          <a:xfrm>
+            <a:off x="7734300" y="2755900"/>
+            <a:ext cx="3911600" cy="276999"/>
+          </a:xfrm>
+          <a:prstGeom prst="rect">
+            <a:avLst/>
+          </a:prstGeom>
+          <a:noFill/>
+        </p:spPr>
+        <p:txBody>
+          <a:bodyPr vert="horz" wrap="square" lIns="0" tIns="0" rIns="0" bIns="0" rtlCol="0">
+            <a:noAutofit/>
+          </a:bodyPr>
+          <a:lstStyle/>
+          <a:p>
+            <a:r>
+              <a:rPr lang="zh-CN" altLang="en-US" sz="1400">
+                <a:solidFill>
+                  <a:srgbClr val="1F2F41"/>
+                </a:solidFill>
+                <a:latin typeface="微软雅黑" panose="020B0503020204020204" pitchFamily="34" charset="-122"/>
+              </a:rPr>
+              <a:t>姓名：</a:t>
+            </a:r>
+            <a:r>
+              <a:rPr lang="en-US" altLang="zh-CN" sz="1400">
+                <a:solidFill>
+                  <a:srgbClr val="1F2F41"/>
+                </a:solidFill>
+                <a:latin typeface="微软雅黑" panose="020B0503020204020204" pitchFamily="34" charset="-122"/>
+              </a:rPr>
+              <a:t>required + maxlength=64</a:t>
             </a:r>
             <a:endParaRPr lang="zh-CN" altLang="en-US" sz="1400">
               <a:solidFill>
@@ -32964,13 +31303,13 @@
       </p:sp>
       <p:sp>
         <p:nvSpPr>
-          <p:cNvPr id="22" name="文本框 21"/>
+          <p:cNvPr id="23" name="文本框 22"/>
           <p:cNvSpPr txBox="1"/>
           <p:nvPr/>
         </p:nvSpPr>
         <p:spPr>
           <a:xfrm>
-            <a:off x="7734300" y="2755900"/>
+            <a:off x="7734300" y="3454400"/>
             <a:ext cx="3911600" cy="276999"/>
           </a:xfrm>
           <a:prstGeom prst="rect">
@@ -32991,7 +31330,7 @@
                 </a:solidFill>
                 <a:latin typeface="微软雅黑" panose="020B0503020204020204" pitchFamily="34" charset="-122"/>
               </a:rPr>
-              <a:t>姓名：</a:t>
+              <a:t>电话：</a:t>
             </a:r>
             <a:r>
               <a:rPr lang="en-US" altLang="zh-CN" sz="1400">
@@ -33000,7 +31339,7 @@
                 </a:solidFill>
                 <a:latin typeface="微软雅黑" panose="020B0503020204020204" pitchFamily="34" charset="-122"/>
               </a:rPr>
-              <a:t>required + maxlength=64</a:t>
+              <a:t>type=tel + required + maxlength=32</a:t>
             </a:r>
             <a:endParaRPr lang="zh-CN" altLang="en-US" sz="1400">
               <a:solidFill>
@@ -33013,14 +31352,14 @@
       </p:sp>
       <p:sp>
         <p:nvSpPr>
-          <p:cNvPr id="23" name="文本框 22"/>
+          <p:cNvPr id="24" name="文本框 23"/>
           <p:cNvSpPr txBox="1"/>
           <p:nvPr/>
         </p:nvSpPr>
         <p:spPr>
           <a:xfrm>
-            <a:off x="7734300" y="3454400"/>
-            <a:ext cx="3911600" cy="276999"/>
+            <a:off x="7734300" y="4292600"/>
+            <a:ext cx="3937000" cy="276999"/>
           </a:xfrm>
           <a:prstGeom prst="rect">
             <a:avLst/>
@@ -33034,41 +31373,35 @@
           <a:lstStyle/>
           <a:p>
             <a:r>
+              <a:rPr lang="en-US" altLang="zh-CN" sz="1400">
+                <a:solidFill>
+                  <a:srgbClr val="1F2F41"/>
+                </a:solidFill>
+                <a:latin typeface="微软雅黑" panose="020B0503020204020204" pitchFamily="34" charset="-122"/>
+              </a:rPr>
+              <a:t>public/index.html </a:t>
+            </a:r>
+            <a:r>
               <a:rPr lang="zh-CN" altLang="en-US" sz="1400">
                 <a:solidFill>
                   <a:srgbClr val="1F2F41"/>
                 </a:solidFill>
                 <a:latin typeface="微软雅黑" panose="020B0503020204020204" pitchFamily="34" charset="-122"/>
               </a:rPr>
-              <a:t>电话：</a:t>
-            </a:r>
-            <a:r>
-              <a:rPr lang="en-US" altLang="zh-CN" sz="1400">
-                <a:solidFill>
-                  <a:srgbClr val="1F2F41"/>
-                </a:solidFill>
-                <a:latin typeface="微软雅黑" panose="020B0503020204020204" pitchFamily="34" charset="-122"/>
-              </a:rPr>
-              <a:t>type=tel + required + maxlength=32</a:t>
-            </a:r>
-            <a:endParaRPr lang="zh-CN" altLang="en-US" sz="1400">
-              <a:solidFill>
-                <a:srgbClr val="1F2F41"/>
-              </a:solidFill>
-              <a:latin typeface="微软雅黑" panose="020B0503020204020204" pitchFamily="34" charset="-122"/>
-            </a:endParaRPr>
-          </a:p>
-        </p:txBody>
-      </p:sp>
-      <p:sp>
-        <p:nvSpPr>
-          <p:cNvPr id="24" name="文本框 23"/>
+              <a:t>的修改表单采用相同长度限制</a:t>
+            </a:r>
+          </a:p>
+        </p:txBody>
+      </p:sp>
+      <p:sp>
+        <p:nvSpPr>
+          <p:cNvPr id="25" name="文本框 24"/>
           <p:cNvSpPr txBox="1"/>
           <p:nvPr/>
         </p:nvSpPr>
         <p:spPr>
           <a:xfrm>
-            <a:off x="7734300" y="4292600"/>
+            <a:off x="7734300" y="5384800"/>
             <a:ext cx="3937000" cy="276999"/>
           </a:xfrm>
           <a:prstGeom prst="rect">
@@ -33083,55 +31416,6 @@
           <a:lstStyle/>
           <a:p>
             <a:r>
-              <a:rPr lang="en-US" altLang="zh-CN" sz="1400">
-                <a:solidFill>
-                  <a:srgbClr val="1F2F41"/>
-                </a:solidFill>
-                <a:latin typeface="微软雅黑" panose="020B0503020204020204" pitchFamily="34" charset="-122"/>
-              </a:rPr>
-              <a:t>public/index.html </a:t>
-            </a:r>
-            <a:r>
-              <a:rPr lang="zh-CN" altLang="en-US" sz="1400">
-                <a:solidFill>
-                  <a:srgbClr val="1F2F41"/>
-                </a:solidFill>
-                <a:latin typeface="微软雅黑" panose="020B0503020204020204" pitchFamily="34" charset="-122"/>
-              </a:rPr>
-              <a:t>的修改表单采用相同长度限制</a:t>
-            </a:r>
-            <a:endParaRPr lang="zh-CN" altLang="en-US" sz="1400">
-              <a:solidFill>
-                <a:srgbClr val="1F2F41"/>
-              </a:solidFill>
-              <a:latin typeface="微软雅黑" panose="020B0503020204020204" pitchFamily="34" charset="-122"/>
-            </a:endParaRPr>
-          </a:p>
-        </p:txBody>
-      </p:sp>
-      <p:sp>
-        <p:nvSpPr>
-          <p:cNvPr id="25" name="文本框 24"/>
-          <p:cNvSpPr txBox="1"/>
-          <p:nvPr/>
-        </p:nvSpPr>
-        <p:spPr>
-          <a:xfrm>
-            <a:off x="7734300" y="5384800"/>
-            <a:ext cx="3937000" cy="276999"/>
-          </a:xfrm>
-          <a:prstGeom prst="rect">
-            <a:avLst/>
-          </a:prstGeom>
-          <a:noFill/>
-        </p:spPr>
-        <p:txBody>
-          <a:bodyPr vert="horz" wrap="square" lIns="0" tIns="0" rIns="0" bIns="0" rtlCol="0">
-            <a:noAutofit/>
-          </a:bodyPr>
-          <a:lstStyle/>
-          <a:p>
-            <a:r>
               <a:rPr lang="zh-CN" altLang="en-US" sz="1200">
                 <a:solidFill>
                   <a:srgbClr val="607084"/>
@@ -33140,12 +31424,6 @@
               </a:rPr>
               <a:t>电话字段未额外加入格式正则</a:t>
             </a:r>
-            <a:endParaRPr lang="zh-CN" altLang="en-US" sz="1200">
-              <a:solidFill>
-                <a:srgbClr val="607084"/>
-              </a:solidFill>
-              <a:latin typeface="微软雅黑" panose="020B0503020204020204" pitchFamily="34" charset="-122"/>
-            </a:endParaRPr>
           </a:p>
         </p:txBody>
       </p:sp>
@@ -33356,12 +31634,6 @@
               </a:rPr>
               <a:t>发布表单</a:t>
             </a:r>
-            <a:endParaRPr lang="zh-CN" altLang="en-US" sz="1600" b="1">
-              <a:solidFill>
-                <a:srgbClr val="14304E"/>
-              </a:solidFill>
-              <a:latin typeface="微软雅黑" panose="020B0503020204020204" pitchFamily="34" charset="-122"/>
-            </a:endParaRPr>
           </a:p>
         </p:txBody>
       </p:sp>
@@ -33436,7 +31708,7 @@
           <p:nvPr/>
         </p:nvPicPr>
         <p:blipFill>
-          <a:blip r:embed="rId1"/>
+          <a:blip r:embed="rId3"/>
           <a:stretch>
             <a:fillRect/>
           </a:stretch>
@@ -33496,12 +31768,6 @@
               </a:rPr>
               <a:t>属性</a:t>
             </a:r>
-            <a:endParaRPr lang="zh-CN" altLang="en-US" sz="1600" b="1">
-              <a:solidFill>
-                <a:srgbClr val="14304E"/>
-              </a:solidFill>
-              <a:latin typeface="微软雅黑" panose="020B0503020204020204" pitchFamily="34" charset="-122"/>
-            </a:endParaRPr>
           </a:p>
         </p:txBody>
       </p:sp>
@@ -33545,12 +31811,6 @@
               </a:rPr>
               <a:t>maxlength=128</a:t>
             </a:r>
-            <a:endParaRPr lang="en-US" altLang="zh-CN" sz="1400">
-              <a:solidFill>
-                <a:srgbClr val="1F2F41"/>
-              </a:solidFill>
-              <a:latin typeface="微软雅黑" panose="020B0503020204020204" pitchFamily="34" charset="-122"/>
-            </a:endParaRPr>
           </a:p>
           <a:p>
             <a:r>
@@ -33638,12 +31898,6 @@
               </a:rPr>
               <a:t>min=0.01</a:t>
             </a:r>
-            <a:endParaRPr lang="en-US" altLang="zh-CN" sz="1400">
-              <a:solidFill>
-                <a:srgbClr val="1F2F41"/>
-              </a:solidFill>
-              <a:latin typeface="微软雅黑" panose="020B0503020204020204" pitchFamily="34" charset="-122"/>
-            </a:endParaRPr>
           </a:p>
           <a:p>
             <a:r>
@@ -33767,12 +32021,6 @@
               </a:rPr>
               <a:t>文件</a:t>
             </a:r>
-            <a:endParaRPr lang="zh-CN" altLang="en-US" sz="1400">
-              <a:solidFill>
-                <a:srgbClr val="1F2F41"/>
-              </a:solidFill>
-              <a:latin typeface="微软雅黑" panose="020B0503020204020204" pitchFamily="34" charset="-122"/>
-            </a:endParaRPr>
           </a:p>
         </p:txBody>
       </p:sp>
@@ -33825,12 +32073,6 @@
               </a:rPr>
               <a:t>还会执行价格与图片校验</a:t>
             </a:r>
-            <a:endParaRPr lang="zh-CN" altLang="en-US" sz="1400">
-              <a:solidFill>
-                <a:srgbClr val="1F2F41"/>
-              </a:solidFill>
-              <a:latin typeface="微软雅黑" panose="020B0503020204020204" pitchFamily="34" charset="-122"/>
-            </a:endParaRPr>
           </a:p>
         </p:txBody>
       </p:sp>
@@ -34041,12 +32283,6 @@
               </a:rPr>
               <a:t>元</a:t>
             </a:r>
-            <a:endParaRPr lang="zh-CN" altLang="en-US" sz="1600" b="1">
-              <a:solidFill>
-                <a:srgbClr val="14304E"/>
-              </a:solidFill>
-              <a:latin typeface="微软雅黑" panose="020B0503020204020204" pitchFamily="34" charset="-122"/>
-            </a:endParaRPr>
           </a:p>
         </p:txBody>
       </p:sp>
@@ -34121,7 +32357,7 @@
           <p:nvPr/>
         </p:nvPicPr>
         <p:blipFill>
-          <a:blip r:embed="rId1"/>
+          <a:blip r:embed="rId3"/>
           <a:stretch>
             <a:fillRect/>
           </a:stretch>
@@ -34148,7 +32384,7 @@
           <p:nvPr/>
         </p:nvPicPr>
         <p:blipFill>
-          <a:blip r:embed="rId2"/>
+          <a:blip r:embed="rId4"/>
           <a:stretch>
             <a:fillRect/>
           </a:stretch>
@@ -34257,12 +32493,6 @@
               </a:rPr>
               <a:t>正则检查整数位与小数位，限制最多两位小数。</a:t>
             </a:r>
-            <a:endParaRPr lang="zh-CN" altLang="en-US" sz="1400">
-              <a:solidFill>
-                <a:srgbClr val="1F2F41"/>
-              </a:solidFill>
-              <a:latin typeface="微软雅黑" panose="020B0503020204020204" pitchFamily="34" charset="-122"/>
-            </a:endParaRPr>
           </a:p>
         </p:txBody>
       </p:sp>
@@ -34351,12 +32581,6 @@
               </a:rPr>
               <a:t>。</a:t>
             </a:r>
-            <a:endParaRPr lang="zh-CN" altLang="en-US" sz="1400">
-              <a:solidFill>
-                <a:srgbClr val="1F2F41"/>
-              </a:solidFill>
-              <a:latin typeface="微软雅黑" panose="020B0503020204020204" pitchFamily="34" charset="-122"/>
-            </a:endParaRPr>
           </a:p>
         </p:txBody>
       </p:sp>
@@ -34463,12 +32687,6 @@
               </a:rPr>
               <a:t>。</a:t>
             </a:r>
-            <a:endParaRPr lang="zh-CN" altLang="en-US" sz="1300">
-              <a:solidFill>
-                <a:srgbClr val="1F2F41"/>
-              </a:solidFill>
-              <a:latin typeface="微软雅黑" panose="020B0503020204020204" pitchFamily="34" charset="-122"/>
-            </a:endParaRPr>
           </a:p>
         </p:txBody>
       </p:sp>
@@ -34661,12 +32879,6 @@
               </a:rPr>
               <a:t>商品图片</a:t>
             </a:r>
-            <a:endParaRPr lang="zh-CN" altLang="en-US" sz="1600" b="1">
-              <a:solidFill>
-                <a:srgbClr val="14304E"/>
-              </a:solidFill>
-              <a:latin typeface="微软雅黑" panose="020B0503020204020204" pitchFamily="34" charset="-122"/>
-            </a:endParaRPr>
           </a:p>
         </p:txBody>
       </p:sp>
@@ -34746,179 +32958,12 @@
               </a:rPr>
               <a:t>上限</a:t>
             </a:r>
-            <a:endParaRPr lang="zh-CN" altLang="en-US" sz="1250">
-              <a:solidFill>
-                <a:srgbClr val="1F2F41"/>
-              </a:solidFill>
-              <a:latin typeface="微软雅黑" panose="020B0503020204020204" pitchFamily="34" charset="-122"/>
-            </a:endParaRPr>
           </a:p>
         </p:txBody>
       </p:sp>
       <p:pic>
         <p:nvPicPr>
           <p:cNvPr id="19" name="图片 18"/>
-          <p:cNvPicPr/>
-          <p:nvPr/>
-        </p:nvPicPr>
-        <p:blipFill>
-          <a:blip r:embed="rId1"/>
-          <a:stretch>
-            <a:fillRect/>
-          </a:stretch>
-        </p:blipFill>
-        <p:spPr>
-          <a:xfrm>
-            <a:off x="1079500" y="2362200"/>
-            <a:ext cx="3175000" cy="952500"/>
-          </a:xfrm>
-          <a:prstGeom prst="rect">
-            <a:avLst/>
-          </a:prstGeom>
-          <a:ln w="9525">
-            <a:solidFill>
-              <a:srgbClr val="D9E5EF"/>
-            </a:solidFill>
-          </a:ln>
-        </p:spPr>
-      </p:pic>
-      <p:pic>
-        <p:nvPicPr>
-          <p:cNvPr id="21" name="图片 20"/>
-          <p:cNvPicPr/>
-          <p:nvPr/>
-        </p:nvPicPr>
-        <p:blipFill>
-          <a:blip r:embed="rId2"/>
-          <a:stretch>
-            <a:fillRect/>
-          </a:stretch>
-        </p:blipFill>
-        <p:spPr>
-          <a:xfrm>
-            <a:off x="800100" y="3403600"/>
-            <a:ext cx="4610100" cy="2921000"/>
-          </a:xfrm>
-          <a:prstGeom prst="rect">
-            <a:avLst/>
-          </a:prstGeom>
-          <a:ln w="9525">
-            <a:solidFill>
-              <a:srgbClr val="D9E5EF"/>
-            </a:solidFill>
-          </a:ln>
-        </p:spPr>
-      </p:pic>
-      <p:sp>
-        <p:nvSpPr>
-          <p:cNvPr id="22" name="文本框 21"/>
-          <p:cNvSpPr txBox="1"/>
-          <p:nvPr/>
-        </p:nvSpPr>
-        <p:spPr>
-          <a:xfrm>
-            <a:off x="6477000" y="1473200"/>
-            <a:ext cx="4635500" cy="276999"/>
-          </a:xfrm>
-          <a:prstGeom prst="rect">
-            <a:avLst/>
-          </a:prstGeom>
-          <a:noFill/>
-        </p:spPr>
-        <p:txBody>
-          <a:bodyPr vert="horz" wrap="square" lIns="0" tIns="0" rIns="0" bIns="0" rtlCol="0">
-            <a:noAutofit/>
-          </a:bodyPr>
-          <a:lstStyle/>
-          <a:p>
-            <a:r>
-              <a:rPr lang="zh-CN" altLang="en-US" sz="1600" b="1">
-                <a:solidFill>
-                  <a:srgbClr val="14304E"/>
-                </a:solidFill>
-                <a:latin typeface="微软雅黑" panose="020B0503020204020204" pitchFamily="34" charset="-122"/>
-              </a:rPr>
-              <a:t>新密码</a:t>
-            </a:r>
-            <a:endParaRPr lang="zh-CN" altLang="en-US" sz="1600" b="1">
-              <a:solidFill>
-                <a:srgbClr val="14304E"/>
-              </a:solidFill>
-              <a:latin typeface="微软雅黑" panose="020B0503020204020204" pitchFamily="34" charset="-122"/>
-            </a:endParaRPr>
-          </a:p>
-        </p:txBody>
-      </p:sp>
-      <p:sp>
-        <p:nvSpPr>
-          <p:cNvPr id="23" name="文本框 22"/>
-          <p:cNvSpPr txBox="1"/>
-          <p:nvPr/>
-        </p:nvSpPr>
-        <p:spPr>
-          <a:xfrm>
-            <a:off x="6477000" y="1879600"/>
-            <a:ext cx="5143500" cy="276999"/>
-          </a:xfrm>
-          <a:prstGeom prst="rect">
-            <a:avLst/>
-          </a:prstGeom>
-          <a:noFill/>
-        </p:spPr>
-        <p:txBody>
-          <a:bodyPr vert="horz" wrap="square" lIns="0" tIns="0" rIns="0" bIns="0" rtlCol="0">
-            <a:noAutofit/>
-          </a:bodyPr>
-          <a:lstStyle/>
-          <a:p>
-            <a:r>
-              <a:rPr lang="en-US" altLang="zh-CN" sz="1250">
-                <a:solidFill>
-                  <a:srgbClr val="1F2F41"/>
-                </a:solidFill>
-                <a:latin typeface="微软雅黑" panose="020B0503020204020204" pitchFamily="34" charset="-122"/>
-              </a:rPr>
-              <a:t>validatePassword() </a:t>
-            </a:r>
-            <a:r>
-              <a:rPr lang="zh-CN" altLang="en-US" sz="1250">
-                <a:solidFill>
-                  <a:srgbClr val="1F2F41"/>
-                </a:solidFill>
-                <a:latin typeface="微软雅黑" panose="020B0503020204020204" pitchFamily="34" charset="-122"/>
-              </a:rPr>
-              <a:t>要求至少 </a:t>
-            </a:r>
-            <a:r>
-              <a:rPr lang="en-US" altLang="zh-CN" sz="1250">
-                <a:solidFill>
-                  <a:srgbClr val="1F2F41"/>
-                </a:solidFill>
-                <a:latin typeface="微软雅黑" panose="020B0503020204020204" pitchFamily="34" charset="-122"/>
-              </a:rPr>
-              <a:t>8 </a:t>
-            </a:r>
-            <a:r>
-              <a:rPr lang="zh-CN" altLang="en-US" sz="1250">
-                <a:solidFill>
-                  <a:srgbClr val="1F2F41"/>
-                </a:solidFill>
-                <a:latin typeface="微软雅黑" panose="020B0503020204020204" pitchFamily="34" charset="-122"/>
-              </a:rPr>
-              <a:t>位，含字母和数字</a:t>
-            </a:r>
-            <a:endParaRPr lang="zh-CN" altLang="en-US" sz="1250">
-              <a:solidFill>
-                <a:srgbClr val="1F2F41"/>
-              </a:solidFill>
-              <a:latin typeface="微软雅黑" panose="020B0503020204020204" pitchFamily="34" charset="-122"/>
-            </a:endParaRPr>
-          </a:p>
-        </p:txBody>
-      </p:sp>
-      <p:pic>
-        <p:nvPicPr>
-          <p:cNvPr id="25" name="图片 24"/>
           <p:cNvPicPr/>
           <p:nvPr/>
         </p:nvPicPr>
@@ -34930,8 +32975,8 @@
         </p:blipFill>
         <p:spPr>
           <a:xfrm>
-            <a:off x="7175500" y="2362200"/>
-            <a:ext cx="2984500" cy="952500"/>
+            <a:off x="1079500" y="2362200"/>
+            <a:ext cx="3175000" cy="952500"/>
           </a:xfrm>
           <a:prstGeom prst="rect">
             <a:avLst/>
@@ -34945,12 +32990,161 @@
       </p:pic>
       <p:pic>
         <p:nvPicPr>
-          <p:cNvPr id="27" name="图片 26"/>
+          <p:cNvPr id="21" name="图片 20"/>
           <p:cNvPicPr/>
           <p:nvPr/>
         </p:nvPicPr>
         <p:blipFill>
           <a:blip r:embed="rId4"/>
+          <a:stretch>
+            <a:fillRect/>
+          </a:stretch>
+        </p:blipFill>
+        <p:spPr>
+          <a:xfrm>
+            <a:off x="800100" y="3403600"/>
+            <a:ext cx="4610100" cy="2921000"/>
+          </a:xfrm>
+          <a:prstGeom prst="rect">
+            <a:avLst/>
+          </a:prstGeom>
+          <a:ln w="9525">
+            <a:solidFill>
+              <a:srgbClr val="D9E5EF"/>
+            </a:solidFill>
+          </a:ln>
+        </p:spPr>
+      </p:pic>
+      <p:sp>
+        <p:nvSpPr>
+          <p:cNvPr id="22" name="文本框 21"/>
+          <p:cNvSpPr txBox="1"/>
+          <p:nvPr/>
+        </p:nvSpPr>
+        <p:spPr>
+          <a:xfrm>
+            <a:off x="6477000" y="1473200"/>
+            <a:ext cx="4635500" cy="276999"/>
+          </a:xfrm>
+          <a:prstGeom prst="rect">
+            <a:avLst/>
+          </a:prstGeom>
+          <a:noFill/>
+        </p:spPr>
+        <p:txBody>
+          <a:bodyPr vert="horz" wrap="square" lIns="0" tIns="0" rIns="0" bIns="0" rtlCol="0">
+            <a:noAutofit/>
+          </a:bodyPr>
+          <a:lstStyle/>
+          <a:p>
+            <a:r>
+              <a:rPr lang="zh-CN" altLang="en-US" sz="1600" b="1">
+                <a:solidFill>
+                  <a:srgbClr val="14304E"/>
+                </a:solidFill>
+                <a:latin typeface="微软雅黑" panose="020B0503020204020204" pitchFamily="34" charset="-122"/>
+              </a:rPr>
+              <a:t>新密码</a:t>
+            </a:r>
+          </a:p>
+        </p:txBody>
+      </p:sp>
+      <p:sp>
+        <p:nvSpPr>
+          <p:cNvPr id="23" name="文本框 22"/>
+          <p:cNvSpPr txBox="1"/>
+          <p:nvPr/>
+        </p:nvSpPr>
+        <p:spPr>
+          <a:xfrm>
+            <a:off x="6477000" y="1879600"/>
+            <a:ext cx="5143500" cy="276999"/>
+          </a:xfrm>
+          <a:prstGeom prst="rect">
+            <a:avLst/>
+          </a:prstGeom>
+          <a:noFill/>
+        </p:spPr>
+        <p:txBody>
+          <a:bodyPr vert="horz" wrap="square" lIns="0" tIns="0" rIns="0" bIns="0" rtlCol="0">
+            <a:noAutofit/>
+          </a:bodyPr>
+          <a:lstStyle/>
+          <a:p>
+            <a:r>
+              <a:rPr lang="en-US" altLang="zh-CN" sz="1250">
+                <a:solidFill>
+                  <a:srgbClr val="1F2F41"/>
+                </a:solidFill>
+                <a:latin typeface="微软雅黑" panose="020B0503020204020204" pitchFamily="34" charset="-122"/>
+              </a:rPr>
+              <a:t>validatePassword() </a:t>
+            </a:r>
+            <a:r>
+              <a:rPr lang="zh-CN" altLang="en-US" sz="1250">
+                <a:solidFill>
+                  <a:srgbClr val="1F2F41"/>
+                </a:solidFill>
+                <a:latin typeface="微软雅黑" panose="020B0503020204020204" pitchFamily="34" charset="-122"/>
+              </a:rPr>
+              <a:t>要求至少 </a:t>
+            </a:r>
+            <a:r>
+              <a:rPr lang="en-US" altLang="zh-CN" sz="1250">
+                <a:solidFill>
+                  <a:srgbClr val="1F2F41"/>
+                </a:solidFill>
+                <a:latin typeface="微软雅黑" panose="020B0503020204020204" pitchFamily="34" charset="-122"/>
+              </a:rPr>
+              <a:t>8 </a:t>
+            </a:r>
+            <a:r>
+              <a:rPr lang="zh-CN" altLang="en-US" sz="1250">
+                <a:solidFill>
+                  <a:srgbClr val="1F2F41"/>
+                </a:solidFill>
+                <a:latin typeface="微软雅黑" panose="020B0503020204020204" pitchFamily="34" charset="-122"/>
+              </a:rPr>
+              <a:t>位，含字母和数字</a:t>
+            </a:r>
+          </a:p>
+        </p:txBody>
+      </p:sp>
+      <p:pic>
+        <p:nvPicPr>
+          <p:cNvPr id="25" name="图片 24"/>
+          <p:cNvPicPr/>
+          <p:nvPr/>
+        </p:nvPicPr>
+        <p:blipFill>
+          <a:blip r:embed="rId5"/>
+          <a:stretch>
+            <a:fillRect/>
+          </a:stretch>
+        </p:blipFill>
+        <p:spPr>
+          <a:xfrm>
+            <a:off x="7175500" y="2362200"/>
+            <a:ext cx="2984500" cy="952500"/>
+          </a:xfrm>
+          <a:prstGeom prst="rect">
+            <a:avLst/>
+          </a:prstGeom>
+          <a:ln w="9525">
+            <a:solidFill>
+              <a:srgbClr val="D9E5EF"/>
+            </a:solidFill>
+          </a:ln>
+        </p:spPr>
+      </p:pic>
+      <p:pic>
+        <p:nvPicPr>
+          <p:cNvPr id="27" name="图片 26"/>
+          <p:cNvPicPr/>
+          <p:nvPr/>
+        </p:nvPicPr>
+        <p:blipFill>
+          <a:blip r:embed="rId6"/>
           <a:stretch>
             <a:fillRect/>
           </a:stretch>
@@ -35159,12 +33353,6 @@
               </a:rPr>
               <a:t>买家查询及修改联系信息</a:t>
             </a:r>
-            <a:endParaRPr lang="zh-CN" altLang="en-US" sz="1600" b="1">
-              <a:solidFill>
-                <a:srgbClr val="14304E"/>
-              </a:solidFill>
-              <a:latin typeface="微软雅黑" panose="020B0503020204020204" pitchFamily="34" charset="-122"/>
-            </a:endParaRPr>
           </a:p>
         </p:txBody>
       </p:sp>
@@ -35175,7 +33363,7 @@
           <p:nvPr/>
         </p:nvPicPr>
         <p:blipFill>
-          <a:blip r:embed="rId1"/>
+          <a:blip r:embed="rId3"/>
           <a:stretch>
             <a:fillRect/>
           </a:stretch>
@@ -35266,12 +33454,6 @@
               </a:rPr>
               <a:t>卖家查看排队结果</a:t>
             </a:r>
-            <a:endParaRPr lang="zh-CN" altLang="en-US" sz="1600" b="1">
-              <a:solidFill>
-                <a:srgbClr val="14304E"/>
-              </a:solidFill>
-              <a:latin typeface="微软雅黑" panose="020B0503020204020204" pitchFamily="34" charset="-122"/>
-            </a:endParaRPr>
           </a:p>
         </p:txBody>
       </p:sp>
@@ -35282,7 +33464,7 @@
           <p:nvPr/>
         </p:nvPicPr>
         <p:blipFill>
-          <a:blip r:embed="rId2"/>
+          <a:blip r:embed="rId4"/>
           <a:stretch>
             <a:fillRect/>
           </a:stretch>
@@ -35342,12 +33524,6 @@
               </a:rPr>
               <a:t>显示更新后的买家信息</a:t>
             </a:r>
-            <a:endParaRPr lang="zh-CN" altLang="en-US" sz="1150">
-              <a:solidFill>
-                <a:srgbClr val="1F2F41"/>
-              </a:solidFill>
-              <a:latin typeface="微软雅黑" panose="020B0503020204020204" pitchFamily="34" charset="-122"/>
-            </a:endParaRPr>
           </a:p>
         </p:txBody>
       </p:sp>
@@ -35379,7 +33555,7 @@
                   <a:srgbClr val="2554D7"/>
                 </a:solidFill>
                 <a:latin typeface="微软雅黑" panose="020B0503020204020204" pitchFamily="34" charset="-122"/>
-                <a:hlinkClick r:id="rId3"/>
+                <a:hlinkClick r:id="rId5"/>
               </a:rPr>
               <a:t>本页是原有业务流程的联调回归；前端演示视频见项目 </a:t>
             </a:r>
@@ -35389,7 +33565,7 @@
                   <a:srgbClr val="2554D7"/>
                 </a:solidFill>
                 <a:latin typeface="微软雅黑" panose="020B0503020204020204" pitchFamily="34" charset="-122"/>
-                <a:hlinkClick r:id="rId3"/>
+                <a:hlinkClick r:id="rId5"/>
               </a:rPr>
               <a:t>Wiki</a:t>
             </a:r>
@@ -35661,6 +33837,8 @@
       </a:bgFillStyleLst>
     </a:fmtScheme>
   </a:themeElements>
+  <a:objectDefaults/>
+  <a:extraClrSchemeLst/>
   <a:extLst>
     <a:ext uri="{05A4C25C-085E-4340-85A3-A5531E510DB2}">
       <thm15:themeFamily xmlns:thm15="http://schemas.microsoft.com/office/thememl/2012/main" name="Office Theme" id="{62F939B6-93AF-4DB8-9C6B-D6C7DFDC589F}" vid="{4A3C46E8-61CC-4603-A589-7422A47A8E4A}"/>
@@ -35941,6 +34119,7 @@
       </a:style>
     </a:lnDef>
   </a:objectDefaults>
+  <a:extraClrSchemeLst/>
   <a:extLst>
     <a:ext uri="{05A4C25C-085E-4340-85A3-A5531E510DB2}">
       <thm15:themeFamily xmlns:thm15="http://schemas.microsoft.com/office/thememl/2012/main" name="Office Theme" id="{62F939B6-93AF-4DB8-9C6B-D6C7DFDC589F}" vid="{4A3C46E8-61CC-4603-A589-7422A47A8E4A}"/>
